--- a/content/W01/D3/slides/C2_W01_D03_half2_STUDENT.pptx
+++ b/content/W01/D3/slides/C2_W01_D03_half2_STUDENT.pptx
@@ -4799,14 +4799,14 @@
       </p:sp>
       <p:pic>
         <p:nvPicPr>
-          <p:cNvPr id="6" name="Picture 5" descr="19989289bf8164c2.png"/>
+          <p:cNvPr id="6" name="Picture 5" descr="acc3484f6f4b8887.png"/>
           <p:cNvPicPr>
             <a:picLocks noChangeAspect="1"/>
           </p:cNvPicPr>
           <p:nvPr/>
         </p:nvPicPr>
         <p:blipFill>
-          <a:blip r:embed="rId2"/>
+          <a:blip r:embed="rId3"/>
           <a:stretch>
             <a:fillRect/>
           </a:stretch>
@@ -6755,14 +6755,14 @@
       </p:sp>
       <p:pic>
         <p:nvPicPr>
-          <p:cNvPr id="6" name="Picture 5" descr="de557965d3d05fb5.png"/>
+          <p:cNvPr id="6" name="Picture 5" descr="9d66a75c7fb370db.png"/>
           <p:cNvPicPr>
             <a:picLocks noChangeAspect="1"/>
           </p:cNvPicPr>
           <p:nvPr/>
         </p:nvPicPr>
         <p:blipFill>
-          <a:blip r:embed="rId2"/>
+          <a:blip r:embed="rId3"/>
           <a:stretch>
             <a:fillRect/>
           </a:stretch>
@@ -9093,14 +9093,14 @@
       </p:sp>
       <p:pic>
         <p:nvPicPr>
-          <p:cNvPr id="6" name="Picture 5" descr="412b2e3af83d8ca0.png"/>
+          <p:cNvPr id="6" name="Picture 5" descr="be7f896996ec44fd.png"/>
           <p:cNvPicPr>
             <a:picLocks noChangeAspect="1"/>
           </p:cNvPicPr>
           <p:nvPr/>
         </p:nvPicPr>
         <p:blipFill>
-          <a:blip r:embed="rId2"/>
+          <a:blip r:embed="rId3"/>
           <a:stretch>
             <a:fillRect/>
           </a:stretch>
@@ -9672,14 +9672,14 @@
       </p:sp>
       <p:pic>
         <p:nvPicPr>
-          <p:cNvPr id="6" name="Picture 5" descr="f16045773d7697fd.png"/>
+          <p:cNvPr id="6" name="Picture 5" descr="4c7c30abb8e74096.png"/>
           <p:cNvPicPr>
             <a:picLocks noChangeAspect="1"/>
           </p:cNvPicPr>
           <p:nvPr/>
         </p:nvPicPr>
         <p:blipFill>
-          <a:blip r:embed="rId2"/>
+          <a:blip r:embed="rId3"/>
           <a:stretch>
             <a:fillRect/>
           </a:stretch>

--- a/content/W01/D3/slides/C2_W01_D03_half2_STUDENT.pptx
+++ b/content/W01/D3/slides/C2_W01_D03_half2_STUDENT.pptx
@@ -4799,7 +4799,7 @@
       </p:sp>
       <p:pic>
         <p:nvPicPr>
-          <p:cNvPr id="6" name="Picture 5" descr="acc3484f6f4b8887.png"/>
+          <p:cNvPr id="6" name="Picture 5" descr="c41f049798268ffe.png"/>
           <p:cNvPicPr>
             <a:picLocks noChangeAspect="1"/>
           </p:cNvPicPr>
@@ -4813,8 +4813,8 @@
         </p:blipFill>
         <p:spPr>
           <a:xfrm>
-            <a:off x="685800" y="2959582"/>
-            <a:ext cx="10820095" cy="705155"/>
+            <a:off x="685800" y="2891761"/>
+            <a:ext cx="10820095" cy="840797"/>
           </a:xfrm>
           <a:prstGeom prst="rect">
             <a:avLst/>
@@ -4829,7 +4829,7 @@
         </p:nvSpPr>
         <p:spPr>
           <a:xfrm>
-            <a:off x="685800" y="3811041"/>
+            <a:off x="685800" y="3878862"/>
             <a:ext cx="10820095" cy="910336"/>
           </a:xfrm>
           <a:prstGeom prst="rect">
@@ -6755,7 +6755,7 @@
       </p:sp>
       <p:pic>
         <p:nvPicPr>
-          <p:cNvPr id="6" name="Picture 5" descr="9d66a75c7fb370db.png"/>
+          <p:cNvPr id="6" name="Picture 5" descr="4d1d2b8fd6b42e1b.png"/>
           <p:cNvPicPr>
             <a:picLocks noChangeAspect="1"/>
           </p:cNvPicPr>
@@ -6769,8 +6769,8 @@
         </p:blipFill>
         <p:spPr>
           <a:xfrm>
-            <a:off x="685800" y="2276193"/>
-            <a:ext cx="10820095" cy="2071933"/>
+            <a:off x="685800" y="2247057"/>
+            <a:ext cx="10820095" cy="2130206"/>
           </a:xfrm>
           <a:prstGeom prst="rect">
             <a:avLst/>
@@ -6785,7 +6785,7 @@
         </p:nvSpPr>
         <p:spPr>
           <a:xfrm>
-            <a:off x="685800" y="4494430"/>
+            <a:off x="685800" y="4523567"/>
             <a:ext cx="10820095" cy="910336"/>
           </a:xfrm>
           <a:prstGeom prst="rect">
@@ -9093,7 +9093,7 @@
       </p:sp>
       <p:pic>
         <p:nvPicPr>
-          <p:cNvPr id="6" name="Picture 5" descr="be7f896996ec44fd.png"/>
+          <p:cNvPr id="6" name="Picture 5" descr="c7ddcaaef32b0146.png"/>
           <p:cNvPicPr>
             <a:picLocks noChangeAspect="1"/>
           </p:cNvPicPr>
@@ -9672,7 +9672,7 @@
       </p:sp>
       <p:pic>
         <p:nvPicPr>
-          <p:cNvPr id="6" name="Picture 5" descr="4c7c30abb8e74096.png"/>
+          <p:cNvPr id="6" name="Picture 5" descr="179bc537abaaaca1.png"/>
           <p:cNvPicPr>
             <a:picLocks noChangeAspect="1"/>
           </p:cNvPicPr>
@@ -9686,8 +9686,8 @@
         </p:blipFill>
         <p:spPr>
           <a:xfrm>
-            <a:off x="685800" y="2236407"/>
-            <a:ext cx="10820095" cy="2496945"/>
+            <a:off x="685800" y="2079328"/>
+            <a:ext cx="10820095" cy="2811103"/>
           </a:xfrm>
           <a:prstGeom prst="rect">
             <a:avLst/>
@@ -9702,7 +9702,7 @@
         </p:nvSpPr>
         <p:spPr>
           <a:xfrm>
-            <a:off x="685800" y="4879656"/>
+            <a:off x="685800" y="5036735"/>
             <a:ext cx="10820095" cy="564896"/>
           </a:xfrm>
           <a:prstGeom prst="rect">

--- a/content/W01/D3/slides/C2_W01_D03_half2_STUDENT.pptx
+++ b/content/W01/D3/slides/C2_W01_D03_half2_STUDENT.pptx
@@ -5229,7 +5229,7 @@
                 </a:solidFill>
                 <a:latin typeface="Georgia"/>
               </a:rPr>
-              <a:t>“Send the reconciliation and the log by five. My analyst checks it tonight.”</a:t>
+              <a:t>“Send the reconciliation and the log before the day closes. My analyst checks it tonight.”</a:t>
             </a:r>
           </a:p>
         </p:txBody>
@@ -5932,7 +5932,7 @@
       </p:sp>
       <p:pic>
         <p:nvPicPr>
-          <p:cNvPr id="9" name="mermaid diagram" descr="423b4cf95e4e117b.png"/>
+          <p:cNvPr id="9" name="mermaid diagram" descr="7899268401913962.png"/>
           <p:cNvPicPr>
             <a:picLocks noChangeAspect="1"/>
           </p:cNvPicPr>
@@ -5947,7 +5947,7 @@
         <p:spPr>
           <a:xfrm>
             <a:off x="530352" y="1956816"/>
-            <a:ext cx="11130991" cy="1547548"/>
+            <a:ext cx="11130991" cy="1043117"/>
           </a:xfrm>
           <a:prstGeom prst="rect">
             <a:avLst/>
@@ -6764,7 +6764,7 @@
       </p:sp>
       <p:pic>
         <p:nvPicPr>
-          <p:cNvPr id="12" name="mermaid diagram" descr="6d102f071eabba83.png"/>
+          <p:cNvPr id="12" name="mermaid diagram" descr="d4242e17dd0e7bf1.png"/>
           <p:cNvPicPr>
             <a:picLocks noChangeAspect="1"/>
           </p:cNvPicPr>
@@ -6778,8 +6778,8 @@
         </p:blipFill>
         <p:spPr>
           <a:xfrm>
-            <a:off x="3424085" y="3195828"/>
-            <a:ext cx="5343525" cy="2586037"/>
+            <a:off x="3695547" y="3195828"/>
+            <a:ext cx="4800600" cy="2328862"/>
           </a:xfrm>
           <a:prstGeom prst="rect">
             <a:avLst/>
@@ -9106,7 +9106,7 @@
                 </a:solidFill>
                 <a:latin typeface="Calibri"/>
               </a:rPr>
-              <a:t>Week 1 Day 3: the reconciliation Anand can audit</a:t>
+              <a:t>Week 1, Day 3. The reconciliation Anand can audit</a:t>
             </a:r>
           </a:p>
         </p:txBody>
@@ -11765,7 +11765,7 @@
                 </a:solidFill>
                 <a:latin typeface="Calibri"/>
               </a:rPr>
-              <a:t>Week 1 Day 3: the reconciliation Anand can audit</a:t>
+              <a:t>Week 1, Day 3. The reconciliation Anand can audit</a:t>
             </a:r>
           </a:p>
         </p:txBody>
@@ -12144,7 +12144,7 @@
       </p:sp>
       <p:pic>
         <p:nvPicPr>
-          <p:cNvPr id="11" name="mermaid diagram" descr="e1c13290219456e0.png"/>
+          <p:cNvPr id="11" name="mermaid diagram" descr="a1b4ae782c2ead99.png"/>
           <p:cNvPicPr>
             <a:picLocks noChangeAspect="1"/>
           </p:cNvPicPr>
@@ -12158,8 +12158,8 @@
         </p:blipFill>
         <p:spPr>
           <a:xfrm>
-            <a:off x="2152497" y="3413760"/>
-            <a:ext cx="7886700" cy="1100137"/>
+            <a:off x="2988316" y="3413760"/>
+            <a:ext cx="6215062" cy="614362"/>
           </a:xfrm>
           <a:prstGeom prst="rect">
             <a:avLst/>
@@ -14045,7 +14045,7 @@
       </p:sp>
       <p:pic>
         <p:nvPicPr>
-          <p:cNvPr id="14" name="mermaid diagram" descr="84310f6268e2ad62.png"/>
+          <p:cNvPr id="14" name="mermaid diagram" descr="d4aa7568b490a150.png"/>
           <p:cNvPicPr>
             <a:picLocks noChangeAspect="1"/>
           </p:cNvPicPr>
@@ -14059,8 +14059,8 @@
         </p:blipFill>
         <p:spPr>
           <a:xfrm>
-            <a:off x="3424085" y="3243072"/>
-            <a:ext cx="5343525" cy="2586037"/>
+            <a:off x="3716978" y="3243072"/>
+            <a:ext cx="4757737" cy="2257425"/>
           </a:xfrm>
           <a:prstGeom prst="rect">
             <a:avLst/>
@@ -15078,7 +15078,7 @@
                 </a:solidFill>
                 <a:latin typeface="Calibri"/>
               </a:rPr>
-              <a:t>Week 1 Day 3: the reconciliation Anand can audit</a:t>
+              <a:t>Week 1, Day 3. The reconciliation Anand can audit</a:t>
             </a:r>
           </a:p>
         </p:txBody>
@@ -18319,7 +18319,7 @@
       </p:sp>
       <p:pic>
         <p:nvPicPr>
-          <p:cNvPr id="9" name="mermaid diagram" descr="ba0e9ab613d50080.png"/>
+          <p:cNvPr id="9" name="mermaid diagram" descr="e1edfac1a48cfc9c.png"/>
           <p:cNvPicPr>
             <a:picLocks noChangeAspect="1"/>
           </p:cNvPicPr>
@@ -18333,8 +18333,8 @@
         </p:blipFill>
         <p:spPr>
           <a:xfrm>
-            <a:off x="780897" y="1956816"/>
-            <a:ext cx="10629900" cy="2786062"/>
+            <a:off x="1316678" y="1956816"/>
+            <a:ext cx="9558337" cy="1800225"/>
           </a:xfrm>
           <a:prstGeom prst="rect">
             <a:avLst/>
@@ -20619,7 +20619,7 @@
                 </a:solidFill>
                 <a:latin typeface="Calibri"/>
               </a:rPr>
-              <a:t>Week 1 Day 3: the reconciliation Anand can audit</a:t>
+              <a:t>Week 1, Day 3. The reconciliation Anand can audit</a:t>
             </a:r>
           </a:p>
         </p:txBody>
@@ -21940,7 +21940,7 @@
       </p:sp>
       <p:pic>
         <p:nvPicPr>
-          <p:cNvPr id="9" name="mermaid diagram" descr="eef6138c8c8408a9.png"/>
+          <p:cNvPr id="9" name="mermaid diagram" descr="2d6ba8a20c9c7241.png"/>
           <p:cNvPicPr>
             <a:picLocks noChangeAspect="1"/>
           </p:cNvPicPr>
@@ -21954,8 +21954,8 @@
         </p:blipFill>
         <p:spPr>
           <a:xfrm>
-            <a:off x="780897" y="1956816"/>
-            <a:ext cx="10629900" cy="1357312"/>
+            <a:off x="738035" y="1956816"/>
+            <a:ext cx="10715625" cy="871537"/>
           </a:xfrm>
           <a:prstGeom prst="rect">
             <a:avLst/>
@@ -21970,7 +21970,7 @@
         </p:nvSpPr>
         <p:spPr>
           <a:xfrm>
-            <a:off x="530352" y="3460432"/>
+            <a:off x="530352" y="2974657"/>
             <a:ext cx="11130991" cy="862584"/>
           </a:xfrm>
           <a:prstGeom prst="roundRect">
@@ -22024,7 +22024,7 @@
         </p:nvSpPr>
         <p:spPr>
           <a:xfrm>
-            <a:off x="758952" y="3663124"/>
+            <a:off x="758952" y="3177349"/>
             <a:ext cx="457200" cy="457200"/>
           </a:xfrm>
           <a:prstGeom prst="ellipse">
@@ -22076,7 +22076,7 @@
         </p:blipFill>
         <p:spPr>
           <a:xfrm>
-            <a:off x="868680" y="3772852"/>
+            <a:off x="868680" y="3287077"/>
             <a:ext cx="237744" cy="237744"/>
           </a:xfrm>
           <a:prstGeom prst="rect">
@@ -22092,7 +22092,7 @@
         </p:nvSpPr>
         <p:spPr>
           <a:xfrm>
-            <a:off x="1399031" y="3606736"/>
+            <a:off x="1399031" y="3120961"/>
             <a:ext cx="9987991" cy="160401"/>
           </a:xfrm>
           <a:prstGeom prst="rect">
@@ -22127,7 +22127,7 @@
         </p:nvSpPr>
         <p:spPr>
           <a:xfrm>
-            <a:off x="1399031" y="3826192"/>
+            <a:off x="1399031" y="3340417"/>
             <a:ext cx="9987991" cy="423672"/>
           </a:xfrm>
           <a:prstGeom prst="rect">
@@ -23164,7 +23164,7 @@
                 </a:solidFill>
                 <a:latin typeface="Calibri"/>
               </a:rPr>
-              <a:t>Week 1 Day 3: the reconciliation Anand can audit</a:t>
+              <a:t>Week 1, Day 3. The reconciliation Anand can audit</a:t>
             </a:r>
           </a:p>
         </p:txBody>

--- a/content/W01/D3/slides/C2_W01_D03_half2_STUDENT.pptx
+++ b/content/W01/D3/slides/C2_W01_D03_half2_STUDENT.pptx
@@ -752,7 +752,7 @@
           <a:lstStyle/>
           <a:p>
             <a:r>
-              <a:t>LIVE, 3 minutes. Notebook 06 asserts the replay equals the clean file.</a:t>
+              <a:t>LIVE, 2 minutes. Notebook 06 asserts the replay equals the clean file.</a:t>
             </a:r>
           </a:p>
         </p:txBody>
@@ -822,7 +822,7 @@
           <a:lstStyle/>
           <a:p>
             <a:r>
-              <a:t>LIVE, 2 minutes. One breath: set aside, not dropped; the rule, the twin, the rupees by segment,</a:t>
+              <a:t>LIVE, 2 minutes. One breath: set aside with a reason, never dropped; the rule, the twin, the rupees by segment,</a:t>
             </a:r>
           </a:p>
           <a:p>
@@ -2507,7 +2507,7 @@
           <a:lstStyle/>
           <a:p>
             <a:r>
-              <a:t>LIVE, 3 minutes. The decisions log has five lines; only the identity rule moves Q1 rupees, all</a:t>
+              <a:t>LIVE, 2 minutes. The decisions log has five lines; only the identity rule moves Q1 rupees, all</a:t>
             </a:r>
           </a:p>
           <a:p>
@@ -14096,7 +14096,7 @@
         <p:spPr>
           <a:xfrm>
             <a:off x="530352" y="676656"/>
-            <a:ext cx="11130991" cy="512064"/>
+            <a:ext cx="10033711" cy="512064"/>
           </a:xfrm>
           <a:prstGeom prst="rect">
             <a:avLst/>
@@ -14124,7 +14124,62 @@
       </p:sp>
       <p:sp>
         <p:nvSpPr>
-          <p:cNvPr id="8" name="TextBox 7"/>
+          <p:cNvPr id="8" name="Rounded Rectangle 7"/>
+          <p:cNvSpPr/>
+          <p:nvPr/>
+        </p:nvSpPr>
+        <p:spPr>
+          <a:xfrm>
+            <a:off x="10701223" y="822960"/>
+            <a:ext cx="960120" cy="256032"/>
+          </a:xfrm>
+          <a:prstGeom prst="roundRect">
+            <a:avLst>
+              <a:gd name="adj" fmla="val 50000"/>
+            </a:avLst>
+          </a:prstGeom>
+          <a:solidFill>
+            <a:srgbClr val="1A0F5C"/>
+          </a:solidFill>
+          <a:ln>
+            <a:noFill/>
+          </a:ln>
+          <a:effectLst/>
+        </p:spPr>
+        <p:style>
+          <a:lnRef idx="1">
+            <a:schemeClr val="accent1"/>
+          </a:lnRef>
+          <a:fillRef idx="3">
+            <a:schemeClr val="accent1"/>
+          </a:fillRef>
+          <a:effectRef idx="2">
+            <a:schemeClr val="accent1"/>
+          </a:effectRef>
+          <a:fontRef idx="minor">
+            <a:schemeClr val="lt1"/>
+          </a:fontRef>
+        </p:style>
+        <p:txBody>
+          <a:bodyPr rtlCol="0" anchor="ctr" wrap="none" lIns="25400" rIns="25400" tIns="0" bIns="0"/>
+          <a:lstStyle/>
+          <a:p>
+            <a:pPr algn="ctr"/>
+            <a:r>
+              <a:rPr sz="800" b="1" spc="200">
+                <a:solidFill>
+                  <a:srgbClr val="FFFFFF"/>
+                </a:solidFill>
+                <a:latin typeface="Calibri"/>
+              </a:rPr>
+              <a:t>DEPTH</a:t>
+            </a:r>
+          </a:p>
+        </p:txBody>
+      </p:sp>
+      <p:sp>
+        <p:nvSpPr>
+          <p:cNvPr id="9" name="TextBox 8"/>
           <p:cNvSpPr txBox="1"/>
           <p:nvPr/>
         </p:nvSpPr>
@@ -14159,7 +14214,7 @@
       </p:sp>
       <p:sp>
         <p:nvSpPr>
-          <p:cNvPr id="9" name="TextBox 8"/>
+          <p:cNvPr id="10" name="TextBox 9"/>
           <p:cNvSpPr txBox="1"/>
           <p:nvPr/>
         </p:nvSpPr>
@@ -14194,7 +14249,7 @@
       </p:sp>
       <p:sp>
         <p:nvSpPr>
-          <p:cNvPr id="10" name="TextBox 9"/>
+          <p:cNvPr id="11" name="TextBox 10"/>
           <p:cNvSpPr txBox="1"/>
           <p:nvPr/>
         </p:nvSpPr>
@@ -14229,7 +14284,7 @@
       </p:sp>
       <p:sp>
         <p:nvSpPr>
-          <p:cNvPr id="11" name="TextBox 10"/>
+          <p:cNvPr id="12" name="TextBox 11"/>
           <p:cNvSpPr txBox="1"/>
           <p:nvPr/>
         </p:nvSpPr>
@@ -14264,7 +14319,7 @@
       </p:sp>
       <p:sp>
         <p:nvSpPr>
-          <p:cNvPr id="12" name="Rectangle 11"/>
+          <p:cNvPr id="13" name="Rectangle 12"/>
           <p:cNvSpPr/>
           <p:nvPr/>
         </p:nvSpPr>
@@ -14308,7 +14363,7 @@
       </p:sp>
       <p:sp>
         <p:nvSpPr>
-          <p:cNvPr id="13" name="TextBox 12"/>
+          <p:cNvPr id="14" name="TextBox 13"/>
           <p:cNvSpPr txBox="1"/>
           <p:nvPr/>
         </p:nvSpPr>
@@ -14343,7 +14398,7 @@
       </p:sp>
       <p:sp>
         <p:nvSpPr>
-          <p:cNvPr id="14" name="TextBox 13"/>
+          <p:cNvPr id="15" name="TextBox 14"/>
           <p:cNvSpPr txBox="1"/>
           <p:nvPr/>
         </p:nvSpPr>
@@ -14378,7 +14433,7 @@
       </p:sp>
       <p:sp>
         <p:nvSpPr>
-          <p:cNvPr id="15" name="TextBox 14"/>
+          <p:cNvPr id="16" name="TextBox 15"/>
           <p:cNvSpPr txBox="1"/>
           <p:nvPr/>
         </p:nvSpPr>
@@ -14413,7 +14468,7 @@
       </p:sp>
       <p:sp>
         <p:nvSpPr>
-          <p:cNvPr id="16" name="Rectangle 15"/>
+          <p:cNvPr id="17" name="Rectangle 16"/>
           <p:cNvSpPr/>
           <p:nvPr/>
         </p:nvSpPr>
@@ -14457,7 +14512,7 @@
       </p:sp>
       <p:sp>
         <p:nvSpPr>
-          <p:cNvPr id="17" name="TextBox 16"/>
+          <p:cNvPr id="18" name="TextBox 17"/>
           <p:cNvSpPr txBox="1"/>
           <p:nvPr/>
         </p:nvSpPr>
@@ -14492,7 +14547,7 @@
       </p:sp>
       <p:sp>
         <p:nvSpPr>
-          <p:cNvPr id="18" name="TextBox 17"/>
+          <p:cNvPr id="19" name="TextBox 18"/>
           <p:cNvSpPr txBox="1"/>
           <p:nvPr/>
         </p:nvSpPr>
@@ -14527,7 +14582,7 @@
       </p:sp>
       <p:sp>
         <p:nvSpPr>
-          <p:cNvPr id="19" name="TextBox 18"/>
+          <p:cNvPr id="20" name="TextBox 19"/>
           <p:cNvSpPr txBox="1"/>
           <p:nvPr/>
         </p:nvSpPr>
@@ -14562,7 +14617,7 @@
       </p:sp>
       <p:sp>
         <p:nvSpPr>
-          <p:cNvPr id="20" name="Rectangle 19"/>
+          <p:cNvPr id="21" name="Rectangle 20"/>
           <p:cNvSpPr/>
           <p:nvPr/>
         </p:nvSpPr>
@@ -14606,7 +14661,7 @@
       </p:sp>
       <p:sp>
         <p:nvSpPr>
-          <p:cNvPr id="21" name="TextBox 20"/>
+          <p:cNvPr id="22" name="TextBox 21"/>
           <p:cNvSpPr txBox="1"/>
           <p:nvPr/>
         </p:nvSpPr>
@@ -14641,7 +14696,7 @@
       </p:sp>
       <p:sp>
         <p:nvSpPr>
-          <p:cNvPr id="22" name="TextBox 21"/>
+          <p:cNvPr id="23" name="TextBox 22"/>
           <p:cNvSpPr txBox="1"/>
           <p:nvPr/>
         </p:nvSpPr>
@@ -14676,7 +14731,7 @@
       </p:sp>
       <p:sp>
         <p:nvSpPr>
-          <p:cNvPr id="23" name="TextBox 22"/>
+          <p:cNvPr id="24" name="TextBox 23"/>
           <p:cNvSpPr txBox="1"/>
           <p:nvPr/>
         </p:nvSpPr>
@@ -14711,7 +14766,7 @@
       </p:sp>
       <p:sp>
         <p:nvSpPr>
-          <p:cNvPr id="24" name="Rectangle 23"/>
+          <p:cNvPr id="25" name="Rectangle 24"/>
           <p:cNvSpPr/>
           <p:nvPr/>
         </p:nvSpPr>
@@ -14755,7 +14810,7 @@
       </p:sp>
       <p:sp>
         <p:nvSpPr>
-          <p:cNvPr id="25" name="Oval 24"/>
+          <p:cNvPr id="26" name="Oval 25"/>
           <p:cNvSpPr/>
           <p:nvPr/>
         </p:nvSpPr>
@@ -14799,7 +14854,7 @@
       </p:sp>
       <p:sp>
         <p:nvSpPr>
-          <p:cNvPr id="26" name="TextBox 25"/>
+          <p:cNvPr id="27" name="TextBox 26"/>
           <p:cNvSpPr txBox="1"/>
           <p:nvPr/>
         </p:nvSpPr>
@@ -14834,7 +14889,7 @@
       </p:sp>
       <p:sp>
         <p:nvSpPr>
-          <p:cNvPr id="27" name="Oval 26"/>
+          <p:cNvPr id="28" name="Oval 27"/>
           <p:cNvSpPr/>
           <p:nvPr/>
         </p:nvSpPr>
@@ -14878,7 +14933,7 @@
       </p:sp>
       <p:sp>
         <p:nvSpPr>
-          <p:cNvPr id="28" name="TextBox 27"/>
+          <p:cNvPr id="29" name="TextBox 28"/>
           <p:cNvSpPr txBox="1"/>
           <p:nvPr/>
         </p:nvSpPr>
@@ -14913,7 +14968,7 @@
       </p:sp>
       <p:sp>
         <p:nvSpPr>
-          <p:cNvPr id="29" name="Oval 28"/>
+          <p:cNvPr id="30" name="Oval 29"/>
           <p:cNvSpPr/>
           <p:nvPr/>
         </p:nvSpPr>
@@ -14957,7 +15012,7 @@
       </p:sp>
       <p:sp>
         <p:nvSpPr>
-          <p:cNvPr id="30" name="TextBox 29"/>
+          <p:cNvPr id="31" name="TextBox 30"/>
           <p:cNvSpPr txBox="1"/>
           <p:nvPr/>
         </p:nvSpPr>
@@ -14992,7 +15047,7 @@
       </p:sp>
       <p:sp>
         <p:nvSpPr>
-          <p:cNvPr id="31" name="Oval 30"/>
+          <p:cNvPr id="32" name="Oval 31"/>
           <p:cNvSpPr/>
           <p:nvPr/>
         </p:nvSpPr>
@@ -15036,7 +15091,7 @@
       </p:sp>
       <p:sp>
         <p:nvSpPr>
-          <p:cNvPr id="32" name="TextBox 31"/>
+          <p:cNvPr id="33" name="TextBox 32"/>
           <p:cNvSpPr txBox="1"/>
           <p:nvPr/>
         </p:nvSpPr>
@@ -15071,7 +15126,7 @@
       </p:sp>
       <p:sp>
         <p:nvSpPr>
-          <p:cNvPr id="33" name="Oval 32"/>
+          <p:cNvPr id="34" name="Oval 33"/>
           <p:cNvSpPr/>
           <p:nvPr/>
         </p:nvSpPr>
@@ -15115,7 +15170,7 @@
       </p:sp>
       <p:sp>
         <p:nvSpPr>
-          <p:cNvPr id="34" name="TextBox 33"/>
+          <p:cNvPr id="35" name="TextBox 34"/>
           <p:cNvSpPr txBox="1"/>
           <p:nvPr/>
         </p:nvSpPr>
@@ -15150,7 +15205,7 @@
       </p:sp>
       <p:sp>
         <p:nvSpPr>
-          <p:cNvPr id="35" name="Oval 34"/>
+          <p:cNvPr id="36" name="Oval 35"/>
           <p:cNvSpPr/>
           <p:nvPr/>
         </p:nvSpPr>
@@ -15194,7 +15249,7 @@
       </p:sp>
       <p:sp>
         <p:nvSpPr>
-          <p:cNvPr id="36" name="TextBox 35"/>
+          <p:cNvPr id="37" name="TextBox 36"/>
           <p:cNvSpPr txBox="1"/>
           <p:nvPr/>
         </p:nvSpPr>
@@ -15229,7 +15284,7 @@
       </p:sp>
       <p:sp>
         <p:nvSpPr>
-          <p:cNvPr id="37" name="TextBox 36"/>
+          <p:cNvPr id="38" name="TextBox 37"/>
           <p:cNvSpPr txBox="1"/>
           <p:nvPr/>
         </p:nvSpPr>
@@ -15257,7 +15312,7 @@
                 </a:solidFill>
                 <a:latin typeface="Calibri"/>
               </a:rPr>
-              <a:t>S13  ·  16 / 31</a:t>
+              <a:t>D13  ·  16 / 31</a:t>
             </a:r>
           </a:p>
         </p:txBody>
@@ -20655,7 +20710,7 @@
                 </a:solidFill>
                 <a:latin typeface="Calibri"/>
               </a:rPr>
-              <a:t>As a letter? a) 14 Q1 rows were deleted as errors; b) the dashboard was right and the books are short; c) 14 Q1 rows are second copies set aside by the order_id rule, and rows and rupees reconcile; d) the 14 rows were outliers.</a:t>
+              <a:t>As a letter? a) 14 Q1 rows were deleted as errors; b) the dashboard was right and the books are short; c) 14 Q1 rows are copies of kept orders, set aside by the order_id rule, and rows and rupees reconcile; d) the 14 rows were outliers.</a:t>
             </a:r>
           </a:p>
         </p:txBody>
@@ -26445,7 +26500,7 @@
                 </a:solidFill>
                 <a:latin typeface="Georgia"/>
               </a:rPr>
-              <a:t>"Your 1.9 crore is right: the export counted fifteen rows twice, and the bridge from 2.1 closes to your books in rows and in rupees. On clean data the drop is 1.6 percent and the Retail-Plus fall is 35 percent, smaller than we reported."</a:t>
+              <a:t>"Your 1.9 crore is right: the export counted fifteen orders twice, and the bridge from 2.1 closes to your books in rows and in rupees. On clean data the drop is 1.6 percent and the Retail-Plus fall is 35 percent, smaller than we reported."</a:t>
             </a:r>
           </a:p>
           <a:p>
@@ -28428,7 +28483,7 @@
                 </a:solidFill>
                 <a:latin typeface="Calibri"/>
               </a:rPr>
-              <a:t>control totals, export to books</a:t>
+              <a:t>control totals: counts and sums at both ends</a:t>
             </a:r>
           </a:p>
         </p:txBody>
@@ -31792,7 +31847,7 @@
                 </a:solidFill>
                 <a:latin typeface="Calibri"/>
               </a:rPr>
-              <a:t>A UK cafe chain's accounting hole reached £94m; the auditor was fined.</a:t>
+              <a:t>A UK cafe chain's accounting hole reached GBP 94m; the auditor was fined.</a:t>
             </a:r>
           </a:p>
         </p:txBody>
@@ -31827,7 +31882,7 @@
                 </a:solidFill>
                 <a:latin typeface="Georgia"/>
               </a:rPr>
-              <a:t>£94m</a:t>
+              <a:t>GBP 94m</a:t>
             </a:r>
           </a:p>
         </p:txBody>
@@ -31976,7 +32031,7 @@
                 </a:solidFill>
                 <a:latin typeface="Georgia"/>
               </a:rPr>
-              <a:t>£4m</a:t>
+              <a:t>GBP 4m</a:t>
             </a:r>
           </a:p>
         </p:txBody>
@@ -32046,7 +32101,7 @@
                 </a:solidFill>
                 <a:latin typeface="Calibri"/>
               </a:rPr>
-              <a:t>reduced to £2.34m</a:t>
+              <a:t>reduced to GBP 2.34m</a:t>
             </a:r>
           </a:p>
         </p:txBody>
@@ -33783,11 +33838,11 @@
         <p:spPr>
           <a:xfrm>
             <a:off x="530352" y="3889248"/>
-            <a:ext cx="11130991" cy="862584"/>
+            <a:ext cx="11130991" cy="807720"/>
           </a:xfrm>
           <a:prstGeom prst="roundRect">
             <a:avLst>
-              <a:gd name="adj" fmla="val 5000"/>
+              <a:gd name="adj" fmla="val 8000"/>
             </a:avLst>
           </a:prstGeom>
           <a:solidFill>
@@ -33798,13 +33853,7 @@
               <a:srgbClr val="E4E1F1"/>
             </a:solidFill>
           </a:ln>
-          <a:effectLst>
-            <a:outerShdw blurRad="76200" dist="19050" dir="5400000" algn="bl" rotWithShape="0">
-              <a:srgbClr val="1A0F5C">
-                <a:alpha val="12000"/>
-              </a:srgbClr>
-            </a:outerShdw>
-          </a:effectLst>
+          <a:effectLst/>
         </p:spPr>
         <p:style>
           <a:lnRef idx="1">
@@ -33830,17 +33879,19 @@
       </p:sp>
       <p:sp>
         <p:nvSpPr>
-          <p:cNvPr id="11" name="Oval 10"/>
+          <p:cNvPr id="11" name="Rounded Rectangle 10"/>
           <p:cNvSpPr/>
           <p:nvPr/>
         </p:nvSpPr>
         <p:spPr>
           <a:xfrm>
-            <a:off x="758952" y="4091940"/>
-            <a:ext cx="457200" cy="457200"/>
-          </a:xfrm>
-          <a:prstGeom prst="ellipse">
-            <a:avLst/>
+            <a:off x="676656" y="4017263"/>
+            <a:ext cx="45720" cy="551688"/>
+          </a:xfrm>
+          <a:prstGeom prst="roundRect">
+            <a:avLst>
+              <a:gd name="adj" fmla="val 50000"/>
+            </a:avLst>
           </a:prstGeom>
           <a:solidFill>
             <a:srgbClr val="5B3FD6"/>
@@ -33872,87 +33923,37 @@
           </a:p>
         </p:txBody>
       </p:sp>
-      <p:pic>
-        <p:nvPicPr>
-          <p:cNvPr id="12" name="Picture 11" descr="search-check_6571e64a041f.png"/>
-          <p:cNvPicPr>
-            <a:picLocks noChangeAspect="1"/>
-          </p:cNvPicPr>
-          <p:nvPr/>
-        </p:nvPicPr>
-        <p:blipFill>
-          <a:blip r:embed="rId4"/>
-          <a:stretch>
-            <a:fillRect/>
-          </a:stretch>
-        </p:blipFill>
-        <p:spPr>
-          <a:xfrm>
-            <a:off x="868680" y="4201668"/>
-            <a:ext cx="237744" cy="237744"/>
-          </a:xfrm>
-          <a:prstGeom prst="rect">
-            <a:avLst/>
-          </a:prstGeom>
-        </p:spPr>
-      </p:pic>
-      <p:sp>
-        <p:nvSpPr>
-          <p:cNvPr id="13" name="TextBox 12"/>
-          <p:cNvSpPr txBox="1"/>
-          <p:nvPr/>
-        </p:nvSpPr>
-        <p:spPr>
-          <a:xfrm>
-            <a:off x="1399031" y="4035552"/>
-            <a:ext cx="9987991" cy="160401"/>
-          </a:xfrm>
-          <a:prstGeom prst="rect">
-            <a:avLst/>
-          </a:prstGeom>
-          <a:noFill/>
-        </p:spPr>
-        <p:txBody>
-          <a:bodyPr wrap="square" anchor="t" lIns="0" rIns="0" tIns="0" bIns="0">
-            <a:spAutoFit/>
-          </a:bodyPr>
-          <a:lstStyle/>
-          <a:p>
-            <a:pPr algn="l"/>
-            <a:r>
-              <a:rPr sz="750" b="1" i="0" spc="250">
+      <p:sp>
+        <p:nvSpPr>
+          <p:cNvPr id="12" name="TextBox 11"/>
+          <p:cNvSpPr txBox="1"/>
+          <p:nvPr/>
+        </p:nvSpPr>
+        <p:spPr>
+          <a:xfrm>
+            <a:off x="877824" y="4008119"/>
+            <a:ext cx="10564063" cy="624840"/>
+          </a:xfrm>
+          <a:prstGeom prst="rect">
+            <a:avLst/>
+          </a:prstGeom>
+          <a:noFill/>
+        </p:spPr>
+        <p:txBody>
+          <a:bodyPr wrap="square" anchor="ctr" lIns="0" rIns="0" tIns="0" bIns="0">
+            <a:spAutoFit/>
+          </a:bodyPr>
+          <a:lstStyle/>
+          <a:p>
+            <a:r>
+              <a:rPr sz="1500" b="1">
                 <a:solidFill>
                   <a:srgbClr val="5B3FD6"/>
                 </a:solidFill>
                 <a:latin typeface="Calibri"/>
               </a:rPr>
-              <a:t>KAVYA'S REVIEW</a:t>
-            </a:r>
-          </a:p>
-        </p:txBody>
-      </p:sp>
-      <p:sp>
-        <p:nvSpPr>
-          <p:cNvPr id="14" name="TextBox 13"/>
-          <p:cNvSpPr txBox="1"/>
-          <p:nvPr/>
-        </p:nvSpPr>
-        <p:spPr>
-          <a:xfrm>
-            <a:off x="1399031" y="4255008"/>
-            <a:ext cx="9987991" cy="423672"/>
-          </a:xfrm>
-          <a:prstGeom prst="rect">
-            <a:avLst/>
-          </a:prstGeom>
-          <a:noFill/>
-        </p:spPr>
-        <p:txBody>
-          <a:bodyPr wrap="square" anchor="t" lIns="0" rIns="0" tIns="0" bIns="0">
-            <a:spAutoFit/>
-          </a:bodyPr>
-          <a:lstStyle/>
-          <a:p>
+              <a:t>The call. </a:t>
+            </a:r>
             <a:r>
               <a:rPr sz="1500" b="0" i="0">
                 <a:solidFill>
@@ -33967,7 +33968,7 @@
       </p:sp>
       <p:sp>
         <p:nvSpPr>
-          <p:cNvPr id="15" name="Oval 14"/>
+          <p:cNvPr id="13" name="Oval 12"/>
           <p:cNvSpPr/>
           <p:nvPr/>
         </p:nvSpPr>
@@ -34011,7 +34012,7 @@
       </p:sp>
       <p:sp>
         <p:nvSpPr>
-          <p:cNvPr id="16" name="TextBox 15"/>
+          <p:cNvPr id="14" name="TextBox 13"/>
           <p:cNvSpPr txBox="1"/>
           <p:nvPr/>
         </p:nvSpPr>
@@ -34046,7 +34047,7 @@
       </p:sp>
       <p:sp>
         <p:nvSpPr>
-          <p:cNvPr id="17" name="Oval 16"/>
+          <p:cNvPr id="15" name="Oval 14"/>
           <p:cNvSpPr/>
           <p:nvPr/>
         </p:nvSpPr>
@@ -34090,7 +34091,7 @@
       </p:sp>
       <p:sp>
         <p:nvSpPr>
-          <p:cNvPr id="18" name="TextBox 17"/>
+          <p:cNvPr id="16" name="TextBox 15"/>
           <p:cNvSpPr txBox="1"/>
           <p:nvPr/>
         </p:nvSpPr>
@@ -34125,7 +34126,7 @@
       </p:sp>
       <p:sp>
         <p:nvSpPr>
-          <p:cNvPr id="19" name="Oval 18"/>
+          <p:cNvPr id="17" name="Oval 16"/>
           <p:cNvSpPr/>
           <p:nvPr/>
         </p:nvSpPr>
@@ -34169,7 +34170,7 @@
       </p:sp>
       <p:sp>
         <p:nvSpPr>
-          <p:cNvPr id="20" name="TextBox 19"/>
+          <p:cNvPr id="18" name="TextBox 17"/>
           <p:cNvSpPr txBox="1"/>
           <p:nvPr/>
         </p:nvSpPr>
@@ -34204,7 +34205,7 @@
       </p:sp>
       <p:sp>
         <p:nvSpPr>
-          <p:cNvPr id="21" name="Oval 20"/>
+          <p:cNvPr id="19" name="Oval 18"/>
           <p:cNvSpPr/>
           <p:nvPr/>
         </p:nvSpPr>
@@ -34248,7 +34249,7 @@
       </p:sp>
       <p:sp>
         <p:nvSpPr>
-          <p:cNvPr id="22" name="TextBox 21"/>
+          <p:cNvPr id="20" name="TextBox 19"/>
           <p:cNvSpPr txBox="1"/>
           <p:nvPr/>
         </p:nvSpPr>
@@ -34283,7 +34284,7 @@
       </p:sp>
       <p:sp>
         <p:nvSpPr>
-          <p:cNvPr id="23" name="Oval 22"/>
+          <p:cNvPr id="21" name="Oval 20"/>
           <p:cNvSpPr/>
           <p:nvPr/>
         </p:nvSpPr>
@@ -34327,7 +34328,7 @@
       </p:sp>
       <p:sp>
         <p:nvSpPr>
-          <p:cNvPr id="24" name="TextBox 23"/>
+          <p:cNvPr id="22" name="TextBox 21"/>
           <p:cNvSpPr txBox="1"/>
           <p:nvPr/>
         </p:nvSpPr>
@@ -34362,7 +34363,7 @@
       </p:sp>
       <p:sp>
         <p:nvSpPr>
-          <p:cNvPr id="25" name="Oval 24"/>
+          <p:cNvPr id="23" name="Oval 22"/>
           <p:cNvSpPr/>
           <p:nvPr/>
         </p:nvSpPr>
@@ -34406,7 +34407,7 @@
       </p:sp>
       <p:sp>
         <p:nvSpPr>
-          <p:cNvPr id="26" name="TextBox 25"/>
+          <p:cNvPr id="24" name="TextBox 23"/>
           <p:cNvSpPr txBox="1"/>
           <p:nvPr/>
         </p:nvSpPr>
@@ -34441,7 +34442,7 @@
       </p:sp>
       <p:sp>
         <p:nvSpPr>
-          <p:cNvPr id="27" name="TextBox 26"/>
+          <p:cNvPr id="25" name="TextBox 24"/>
           <p:cNvSpPr txBox="1"/>
           <p:nvPr/>
         </p:nvSpPr>

--- a/content/W01/D3/slides/C2_W01_D03_half2_STUDENT.pptx
+++ b/content/W01/D3/slides/C2_W01_D03_half2_STUDENT.pptx
@@ -15588,7 +15588,7 @@
                 </a:solidFill>
                 <a:latin typeface="Calibri"/>
               </a:rPr>
-              <a:t>Fifteen minutes on the numbers the room produced, each traced to the step that made it.</a:t>
+              <a:t>Every wrong number traced to the step that made it and the check that catches it.</a:t>
             </a:r>
           </a:p>
         </p:txBody>
@@ -17611,7 +17611,7 @@
       </p:sp>
       <p:pic>
         <p:nvPicPr>
-          <p:cNvPr id="12" name="Picture 11" descr="search-check_6571e64a041f.png"/>
+          <p:cNvPr id="12" name="Picture 11" descr="list-checks_bd88901d2a37.png"/>
           <p:cNvPicPr>
             <a:picLocks noChangeAspect="1"/>
           </p:cNvPicPr>
@@ -17663,7 +17663,7 @@
                 </a:solidFill>
                 <a:latin typeface="Calibri"/>
               </a:rPr>
-              <a:t>KAVYA'S REVIEW</a:t>
+              <a:t>THE RULE</a:t>
             </a:r>
           </a:p>
         </p:txBody>
@@ -20710,7 +20710,7 @@
                 </a:solidFill>
                 <a:latin typeface="Calibri"/>
               </a:rPr>
-              <a:t>As a letter? a) 14 Q1 rows were deleted as errors; b) the dashboard was right and the books are short; c) 14 Q1 rows are copies of kept orders, set aside by the order_id rule, and rows and rupees reconcile; d) the 14 rows were outliers.</a:t>
+              <a:t>As a letter? a) 14 Q1 rows were deleted as errors after the migration check; b) the dashboard was right all along, and the books are short; c) 14 Q1 rows are copies of kept orders, set aside by rule, and both totals tie; d) the 14 rows were outliers removed to keep Q1 in line with Q2.</a:t>
             </a:r>
           </a:p>
         </p:txBody>
@@ -22036,7 +22036,7 @@
       </p:sp>
       <p:pic>
         <p:nvPicPr>
-          <p:cNvPr id="23" name="Picture 22" descr="search-check_6571e64a041f.png"/>
+          <p:cNvPr id="23" name="Picture 22" descr="list-checks_bd88901d2a37.png"/>
           <p:cNvPicPr>
             <a:picLocks noChangeAspect="1"/>
           </p:cNvPicPr>
@@ -22088,7 +22088,7 @@
                 </a:solidFill>
                 <a:latin typeface="Calibri"/>
               </a:rPr>
-              <a:t>KAVYA'S REVIEW</a:t>
+              <a:t>THE RULE</a:t>
             </a:r>
           </a:p>
         </p:txBody>
@@ -33259,11 +33259,11 @@
                 <a:tableStyleId>{2D5ABB26-0587-4C30-8999-92F81FD0307C}</a:tableStyleId>
               </a:tblPr>
               <a:tblGrid>
-                <a:gridCol w="4157476"/>
+                <a:gridCol w="5098215"/>
                 <a:gridCol w="914400"/>
-                <a:gridCol w="1857927"/>
-                <a:gridCol w="2181482"/>
-                <a:gridCol w="2019704"/>
+                <a:gridCol w="1569465"/>
+                <a:gridCol w="1842784"/>
+                <a:gridCol w="1706125"/>
               </a:tblGrid>
               <a:tr h="335280">
                 <a:tc>
@@ -33390,7 +33390,7 @@
                           </a:solidFill>
                           <a:latin typeface="Calibri"/>
                         </a:rPr>
-                        <a:t>a) The clean file alone</a:t>
+                        <a:t>a) The clean file, read against the raw</a:t>
                       </a:r>
                     </a:p>
                   </a:txBody>
@@ -33792,7 +33792,7 @@
                           </a:solidFill>
                           <a:latin typeface="Calibri"/>
                         </a:rPr>
-                        <a:t>no</a:t>
+                        <a:t>by hand</a:t>
                       </a:r>
                     </a:p>
                   </a:txBody>

--- a/content/W01/D3/slides/C2_W01_D03_half2_STUDENT.pptx
+++ b/content/W01/D3/slides/C2_W01_D03_half2_STUDENT.pptx
@@ -20710,7 +20710,7 @@
                 </a:solidFill>
                 <a:latin typeface="Calibri"/>
               </a:rPr>
-              <a:t>As a letter? a) 14 Q1 rows were deleted as errors after the migration check; b) the dashboard was right all along, and the books are short; c) 14 Q1 rows are copies of kept orders, set aside by rule, and both totals tie; d) the 14 rows were outliers removed to keep Q1 in line with Q2.</a:t>
+              <a:t>As a letter? a) 14 Q1 rows were deleted as errors after the migration was checked; b) the dashboard was right all along, and the books are short; c) 14 Q1 rows are copies of kept orders, set aside by rule; both totals tie; d) the 14 rows were outliers removed to keep Q1 in line with Q2.</a:t>
             </a:r>
           </a:p>
         </p:txBody>

--- a/content/W01/D3/slides/C2_W01_D03_half2_STUDENT.pptx
+++ b/content/W01/D3/slides/C2_W01_D03_half2_STUDENT.pptx
@@ -2432,7 +2432,7 @@
           <a:lstStyle/>
           <a:p>
             <a:r>
-              <a:t>LIVE, 5 minutes. 23 lines: 15 set-aside rows, 1 flag, 5 decisions, 2 control totals, and an empty</a:t>
+              <a:t>LIVE, 5 minutes. 24 lines: 15 set-aside rows, 2 flags (the status and the bulk order), 5 decisions, 2 control totals, and an empty</a:t>
             </a:r>
           </a:p>
           <a:p>
@@ -33434,7 +33434,7 @@
                           </a:solidFill>
                           <a:latin typeface="Calibri"/>
                         </a:rPr>
-                        <a:t>no</a:t>
+                        <a:t>by hand</a:t>
                       </a:r>
                     </a:p>
                   </a:txBody>
@@ -33636,7 +33636,7 @@
                           </a:solidFill>
                           <a:latin typeface="Calibri"/>
                         </a:rPr>
-                        <a:t>23</a:t>
+                        <a:t>24</a:t>
                       </a:r>
                     </a:p>
                   </a:txBody>
@@ -36650,7 +36650,7 @@
                 </a:solidFill>
                 <a:latin typeface="Calibri"/>
               </a:rPr>
-              <a:t>57 rows flagged or kept</a:t>
+              <a:t>58 rows flagged or kept</a:t>
             </a:r>
           </a:p>
         </p:txBody>

--- a/content/W01/D3/slides/C2_W01_D03_half2_STUDENT.pptx
+++ b/content/W01/D3/slides/C2_W01_D03_half2_STUDENT.pptx
@@ -972,17 +972,17 @@
           <a:lstStyle/>
           <a:p>
             <a:r>
-              <a:t>LIVE, 3 minutes. Eight notebook letters, ten brief letters, then the note in under 120 words.</a:t>
-            </a:r>
-          </a:p>
-          <a:p>
-            <a:r>
-              <a:t>Watch for rows totalled before profiling, a first-copy dedupe, and a bridge that closes to 1.9</a:t>
-            </a:r>
-          </a:p>
-          <a:p>
-            <a:r>
-              <a:t>only after rounding.</a:t>
+              <a:t>LIVE, 3 minutes. Nine notebook letters, ten brief letters, then the note in under 120 words. Watch</a:t>
+            </a:r>
+          </a:p>
+          <a:p>
+            <a:r>
+              <a:t>for rows totalled before profiling, a first-copy rule, a rupee test that rounds, and a tree whose</a:t>
+            </a:r>
+          </a:p>
+          <a:p>
+            <a:r>
+              <a:t>customers are rows.</a:t>
             </a:r>
           </a:p>
         </p:txBody>
@@ -1052,12 +1052,17 @@
           <a:lstStyle/>
           <a:p>
             <a:r>
-              <a:t>SELF-STUDY, reference while working. A Q1 of Rs 1,89,98,210 kept the wrong copy; a Q2 of</a:t>
-            </a:r>
-          </a:p>
-          <a:p>
-            <a:r>
-              <a:t>Rs 1,57,54,540 removed the bulk order. Both are debriefed next.</a:t>
+              <a:t>SELF-STUDY, reference while working. Each check recomputes its step another way, so the numbers are</a:t>
+            </a:r>
+          </a:p>
+          <a:p>
+            <a:r>
+              <a:t>the learner's to reach. A Q1 Rs 1,790 short kept the wrong copy; a Q2 Rs 29,45,460 light removed</a:t>
+            </a:r>
+          </a:p>
+          <a:p>
+            <a:r>
+              <a:t>the bulk order. Both are debriefed next.</a:t>
             </a:r>
           </a:p>
         </p:txBody>
@@ -1342,12 +1347,7 @@
           <a:lstStyle/>
           <a:p>
             <a:r>
-              <a:t>LIVE. Thirty minutes. Notebook C2_W01_D03_06_audit_logs is the demonstration. Say it is chapter 6:</a:t>
-            </a:r>
-          </a:p>
-          <a:p>
-            <a:r>
-              <a:t>the numeral on screen reads 01 because it opens this deck.</a:t>
+              <a:t>LIVE. Thirty minutes. Notebook C2_W01_D03_06_audit_logs is the demonstration.</a:t>
             </a:r>
           </a:p>
         </p:txBody>
@@ -1855,6 +1855,11 @@
               <a:t>LIVE, 10 minutes. The design questions want a choice, a sizing and the fact that would change it.</a:t>
             </a:r>
           </a:p>
+          <a:p>
+            <a:r>
+              <a:t>The row's five and these seven are the day's twelve, the same twelve the study notes answer.</a:t>
+            </a:r>
+          </a:p>
         </p:txBody>
       </p:sp>
       <p:sp>
@@ -2282,12 +2287,12 @@
           <a:lstStyle/>
           <a:p>
             <a:r>
-              <a:t>SELF-STUDY, 3 minutes. Week 2 Tuesday meets the gateway case, where one order carries two payment</a:t>
-            </a:r>
-          </a:p>
-          <a:p>
-            <a:r>
-              <a:t>rows and the rupees double.</a:t>
+              <a:t>SELF-STUDY, 3 minutes. Each trade runs the same two checks: rows prove nothing vanished, and money</a:t>
+            </a:r>
+          </a:p>
+          <a:p>
+            <a:r>
+              <a:t>proves the right rows stayed.</a:t>
             </a:r>
           </a:p>
         </p:txBody>
@@ -2357,12 +2362,12 @@
           <a:lstStyle/>
           <a:p>
             <a:r>
-              <a:t>LIVE, 2 minutes. Sources checked 30 Sep 2026: BBC News, 15 March 2019; FRC, 27 September 2021. The</a:t>
-            </a:r>
-          </a:p>
-          <a:p>
-            <a:r>
-              <a:t>criminal case against individuals is unresolved, so name no person and say nobody was convicted.</a:t>
+              <a:t>LIVE, 2 minutes. Sources checked 30 Sep 2026: BBC News, 15 March 2019; FRC, 27 September 2021.</a:t>
+            </a:r>
+          </a:p>
+          <a:p>
+            <a:r>
+              <a:t>Name no person.</a:t>
             </a:r>
           </a:p>
         </p:txBody>
@@ -6723,7 +6728,7 @@
       </p:sp>
       <p:pic>
         <p:nvPicPr>
-          <p:cNvPr id="9" name="mermaid diagram" descr="07259466d0a819f6.png"/>
+          <p:cNvPr id="9" name="mermaid diagram" descr="404dcb4c97e4ddd9.png"/>
           <p:cNvPicPr>
             <a:picLocks noChangeAspect="1"/>
           </p:cNvPicPr>
@@ -6737,8 +6742,8 @@
         </p:blipFill>
         <p:spPr>
           <a:xfrm>
-            <a:off x="2152497" y="1956816"/>
-            <a:ext cx="7886700" cy="2786062"/>
+            <a:off x="2316803" y="1956816"/>
+            <a:ext cx="7558087" cy="1543050"/>
           </a:xfrm>
           <a:prstGeom prst="rect">
             <a:avLst/>
@@ -6753,7 +6758,7 @@
         </p:nvSpPr>
         <p:spPr>
           <a:xfrm>
-            <a:off x="530352" y="4889182"/>
+            <a:off x="530352" y="3646170"/>
             <a:ext cx="11130991" cy="807720"/>
           </a:xfrm>
           <a:prstGeom prst="roundRect">
@@ -6801,7 +6806,7 @@
         </p:nvSpPr>
         <p:spPr>
           <a:xfrm>
-            <a:off x="676656" y="5017198"/>
+            <a:off x="676656" y="3774186"/>
             <a:ext cx="45720" cy="551688"/>
           </a:xfrm>
           <a:prstGeom prst="roundRect">
@@ -6847,7 +6852,7 @@
         </p:nvSpPr>
         <p:spPr>
           <a:xfrm>
-            <a:off x="877824" y="5008054"/>
+            <a:off x="877824" y="3765042"/>
             <a:ext cx="10564063" cy="624840"/>
           </a:xfrm>
           <a:prstGeom prst="rect">
@@ -7627,7 +7632,7 @@
                 </a:solidFill>
                 <a:latin typeface="Calibri"/>
               </a:rPr>
-              <a:t>Convert inside the identity rule; then every Q1 row set aside has a kept twin.</a:t>
+              <a:t>The rule first, then conversion; every Q1 row set aside has a kept twin.</a:t>
             </a:r>
           </a:p>
         </p:txBody>
@@ -8211,7 +8216,7 @@
                 </a:solidFill>
                 <a:latin typeface="Calibri"/>
               </a:rPr>
-              <a:t>The Rs 1,790 order is back, the rejects log is empty, and "set aside with a reason" replaces "dropped".</a:t>
+              <a:t>The Rs 1,790 order is back; the unreadable copy sits in the set-aside log with its twin named, so the rejects log is empty; and "set aside with a reason" replaces "dropped".</a:t>
             </a:r>
           </a:p>
         </p:txBody>
@@ -8968,7 +8973,7 @@
       </p:sp>
       <p:pic>
         <p:nvPicPr>
-          <p:cNvPr id="9" name="mermaid diagram" descr="56dc8baed6c1cc53.png"/>
+          <p:cNvPr id="9" name="mermaid diagram" descr="d6e137f0dc9d5238.png"/>
           <p:cNvPicPr>
             <a:picLocks noChangeAspect="1"/>
           </p:cNvPicPr>
@@ -8982,8 +8987,8 @@
         </p:blipFill>
         <p:spPr>
           <a:xfrm>
-            <a:off x="780897" y="1956816"/>
-            <a:ext cx="10629900" cy="1357312"/>
+            <a:off x="1402403" y="1956816"/>
+            <a:ext cx="9386887" cy="1128712"/>
           </a:xfrm>
           <a:prstGeom prst="rect">
             <a:avLst/>
@@ -8998,7 +9003,7 @@
         </p:nvSpPr>
         <p:spPr>
           <a:xfrm>
-            <a:off x="530352" y="3460432"/>
+            <a:off x="530352" y="3231832"/>
             <a:ext cx="11130991" cy="807720"/>
           </a:xfrm>
           <a:prstGeom prst="roundRect">
@@ -9046,7 +9051,7 @@
         </p:nvSpPr>
         <p:spPr>
           <a:xfrm>
-            <a:off x="676656" y="3588448"/>
+            <a:off x="676656" y="3359848"/>
             <a:ext cx="45720" cy="551688"/>
           </a:xfrm>
           <a:prstGeom prst="roundRect">
@@ -9092,7 +9097,7 @@
         </p:nvSpPr>
         <p:spPr>
           <a:xfrm>
-            <a:off x="877824" y="3579304"/>
+            <a:off x="877824" y="3350704"/>
             <a:ext cx="10564063" cy="624840"/>
           </a:xfrm>
           <a:prstGeom prst="rect">
@@ -11429,7 +11434,7 @@
                 </a:solidFill>
                 <a:latin typeface="Georgia"/>
               </a:rPr>
-              <a:t>02</a:t>
+              <a:t>07</a:t>
             </a:r>
           </a:p>
         </p:txBody>
@@ -12277,7 +12282,7 @@
         <p:spPr>
           <a:xfrm>
             <a:off x="530352" y="2843784"/>
-            <a:ext cx="2079894" cy="1249680"/>
+            <a:ext cx="2079894" cy="1422400"/>
           </a:xfrm>
           <a:prstGeom prst="roundRect">
             <a:avLst>
@@ -12387,7 +12392,7 @@
                 </a:solidFill>
                 <a:latin typeface="Calibri"/>
               </a:rPr>
-              <a:t>Rows, distinct orders, and the three counts for every field.</a:t>
+              <a:t>Rows against orders, and the amount that will not convert.</a:t>
             </a:r>
           </a:p>
         </p:txBody>
@@ -12480,7 +12485,7 @@
         <p:spPr>
           <a:xfrm>
             <a:off x="2793126" y="2843784"/>
-            <a:ext cx="2079894" cy="1249680"/>
+            <a:ext cx="2079894" cy="1422400"/>
           </a:xfrm>
           <a:prstGeom prst="roundRect">
             <a:avLst>
@@ -12534,7 +12539,7 @@
         <p:spPr>
           <a:xfrm>
             <a:off x="2957718" y="2990088"/>
-            <a:ext cx="1750710" cy="251205"/>
+            <a:ext cx="1750710" cy="465836"/>
           </a:xfrm>
           <a:prstGeom prst="rect">
             <a:avLst/>
@@ -12555,7 +12560,7 @@
                 </a:solidFill>
                 <a:latin typeface="Calibri"/>
               </a:rPr>
-              <a:t>Convert with a log</a:t>
+              <a:t>The identity rule, built</a:t>
             </a:r>
           </a:p>
         </p:txBody>
@@ -12568,8 +12573,8 @@
         </p:nvSpPr>
         <p:spPr>
           <a:xfrm>
-            <a:off x="2957718" y="3277870"/>
-            <a:ext cx="1750710" cy="531876"/>
+            <a:off x="2957718" y="3492500"/>
+            <a:ext cx="1750710" cy="696976"/>
           </a:xfrm>
           <a:prstGeom prst="rect">
             <a:avLst/>
@@ -12590,7 +12595,7 @@
                 </a:solidFill>
                 <a:latin typeface="Calibri"/>
               </a:rPr>
-              <a:t>Every amount that fails, set aside with its line and reason.</a:t>
+              <a:t>Yours this time: the key, and when a later copy takes the place of the kept one.</a:t>
             </a:r>
           </a:p>
         </p:txBody>
@@ -12683,7 +12688,7 @@
         <p:spPr>
           <a:xfrm>
             <a:off x="5055900" y="2843784"/>
-            <a:ext cx="2079894" cy="1249680"/>
+            <a:ext cx="2079894" cy="1422400"/>
           </a:xfrm>
           <a:prstGeom prst="roundRect">
             <a:avLst>
@@ -12758,7 +12763,7 @@
                 </a:solidFill>
                 <a:latin typeface="Calibri"/>
               </a:rPr>
-              <a:t>The identity rule</a:t>
+              <a:t>Convert and decide</a:t>
             </a:r>
           </a:p>
         </p:txBody>
@@ -12793,7 +12798,7 @@
                 </a:solidFill>
                 <a:latin typeface="Calibri"/>
               </a:rPr>
-              <a:t>One row per order, and the copy that validates stays.</a:t>
+              <a:t>The rejects log, then the missing status and the largest order.</a:t>
             </a:r>
           </a:p>
         </p:txBody>
@@ -12886,7 +12891,7 @@
         <p:spPr>
           <a:xfrm>
             <a:off x="7318674" y="2843784"/>
-            <a:ext cx="2079894" cy="1249680"/>
+            <a:ext cx="2079894" cy="1422400"/>
           </a:xfrm>
           <a:prstGeom prst="roundRect">
             <a:avLst>
@@ -12961,7 +12966,7 @@
                 </a:solidFill>
                 <a:latin typeface="Calibri"/>
               </a:rPr>
-              <a:t>Two decisions</a:t>
+              <a:t>Reconcile</a:t>
             </a:r>
           </a:p>
         </p:txBody>
@@ -12996,7 +13001,7 @@
                 </a:solidFill>
                 <a:latin typeface="Calibri"/>
               </a:rPr>
-              <a:t>The missing status and the largest order, each with a reason.</a:t>
+              <a:t>Rows and rupees, a rupee test that fails the colleague's pass, the bridge.</a:t>
             </a:r>
           </a:p>
         </p:txBody>
@@ -13089,7 +13094,7 @@
         <p:spPr>
           <a:xfrm>
             <a:off x="9581448" y="2843784"/>
-            <a:ext cx="2079894" cy="1249680"/>
+            <a:ext cx="2079894" cy="1422400"/>
           </a:xfrm>
           <a:prstGeom prst="roundRect">
             <a:avLst>
@@ -13170,7 +13175,7 @@
                 </a:solidFill>
                 <a:latin typeface="Calibri"/>
               </a:rPr>
-              <a:t>Reconcile and recompute</a:t>
+              <a:t>The tree and the note</a:t>
             </a:r>
           </a:p>
         </p:txBody>
@@ -13205,7 +13210,7 @@
                 </a:solidFill>
                 <a:latin typeface="Calibri"/>
               </a:rPr>
-              <a:t>Rows and rupees to the books, the bridge, Tuesday, the note.</a:t>
+              <a:t>Monday's tree on the clean file, Tuesday's segment, the note.</a:t>
             </a:r>
           </a:p>
         </p:txBody>
@@ -13218,7 +13223,7 @@
         </p:nvSpPr>
         <p:spPr>
           <a:xfrm>
-            <a:off x="530352" y="4276344"/>
+            <a:off x="530352" y="4449064"/>
             <a:ext cx="11130991" cy="1121664"/>
           </a:xfrm>
           <a:prstGeom prst="roundRect">
@@ -13278,7 +13283,7 @@
         </p:nvSpPr>
         <p:spPr>
           <a:xfrm>
-            <a:off x="758952" y="4608576"/>
+            <a:off x="758952" y="4781296"/>
             <a:ext cx="457200" cy="457200"/>
           </a:xfrm>
           <a:prstGeom prst="ellipse">
@@ -13330,7 +13335,7 @@
         </p:blipFill>
         <p:spPr>
           <a:xfrm>
-            <a:off x="868680" y="4718304"/>
+            <a:off x="868680" y="4891024"/>
             <a:ext cx="237744" cy="237744"/>
           </a:xfrm>
           <a:prstGeom prst="rect">
@@ -13346,7 +13351,7 @@
         </p:nvSpPr>
         <p:spPr>
           <a:xfrm>
-            <a:off x="1399031" y="4422648"/>
+            <a:off x="1399031" y="4595368"/>
             <a:ext cx="9987991" cy="160401"/>
           </a:xfrm>
           <a:prstGeom prst="rect">
@@ -13381,7 +13386,7 @@
         </p:nvSpPr>
         <p:spPr>
           <a:xfrm>
-            <a:off x="1399031" y="4642104"/>
+            <a:off x="1399031" y="4814824"/>
             <a:ext cx="9987991" cy="682752"/>
           </a:xfrm>
           <a:prstGeom prst="rect">
@@ -14221,7 +14226,7 @@
         <p:spPr>
           <a:xfrm>
             <a:off x="530352" y="1956816"/>
-            <a:ext cx="2577007" cy="349250"/>
+            <a:ext cx="2577007" cy="603250"/>
           </a:xfrm>
           <a:prstGeom prst="rect">
             <a:avLst/>
@@ -14236,13 +14241,13 @@
           <a:p>
             <a:pPr algn="l"/>
             <a:r>
-              <a:rPr sz="2200" b="0" i="0">
+              <a:rPr sz="3800" b="0" i="0">
                 <a:solidFill>
                   <a:srgbClr val="5B3FD6"/>
                 </a:solidFill>
                 <a:latin typeface="Georgia"/>
               </a:rPr>
-              <a:t>186 + 15</a:t>
+              <a:t>rows</a:t>
             </a:r>
           </a:p>
         </p:txBody>
@@ -14255,7 +14260,7 @@
         </p:nvSpPr>
         <p:spPr>
           <a:xfrm>
-            <a:off x="530352" y="2342642"/>
+            <a:off x="530352" y="2596642"/>
             <a:ext cx="2577007" cy="168656"/>
           </a:xfrm>
           <a:prstGeom prst="rect">
@@ -14277,7 +14282,7 @@
                 </a:solidFill>
                 <a:latin typeface="Calibri"/>
               </a:rPr>
-              <a:t>ROWS</a:t>
+              <a:t>KEPT PLUS SET ASIDE</a:t>
             </a:r>
           </a:p>
         </p:txBody>
@@ -14290,7 +14295,7 @@
         </p:nvSpPr>
         <p:spPr>
           <a:xfrm>
-            <a:off x="530352" y="2543810"/>
+            <a:off x="530352" y="2797810"/>
             <a:ext cx="2577007" cy="193421"/>
           </a:xfrm>
           <a:prstGeom prst="rect">
@@ -14312,7 +14317,7 @@
                 </a:solidFill>
                 <a:latin typeface="Calibri"/>
               </a:rPr>
-              <a:t>kept and set aside, of 201</a:t>
+              <a:t>equal the rows the ERP sent</a:t>
             </a:r>
           </a:p>
         </p:txBody>
@@ -14370,7 +14375,7 @@
         <p:spPr>
           <a:xfrm>
             <a:off x="3381679" y="1956816"/>
-            <a:ext cx="2577007" cy="349250"/>
+            <a:ext cx="2577007" cy="603250"/>
           </a:xfrm>
           <a:prstGeom prst="rect">
             <a:avLst/>
@@ -14385,13 +14390,13 @@
           <a:p>
             <a:pPr algn="l"/>
             <a:r>
-              <a:rPr sz="2200" b="0" i="0">
+              <a:rPr sz="3800" b="0" i="0">
                 <a:solidFill>
                   <a:srgbClr val="5B3FD6"/>
                 </a:solidFill>
                 <a:latin typeface="Georgia"/>
               </a:rPr>
-              <a:t>Rs 1,90,00,000</a:t>
+              <a:t>Q1</a:t>
             </a:r>
           </a:p>
         </p:txBody>
@@ -14404,7 +14409,7 @@
         </p:nvSpPr>
         <p:spPr>
           <a:xfrm>
-            <a:off x="3381679" y="2342642"/>
+            <a:off x="3381679" y="2596642"/>
             <a:ext cx="2577007" cy="168656"/>
           </a:xfrm>
           <a:prstGeom prst="rect">
@@ -14426,7 +14431,7 @@
                 </a:solidFill>
                 <a:latin typeface="Calibri"/>
               </a:rPr>
-              <a:t>Q1 CLEAN</a:t>
+              <a:t>TO THE RUPEE</a:t>
             </a:r>
           </a:p>
         </p:txBody>
@@ -14439,7 +14444,7 @@
         </p:nvSpPr>
         <p:spPr>
           <a:xfrm>
-            <a:off x="3381679" y="2543810"/>
+            <a:off x="3381679" y="2797810"/>
             <a:ext cx="2577007" cy="193421"/>
           </a:xfrm>
           <a:prstGeom prst="rect">
@@ -14461,7 +14466,7 @@
                 </a:solidFill>
                 <a:latin typeface="Calibri"/>
               </a:rPr>
-              <a:t>the books, to the rupee</a:t>
+              <a:t>equal to the books after the rule</a:t>
             </a:r>
           </a:p>
         </p:txBody>
@@ -14519,7 +14524,7 @@
         <p:spPr>
           <a:xfrm>
             <a:off x="6233007" y="1956816"/>
-            <a:ext cx="2577007" cy="349250"/>
+            <a:ext cx="2577007" cy="603250"/>
           </a:xfrm>
           <a:prstGeom prst="rect">
             <a:avLst/>
@@ -14534,13 +14539,13 @@
           <a:p>
             <a:pPr algn="l"/>
             <a:r>
-              <a:rPr sz="2200" b="0" i="0">
+              <a:rPr sz="3800" b="0" i="0">
                 <a:solidFill>
                   <a:srgbClr val="5B3FD6"/>
                 </a:solidFill>
                 <a:latin typeface="Georgia"/>
               </a:rPr>
-              <a:t>Rs 1,87,00,000</a:t>
+              <a:t>the test</a:t>
             </a:r>
           </a:p>
         </p:txBody>
@@ -14553,7 +14558,7 @@
         </p:nvSpPr>
         <p:spPr>
           <a:xfrm>
-            <a:off x="6233007" y="2342642"/>
+            <a:off x="6233007" y="2596642"/>
             <a:ext cx="2577007" cy="168656"/>
           </a:xfrm>
           <a:prstGeom prst="rect">
@@ -14575,7 +14580,7 @@
                 </a:solidFill>
                 <a:latin typeface="Calibri"/>
               </a:rPr>
-              <a:t>Q2 CLEAN</a:t>
+              <a:t>YOUR RUPEE TEST</a:t>
             </a:r>
           </a:p>
         </p:txBody>
@@ -14588,7 +14593,7 @@
         </p:nvSpPr>
         <p:spPr>
           <a:xfrm>
-            <a:off x="6233007" y="2543810"/>
+            <a:off x="6233007" y="2797810"/>
             <a:ext cx="2577007" cy="193421"/>
           </a:xfrm>
           <a:prstGeom prst="rect">
@@ -14610,7 +14615,7 @@
                 </a:solidFill>
                 <a:latin typeface="Calibri"/>
               </a:rPr>
-              <a:t>every real order kept</a:t>
+              <a:t>passes yours, fails the colleague's</a:t>
             </a:r>
           </a:p>
         </p:txBody>
@@ -14668,7 +14673,7 @@
         <p:spPr>
           <a:xfrm>
             <a:off x="9084335" y="1956816"/>
-            <a:ext cx="2577007" cy="349250"/>
+            <a:ext cx="2577007" cy="603250"/>
           </a:xfrm>
           <a:prstGeom prst="rect">
             <a:avLst/>
@@ -14683,13 +14688,13 @@
           <a:p>
             <a:pPr algn="l"/>
             <a:r>
-              <a:rPr sz="2200" b="0" i="0">
+              <a:rPr sz="3800" b="0" i="0">
                 <a:solidFill>
                   <a:srgbClr val="5B3FD6"/>
                 </a:solidFill>
                 <a:latin typeface="Georgia"/>
               </a:rPr>
-              <a:t>-35.0%</a:t>
+              <a:t>the tree</a:t>
             </a:r>
           </a:p>
         </p:txBody>
@@ -14702,7 +14707,7 @@
         </p:nvSpPr>
         <p:spPr>
           <a:xfrm>
-            <a:off x="9084335" y="2342642"/>
+            <a:off x="9084335" y="2596642"/>
             <a:ext cx="2577007" cy="168656"/>
           </a:xfrm>
           <a:prstGeom prst="rect">
@@ -14724,7 +14729,7 @@
                 </a:solidFill>
                 <a:latin typeface="Calibri"/>
               </a:rPr>
-              <a:t>RETAIL-PLUS</a:t>
+              <a:t>THREE BRANCHES</a:t>
             </a:r>
           </a:p>
         </p:txBody>
@@ -14737,7 +14742,7 @@
         </p:nvSpPr>
         <p:spPr>
           <a:xfrm>
-            <a:off x="9084335" y="2543810"/>
+            <a:off x="9084335" y="2797810"/>
             <a:ext cx="2577007" cy="193421"/>
           </a:xfrm>
           <a:prstGeom prst="rect">
@@ -14759,7 +14764,7 @@
                 </a:solidFill>
                 <a:latin typeface="Calibri"/>
               </a:rPr>
-              <a:t>orders per customer, clean</a:t>
+              <a:t>multiply back to revenue's change</a:t>
             </a:r>
           </a:p>
         </p:txBody>
@@ -15518,7 +15523,7 @@
                 </a:solidFill>
                 <a:latin typeface="Georgia"/>
               </a:rPr>
-              <a:t>03</a:t>
+              <a:t>08</a:t>
             </a:r>
           </a:p>
         </p:txBody>
@@ -16253,9 +16258,9 @@
                 <a:tableStyleId>{2D5ABB26-0587-4C30-8999-92F81FD0307C}</a:tableStyleId>
               </a:tblPr>
               <a:tblGrid>
-                <a:gridCol w="3893728"/>
-                <a:gridCol w="4003766"/>
-                <a:gridCol w="3233496"/>
+                <a:gridCol w="4234609"/>
+                <a:gridCol w="3815186"/>
+                <a:gridCol w="3081195"/>
               </a:tblGrid>
               <a:tr h="369824">
                 <a:tc>
@@ -16678,7 +16683,7 @@
                           </a:solidFill>
                           <a:latin typeface="Calibri"/>
                         </a:rPr>
-                        <a:t>201 = 185 + 16, Q1 Rs 1,89,98,210</a:t>
+                        <a:t>201 = 185 + 16, Rs 20,00,000 set aside</a:t>
                       </a:r>
                     </a:p>
                   </a:txBody>
@@ -17489,7 +17494,7 @@
       </p:sp>
       <p:pic>
         <p:nvPicPr>
-          <p:cNvPr id="9" name="mermaid diagram" descr="28b1cd1bbca353e5.png"/>
+          <p:cNvPr id="9" name="mermaid diagram" descr="6942a2008f72472a.png"/>
           <p:cNvPicPr>
             <a:picLocks noChangeAspect="1"/>
           </p:cNvPicPr>
@@ -17503,8 +17508,8 @@
         </p:blipFill>
         <p:spPr>
           <a:xfrm>
-            <a:off x="780897" y="1956816"/>
-            <a:ext cx="10629900" cy="1357312"/>
+            <a:off x="1152372" y="1956816"/>
+            <a:ext cx="9886950" cy="871537"/>
           </a:xfrm>
           <a:prstGeom prst="rect">
             <a:avLst/>
@@ -17519,7 +17524,7 @@
         </p:nvSpPr>
         <p:spPr>
           <a:xfrm>
-            <a:off x="530352" y="3460432"/>
+            <a:off x="530352" y="2974657"/>
             <a:ext cx="11130991" cy="862584"/>
           </a:xfrm>
           <a:prstGeom prst="roundRect">
@@ -17573,7 +17578,7 @@
         </p:nvSpPr>
         <p:spPr>
           <a:xfrm>
-            <a:off x="758952" y="3663124"/>
+            <a:off x="758952" y="3177349"/>
             <a:ext cx="457200" cy="457200"/>
           </a:xfrm>
           <a:prstGeom prst="ellipse">
@@ -17625,7 +17630,7 @@
         </p:blipFill>
         <p:spPr>
           <a:xfrm>
-            <a:off x="868680" y="3772852"/>
+            <a:off x="868680" y="3287077"/>
             <a:ext cx="237744" cy="237744"/>
           </a:xfrm>
           <a:prstGeom prst="rect">
@@ -17641,7 +17646,7 @@
         </p:nvSpPr>
         <p:spPr>
           <a:xfrm>
-            <a:off x="1399031" y="3606736"/>
+            <a:off x="1399031" y="3120961"/>
             <a:ext cx="9987991" cy="160401"/>
           </a:xfrm>
           <a:prstGeom prst="rect">
@@ -17676,7 +17681,7 @@
         </p:nvSpPr>
         <p:spPr>
           <a:xfrm>
-            <a:off x="1399031" y="3826192"/>
+            <a:off x="1399031" y="3340417"/>
             <a:ext cx="9987991" cy="423672"/>
           </a:xfrm>
           <a:prstGeom prst="rect">
@@ -18412,7 +18417,7 @@
                 </a:solidFill>
                 <a:latin typeface="Georgia"/>
               </a:rPr>
-              <a:t>01</a:t>
+              <a:t>06</a:t>
             </a:r>
           </a:p>
         </p:txBody>
@@ -19088,7 +19093,7 @@
                 </a:solidFill>
                 <a:latin typeface="Georgia"/>
               </a:rPr>
-              <a:t>04</a:t>
+              <a:t>09</a:t>
             </a:r>
           </a:p>
         </p:txBody>
@@ -19806,7 +19811,7 @@
       </p:sp>
       <p:pic>
         <p:nvPicPr>
-          <p:cNvPr id="9" name="mermaid diagram" descr="c0e7475c34b5802a.png"/>
+          <p:cNvPr id="9" name="mermaid diagram" descr="b1ffffd5a8d542e1.png"/>
           <p:cNvPicPr>
             <a:picLocks noChangeAspect="1"/>
           </p:cNvPicPr>
@@ -19820,8 +19825,8 @@
         </p:blipFill>
         <p:spPr>
           <a:xfrm>
-            <a:off x="530352" y="1956816"/>
-            <a:ext cx="11130991" cy="1129748"/>
+            <a:off x="638022" y="1956816"/>
+            <a:ext cx="10915650" cy="871537"/>
           </a:xfrm>
           <a:prstGeom prst="rect">
             <a:avLst/>
@@ -20710,14 +20715,14 @@
                 </a:solidFill>
                 <a:latin typeface="Calibri"/>
               </a:rPr>
-              <a:t>As a letter? a) 14 Q1 rows were deleted as errors after the migration was checked; b) the dashboard was right all along, and the books are short; c) 14 Q1 rows are copies of kept orders, set aside by rule; both totals tie; d) the 14 rows were outliers removed to keep Q1 in line with Q2.</a:t>
+              <a:t>As a letter? a) 14 Q1 rows were deleted as errors after the migration was checked; b) the dashboard was right all along, and the books are short; c) 14 Q1 rows are copies of kept orders, set aside; both totals tie; d) the 14 rows were outliers removed to keep Q1 in line with Q2.</a:t>
             </a:r>
           </a:p>
         </p:txBody>
       </p:sp>
       <p:pic>
         <p:nvPicPr>
-          <p:cNvPr id="12" name="mermaid diagram" descr="928d3dabd505d200.png"/>
+          <p:cNvPr id="12" name="mermaid diagram" descr="d4242e17dd0e7bf1.png"/>
           <p:cNvPicPr>
             <a:picLocks noChangeAspect="1"/>
           </p:cNvPicPr>
@@ -20731,8 +20736,8 @@
         </p:blipFill>
         <p:spPr>
           <a:xfrm>
-            <a:off x="3424085" y="3195828"/>
-            <a:ext cx="5343525" cy="2586037"/>
+            <a:off x="3695547" y="3195828"/>
+            <a:ext cx="4800600" cy="2328862"/>
           </a:xfrm>
           <a:prstGeom prst="rect">
             <a:avLst/>
@@ -22837,7 +22842,7 @@
                 </a:solidFill>
                 <a:latin typeface="Georgia"/>
               </a:rPr>
-              <a:t>05</a:t>
+              <a:t>10</a:t>
             </a:r>
           </a:p>
         </p:txBody>
@@ -24565,7 +24570,7 @@
                 </a:solidFill>
                 <a:latin typeface="Georgia"/>
               </a:rPr>
-              <a:t>Seven follow-ups, the design questions among them</a:t>
+              <a:t>Seven follow-ups, five of them design</a:t>
             </a:r>
           </a:p>
         </p:txBody>
@@ -24708,7 +24713,7 @@
                           </a:solidFill>
                           <a:latin typeface="Calibri"/>
                         </a:rPr>
-                        <a:t>A dedupe returns zero. Do you believe it?</a:t>
+                        <a:t>Your row counts reconcile. Are you done?</a:t>
                       </a:r>
                     </a:p>
                   </a:txBody>
@@ -24732,7 +24737,7 @@
                           </a:solidFill>
                           <a:latin typeface="Calibri"/>
                         </a:rPr>
-                        <a:t>[F]</a:t>
+                        <a:t>[S]</a:t>
                       </a:r>
                     </a:p>
                   </a:txBody>
@@ -24754,7 +24759,7 @@
                           </a:solidFill>
                           <a:latin typeface="Calibri"/>
                         </a:rPr>
-                        <a:t>Your row counts reconcile. Are you done?</a:t>
+                        <a:t>The largest order is 1.66 times the next. Do you remove it?</a:t>
                       </a:r>
                     </a:p>
                   </a:txBody>
@@ -24778,7 +24783,7 @@
                           </a:solidFill>
                           <a:latin typeface="Calibri"/>
                         </a:rPr>
-                        <a:t>[S]</a:t>
+                        <a:t>[D]</a:t>
                       </a:r>
                     </a:p>
                   </a:txBody>
@@ -24800,7 +24805,7 @@
                           </a:solidFill>
                           <a:latin typeface="Calibri"/>
                         </a:rPr>
-                        <a:t>The largest order is 1.66 times the next. Remove it?</a:t>
+                        <a:t>Design: 2 crore rows. Profile everything, or sample?</a:t>
                       </a:r>
                     </a:p>
                   </a:txBody>
@@ -24846,7 +24851,7 @@
                           </a:solidFill>
                           <a:latin typeface="Calibri"/>
                         </a:rPr>
-                        <a:t>Order id, whole record or fuzzy, for customers from two apps?</a:t>
+                        <a:t>Design: order id, whole record or fuzzy, for customers from two apps?</a:t>
                       </a:r>
                     </a:p>
                   </a:txBody>
@@ -24892,7 +24897,7 @@
                           </a:solidFill>
                           <a:latin typeface="Calibri"/>
                         </a:rPr>
-                        <a:t>Coerce, reject or repair a malformed amount, and what would switch you?</a:t>
+                        <a:t>Design: two copies disagree. First, last, or the copy that validates?</a:t>
                       </a:r>
                     </a:p>
                   </a:txBody>
@@ -24938,7 +24943,7 @@
                           </a:solidFill>
                           <a:latin typeface="Calibri"/>
                         </a:rPr>
-                        <a:t>Bridge or rebuild from a second source to prove a figure?</a:t>
+                        <a:t>Design: coerce, reject or repair a malformed amount?</a:t>
                       </a:r>
                     </a:p>
                   </a:txBody>
@@ -24962,7 +24967,7 @@
                           </a:solidFill>
                           <a:latin typeface="Calibri"/>
                         </a:rPr>
-                        <a:t>[SV]</a:t>
+                        <a:t>[D]</a:t>
                       </a:r>
                     </a:p>
                   </a:txBody>
@@ -24984,7 +24989,7 @@
                           </a:solidFill>
                           <a:latin typeface="Calibri"/>
                         </a:rPr>
-                        <a:t>Walk me through cleaning a file you have never seen.</a:t>
+                        <a:t>Design: prove a figure with a bridge, or rebuild it from a second source?</a:t>
                       </a:r>
                     </a:p>
                   </a:txBody>
@@ -25709,7 +25714,7 @@
                 </a:solidFill>
                 <a:latin typeface="Georgia"/>
               </a:rPr>
-              <a:t>06</a:t>
+              <a:t>11</a:t>
             </a:r>
           </a:p>
         </p:txBody>
@@ -26523,7 +26528,7 @@
       </p:sp>
       <p:pic>
         <p:nvPicPr>
-          <p:cNvPr id="11" name="mermaid diagram" descr="65a47bb5060cb393.png"/>
+          <p:cNvPr id="11" name="mermaid diagram" descr="a1b4ae782c2ead99.png"/>
           <p:cNvPicPr>
             <a:picLocks noChangeAspect="1"/>
           </p:cNvPicPr>
@@ -26537,8 +26542,8 @@
         </p:blipFill>
         <p:spPr>
           <a:xfrm>
-            <a:off x="2152497" y="3413760"/>
-            <a:ext cx="7886700" cy="1100137"/>
+            <a:off x="2988316" y="3413760"/>
+            <a:ext cx="6215062" cy="614362"/>
           </a:xfrm>
           <a:prstGeom prst="rect">
             <a:avLst/>
@@ -29976,7 +29981,7 @@
       </p:sp>
       <p:pic>
         <p:nvPicPr>
-          <p:cNvPr id="14" name="mermaid diagram" descr="ca5d5c77445b5892.png"/>
+          <p:cNvPr id="14" name="mermaid diagram" descr="d4aa7568b490a150.png"/>
           <p:cNvPicPr>
             <a:picLocks noChangeAspect="1"/>
           </p:cNvPicPr>
@@ -29990,8 +29995,8 @@
         </p:blipFill>
         <p:spPr>
           <a:xfrm>
-            <a:off x="3424085" y="3243072"/>
-            <a:ext cx="5343525" cy="2586037"/>
+            <a:off x="3716978" y="3243072"/>
+            <a:ext cx="4757737" cy="2257425"/>
           </a:xfrm>
           <a:prstGeom prst="rect">
             <a:avLst/>
@@ -34718,7 +34723,7 @@
       </p:sp>
       <p:pic>
         <p:nvPicPr>
-          <p:cNvPr id="9" name="mermaid diagram" descr="86c68108bb00f1ba.png"/>
+          <p:cNvPr id="9" name="mermaid diagram" descr="1500baff43202ee1.png"/>
           <p:cNvPicPr>
             <a:picLocks noChangeAspect="1"/>
           </p:cNvPicPr>
@@ -34732,8 +34737,8 @@
         </p:blipFill>
         <p:spPr>
           <a:xfrm>
-            <a:off x="2523556" y="1682496"/>
-            <a:ext cx="7144581" cy="4517136"/>
+            <a:off x="2366810" y="1956816"/>
+            <a:ext cx="7458075" cy="2971800"/>
           </a:xfrm>
           <a:prstGeom prst="rect">
             <a:avLst/>
@@ -35492,7 +35497,7 @@
       </p:sp>
       <p:pic>
         <p:nvPicPr>
-          <p:cNvPr id="9" name="mermaid diagram" descr="1c323c0168656de8.png"/>
+          <p:cNvPr id="9" name="mermaid diagram" descr="c5cec98e78a672d3.png"/>
           <p:cNvPicPr>
             <a:picLocks noChangeAspect="1"/>
           </p:cNvPicPr>
@@ -35506,8 +35511,8 @@
         </p:blipFill>
         <p:spPr>
           <a:xfrm>
-            <a:off x="3424085" y="1956816"/>
-            <a:ext cx="5343525" cy="2586037"/>
+            <a:off x="3702691" y="1956816"/>
+            <a:ext cx="4786312" cy="2543175"/>
           </a:xfrm>
           <a:prstGeom prst="rect">
             <a:avLst/>
@@ -35522,7 +35527,7 @@
         </p:nvSpPr>
         <p:spPr>
           <a:xfrm>
-            <a:off x="530352" y="4689157"/>
+            <a:off x="530352" y="4646295"/>
             <a:ext cx="11130991" cy="807720"/>
           </a:xfrm>
           <a:prstGeom prst="roundRect">
@@ -35570,7 +35575,7 @@
         </p:nvSpPr>
         <p:spPr>
           <a:xfrm>
-            <a:off x="676656" y="4817173"/>
+            <a:off x="676656" y="4774311"/>
             <a:ext cx="45720" cy="551688"/>
           </a:xfrm>
           <a:prstGeom prst="roundRect">
@@ -35616,7 +35621,7 @@
         </p:nvSpPr>
         <p:spPr>
           <a:xfrm>
-            <a:off x="877824" y="4808029"/>
+            <a:off x="877824" y="4765167"/>
             <a:ext cx="10564063" cy="624840"/>
           </a:xfrm>
           <a:prstGeom prst="rect">
@@ -37914,7 +37919,7 @@
                 </a:solidFill>
                 <a:latin typeface="Georgia"/>
               </a:rPr>
-              <a:t>Rs 1,89,98,210</a:t>
+              <a:t>Rs 1.90 crore</a:t>
             </a:r>
           </a:p>
         </p:txBody>
@@ -37984,7 +37989,7 @@
                 </a:solidFill>
                 <a:latin typeface="Calibri"/>
               </a:rPr>
-              <a:t>1.90 crore when rounded</a:t>
+              <a:t>as the note rounds it</a:t>
             </a:r>
           </a:p>
         </p:txBody>

--- a/content/W01/D3/slides/C2_W01_D03_half2_STUDENT.pptx
+++ b/content/W01/D3/slides/C2_W01_D03_half2_STUDENT.pptx
@@ -1857,7 +1857,7 @@
           </a:p>
           <a:p>
             <a:r>
-              <a:t>The row's five and these seven are the day's twelve, the same twelve the study notes answer.</a:t>
+              <a:t>The row's five and these seven are the day's 12, the same 12 the study notes answer.</a:t>
             </a:r>
           </a:p>
         </p:txBody>
@@ -22912,7 +22912,7 @@
                 </a:solidFill>
                 <a:latin typeface="Calibri"/>
               </a:rPr>
-              <a:t>Twelve questions aloud, the design question among them, each in under ninety seconds.</a:t>
+              <a:t>The day's 12 questions aloud, five design questions among them, each in under ninety seconds.</a:t>
             </a:r>
           </a:p>
         </p:txBody>

--- a/content/W01/D3/slides/C2_W01_D03_half2_STUDENT.pptx
+++ b/content/W01/D3/slides/C2_W01_D03_half2_STUDENT.pptx
@@ -1391,7 +1391,22 @@
           </a:p>
           <a:p>
             <a:r>
-              <a:t>of the row that stayed. Everything on this slide was proved this morning, and the afternoon deck</a:t>
+              <a:t>of the row that stayed. The identity rule says what makes two rows one order, here the order_id; the</a:t>
+            </a:r>
+          </a:p>
+          <a:p>
+            <a:r>
+              <a:t>rejects log lists every row whose value would not convert, with its line and reason; Retail-Plus is</a:t>
+            </a:r>
+          </a:p>
+          <a:p>
+            <a:r>
+              <a:t>Kalpa's paid membership tier; the Business segment is Kalpa's sales to companies; and the bulk order</a:t>
+            </a:r>
+          </a:p>
+          <a:p>
+            <a:r>
+              <a:t>is Q2's largest, a real Business order at Rs 29,45,460, kept and flagged. Everything on this slide was proved this morning, and the afternoon deck</a:t>
             </a:r>
           </a:p>
           <a:p>
@@ -2131,7 +2146,12 @@
           </a:p>
           <a:p>
             <a:r>
-              <a:t>asked everywhere, [F] frequent in GCC and product screens, [D] differentiator. Full answers are in</a:t>
+              <a:t>asked everywhere, [F] frequent in screens at global capability centres (GCCs) and product</a:t>
+            </a:r>
+          </a:p>
+          <a:p>
+            <a:r>
+              <a:t>companies, [D] differentiator. Full answers are in</a:t>
             </a:r>
           </a:p>
           <a:p>
@@ -2361,7 +2381,12 @@
           <a:lstStyle/>
           <a:p>
             <a:r>
-              <a:t>LIVE. Fifteen minutes: the Kahoot, then this chapter.</a:t>
+              <a:t>SELF-STUDY, 3 minutes. Each trade runs the same two checks: rows prove nothing vanished, and money</a:t>
+            </a:r>
+          </a:p>
+          <a:p>
+            <a:r>
+              <a:t>proves the right rows stayed.</a:t>
             </a:r>
           </a:p>
         </p:txBody>
@@ -2431,7 +2456,7 @@
           <a:lstStyle/>
           <a:p>
             <a:r>
-              <a:t>LIVE, 2 minutes. This answers the day's question. Read it aloud once. Then the six lines.</a:t>
+              <a:t>LIVE. Fifteen minutes: the Kahoot, then this chapter.</a:t>
             </a:r>
           </a:p>
         </p:txBody>
@@ -2501,12 +2526,7 @@
           <a:lstStyle/>
           <a:p>
             <a:r>
-              <a:t>LIVE, 3 minutes. One line per chapter, the lines the cheat sheet prints. Tonight's take-home tests</a:t>
-            </a:r>
-          </a:p>
-          <a:p>
-            <a:r>
-              <a:t>every line on an export nobody in the room has seen. Then tomorrow's question.</a:t>
+              <a:t>LIVE, 2 minutes. This answers the day's question. Read it aloud once. Then the six lines.</a:t>
             </a:r>
           </a:p>
         </p:txBody>
@@ -2576,7 +2596,12 @@
           <a:lstStyle/>
           <a:p>
             <a:r>
-              <a:t>LIVE, 2 minutes. Do not answer it. Thursday builds the answer.</a:t>
+              <a:t>LIVE, 3 minutes. One line per chapter, the lines the cheat sheet prints. Tonight's take-home tests</a:t>
+            </a:r>
+          </a:p>
+          <a:p>
+            <a:r>
+              <a:t>every line on an export nobody in the room has seen. Then tomorrow's question.</a:t>
             </a:r>
           </a:p>
         </p:txBody>
@@ -2646,12 +2671,7 @@
           <a:lstStyle/>
           <a:p>
             <a:r>
-              <a:t>SELF-STUDY, 3 minutes. Each trade runs the same two checks: rows prove nothing vanished, and money</a:t>
-            </a:r>
-          </a:p>
-          <a:p>
-            <a:r>
-              <a:t>proves the right rows stayed.</a:t>
+              <a:t>LIVE, 2 minutes. Do not answer it. Thursday builds the answer.</a:t>
             </a:r>
           </a:p>
         </p:txBody>
@@ -6464,7 +6484,7 @@
                 </a:solidFill>
                 <a:latin typeface="Georgia"/>
               </a:rPr>
-              <a:t>01</a:t>
+              <a:t>06</a:t>
             </a:r>
           </a:p>
         </p:txBody>
@@ -6534,7 +6554,7 @@
                 </a:solidFill>
                 <a:latin typeface="Georgia"/>
               </a:rPr>
-              <a:t>02</a:t>
+              <a:t>07</a:t>
             </a:r>
           </a:p>
         </p:txBody>
@@ -6604,7 +6624,7 @@
                 </a:solidFill>
                 <a:latin typeface="Georgia"/>
               </a:rPr>
-              <a:t>03</a:t>
+              <a:t>08</a:t>
             </a:r>
           </a:p>
         </p:txBody>
@@ -6674,7 +6694,7 @@
                 </a:solidFill>
                 <a:latin typeface="Georgia"/>
               </a:rPr>
-              <a:t>04</a:t>
+              <a:t>09</a:t>
             </a:r>
           </a:p>
         </p:txBody>
@@ -6722,6 +6742,146 @@
         </p:nvSpPr>
         <p:spPr>
           <a:xfrm>
+            <a:off x="621792" y="5632704"/>
+            <a:ext cx="365760" cy="251205"/>
+          </a:xfrm>
+          <a:prstGeom prst="rect">
+            <a:avLst/>
+          </a:prstGeom>
+          <a:noFill/>
+        </p:spPr>
+        <p:txBody>
+          <a:bodyPr wrap="square" anchor="t" lIns="0" rIns="0" tIns="0" bIns="0">
+            <a:spAutoFit/>
+          </a:bodyPr>
+          <a:lstStyle/>
+          <a:p>
+            <a:pPr algn="l"/>
+            <a:r>
+              <a:rPr sz="1300" b="0" i="0">
+                <a:solidFill>
+                  <a:srgbClr val="D9A7FF"/>
+                </a:solidFill>
+                <a:latin typeface="Georgia"/>
+              </a:rPr>
+              <a:t>10</a:t>
+            </a:r>
+          </a:p>
+        </p:txBody>
+      </p:sp>
+      <p:sp>
+        <p:nvSpPr>
+          <p:cNvPr id="20" name="TextBox 19"/>
+          <p:cNvSpPr txBox="1"/>
+          <p:nvPr/>
+        </p:nvSpPr>
+        <p:spPr>
+          <a:xfrm>
+            <a:off x="1005839" y="5669280"/>
+            <a:ext cx="1898237" cy="185166"/>
+          </a:xfrm>
+          <a:prstGeom prst="rect">
+            <a:avLst/>
+          </a:prstGeom>
+          <a:noFill/>
+        </p:spPr>
+        <p:txBody>
+          <a:bodyPr wrap="square" anchor="t" lIns="0" rIns="0" tIns="0" bIns="0">
+            <a:spAutoFit/>
+          </a:bodyPr>
+          <a:lstStyle/>
+          <a:p>
+            <a:pPr algn="l"/>
+            <a:r>
+              <a:rPr sz="900" b="0" i="0">
+                <a:solidFill>
+                  <a:srgbClr val="FFFFFF"/>
+                </a:solidFill>
+                <a:latin typeface="Calibri"/>
+              </a:rPr>
+              <a:t>Can you answer in 90 seconds?</a:t>
+            </a:r>
+          </a:p>
+        </p:txBody>
+      </p:sp>
+      <p:sp>
+        <p:nvSpPr>
+          <p:cNvPr id="21" name="TextBox 20"/>
+          <p:cNvSpPr txBox="1"/>
+          <p:nvPr/>
+        </p:nvSpPr>
+        <p:spPr>
+          <a:xfrm>
+            <a:off x="3086957" y="5632704"/>
+            <a:ext cx="365760" cy="251205"/>
+          </a:xfrm>
+          <a:prstGeom prst="rect">
+            <a:avLst/>
+          </a:prstGeom>
+          <a:noFill/>
+        </p:spPr>
+        <p:txBody>
+          <a:bodyPr wrap="square" anchor="t" lIns="0" rIns="0" tIns="0" bIns="0">
+            <a:spAutoFit/>
+          </a:bodyPr>
+          <a:lstStyle/>
+          <a:p>
+            <a:pPr algn="l"/>
+            <a:r>
+              <a:rPr sz="1300" b="0" i="0">
+                <a:solidFill>
+                  <a:srgbClr val="D9A7FF"/>
+                </a:solidFill>
+                <a:latin typeface="Georgia"/>
+              </a:rPr>
+              <a:t>11</a:t>
+            </a:r>
+          </a:p>
+        </p:txBody>
+      </p:sp>
+      <p:sp>
+        <p:nvSpPr>
+          <p:cNvPr id="22" name="TextBox 21"/>
+          <p:cNvSpPr txBox="1"/>
+          <p:nvPr/>
+        </p:nvSpPr>
+        <p:spPr>
+          <a:xfrm>
+            <a:off x="3471005" y="5669280"/>
+            <a:ext cx="1484185" cy="185166"/>
+          </a:xfrm>
+          <a:prstGeom prst="rect">
+            <a:avLst/>
+          </a:prstGeom>
+          <a:noFill/>
+        </p:spPr>
+        <p:txBody>
+          <a:bodyPr wrap="square" anchor="t" lIns="0" rIns="0" tIns="0" bIns="0">
+            <a:spAutoFit/>
+          </a:bodyPr>
+          <a:lstStyle/>
+          <a:p>
+            <a:pPr algn="l"/>
+            <a:r>
+              <a:rPr sz="900" b="0" i="0">
+                <a:solidFill>
+                  <a:srgbClr val="FFFFFF"/>
+                </a:solidFill>
+                <a:latin typeface="Calibri"/>
+              </a:rPr>
+              <a:t>What do we tell Anand?</a:t>
+            </a:r>
+          </a:p>
+        </p:txBody>
+      </p:sp>
+      <p:sp>
+        <p:nvSpPr>
+          <p:cNvPr id="23" name="TextBox 22"/>
+          <p:cNvSpPr txBox="1"/>
+          <p:nvPr/>
+        </p:nvSpPr>
+        <p:spPr>
+          <a:xfrm>
             <a:off x="530352" y="6437376"/>
             <a:ext cx="9667951" cy="160401"/>
           </a:xfrm>
@@ -6751,7 +6911,7 @@
       </p:sp>
       <p:sp>
         <p:nvSpPr>
-          <p:cNvPr id="20" name="TextBox 19"/>
+          <p:cNvPr id="24" name="TextBox 23"/>
           <p:cNvSpPr txBox="1"/>
           <p:nvPr/>
         </p:nvSpPr>
@@ -18296,7 +18456,7 @@
                 </a:solidFill>
                 <a:latin typeface="Calibri"/>
               </a:rPr>
-              <a:t>How many orders arrived?</a:t>
+              <a:t>What can you tell Anand yet?</a:t>
             </a:r>
           </a:p>
         </p:txBody>
@@ -18478,7 +18638,7 @@
         <p:spPr>
           <a:xfrm>
             <a:off x="2957718" y="2990088"/>
-            <a:ext cx="1750710" cy="251205"/>
+            <a:ext cx="1750710" cy="465836"/>
           </a:xfrm>
           <a:prstGeom prst="rect">
             <a:avLst/>
@@ -18499,7 +18659,7 @@
                 </a:solidFill>
                 <a:latin typeface="Calibri"/>
               </a:rPr>
-              <a:t>Which copy stays?</a:t>
+              <a:t>How are repeats treated?</a:t>
             </a:r>
           </a:p>
         </p:txBody>
@@ -18512,7 +18672,7 @@
         </p:nvSpPr>
         <p:spPr>
           <a:xfrm>
-            <a:off x="2957718" y="3277870"/>
+            <a:off x="2957718" y="3492500"/>
             <a:ext cx="1750710" cy="531876"/>
           </a:xfrm>
           <a:prstGeom prst="rect">
@@ -18702,7 +18862,7 @@
                 </a:solidFill>
                 <a:latin typeface="Calibri"/>
               </a:rPr>
-              <a:t>What happens to each defect?</a:t>
+              <a:t>How is each odd case decided?</a:t>
             </a:r>
           </a:p>
         </p:txBody>
@@ -18905,7 +19065,7 @@
                 </a:solidFill>
                 <a:latin typeface="Calibri"/>
               </a:rPr>
-              <a:t>Do rows and rupees tie?</a:t>
+              <a:t>Where did every row go?</a:t>
             </a:r>
           </a:p>
         </p:txBody>
@@ -19114,7 +19274,7 @@
                 </a:solidFill>
                 <a:latin typeface="Calibri"/>
               </a:rPr>
-              <a:t>What changed for Tuesday?</a:t>
+              <a:t>What does Anand read first?</a:t>
             </a:r>
           </a:p>
         </p:txBody>
@@ -23279,7 +23439,7 @@
         </p:nvGraphicFramePr>
         <p:xfrm>
           <a:off x="530352" y="1956816"/>
-          <a:ext cx="11130990" cy="2588768"/>
+          <a:ext cx="11130989" cy="3072384"/>
         </p:xfrm>
         <a:graphic>
           <a:graphicData uri="http://schemas.openxmlformats.org/drawingml/2006/table">
@@ -23288,9 +23448,9 @@
                 <a:tableStyleId>{2D5ABB26-0587-4C30-8999-92F81FD0307C}</a:tableStyleId>
               </a:tblPr>
               <a:tblGrid>
-                <a:gridCol w="4234609"/>
-                <a:gridCol w="3815186"/>
-                <a:gridCol w="3081195"/>
+                <a:gridCol w="3620676"/>
+                <a:gridCol w="4875829"/>
+                <a:gridCol w="2634484"/>
               </a:tblGrid>
               <a:tr h="369824">
                 <a:tc>
@@ -23496,7 +23656,7 @@
                   </a:tcPr>
                 </a:tc>
               </a:tr>
-              <a:tr h="369824">
+              <a:tr h="611632">
                 <a:tc>
                   <a:txBody>
                     <a:bodyPr/>
@@ -23531,7 +23691,7 @@
                           </a:solidFill>
                           <a:latin typeface="Calibri"/>
                         </a:rPr>
-                        <a:t>Record less line; Q1 tied, so stop</a:t>
+                        <a:t>The record less its line ties Q1, and the pass stops</a:t>
                       </a:r>
                     </a:p>
                   </a:txBody>
@@ -23599,7 +23759,7 @@
                           </a:solidFill>
                           <a:latin typeface="Calibri"/>
                         </a:rPr>
-                        <a:t>Failures coerced to zero</a:t>
+                        <a:t>Failures turned into zero</a:t>
                       </a:r>
                     </a:p>
                   </a:txBody>
@@ -23667,7 +23827,7 @@
                           </a:solidFill>
                           <a:latin typeface="Calibri"/>
                         </a:rPr>
-                        <a:t>The bulk order fenced out</a:t>
+                        <a:t>The largest Q2 order removed as an outlier</a:t>
                       </a:r>
                     </a:p>
                   </a:txBody>
@@ -23700,7 +23860,7 @@
                   </a:tcPr>
                 </a:tc>
               </a:tr>
-              <a:tr h="369824">
+              <a:tr h="611632">
                 <a:tc>
                   <a:txBody>
                     <a:bodyPr/>
@@ -28342,7 +28502,7 @@
                 </a:solidFill>
                 <a:latin typeface="Calibri"/>
               </a:rPr>
-              <a:t>98% in two corporate rows</a:t>
+              <a:t>98.5% in two corporate rows</a:t>
             </a:r>
           </a:p>
         </p:txBody>
@@ -32659,7 +32819,7 @@
       <p:grpSpPr/>
       <p:pic>
         <p:nvPicPr>
-          <p:cNvPr id="2" name="Picture 1" descr="bg_dark.jpg"/>
+          <p:cNvPr id="2" name="Picture 1" descr="bg_light.jpg"/>
           <p:cNvPicPr>
             <a:picLocks noChangeAspect="1"/>
           </p:cNvPicPr>
@@ -32731,7 +32891,7 @@
             <a:r>
               <a:rPr sz="900" b="1" i="0">
                 <a:solidFill>
-                  <a:srgbClr val="FFFFFF"/>
+                  <a:srgbClr val="1A0F5C"/>
                 </a:solidFill>
                 <a:latin typeface="Calibri"/>
               </a:rPr>
@@ -32766,7 +32926,7 @@
             <a:r>
               <a:rPr sz="550" b="1" i="0" spc="300">
                 <a:solidFill>
-                  <a:srgbClr val="CFC9EE"/>
+                  <a:srgbClr val="6B6690"/>
                 </a:solidFill>
                 <a:latin typeface="Calibri"/>
               </a:rPr>
@@ -32801,11 +32961,11 @@
             <a:r>
               <a:rPr sz="550" b="1" i="0" spc="300">
                 <a:solidFill>
-                  <a:srgbClr val="CFC9EE"/>
-                </a:solidFill>
-                <a:latin typeface="Calibri"/>
-              </a:rPr>
-              <a:t>PG DIPLOMA IN AI-ML AND AGENTIC AI ENGINEERING  ·  COHORT 2</a:t>
+                  <a:srgbClr val="6B6690"/>
+                </a:solidFill>
+                <a:latin typeface="Calibri"/>
+              </a:rPr>
+              <a:t>WEEK 1  ·  DAY 3  ·  KALPA GLOBAL CAPABILITY CENTRE</a:t>
             </a:r>
           </a:p>
         </p:txBody>
@@ -32818,124 +32978,54 @@
         </p:nvSpPr>
         <p:spPr>
           <a:xfrm>
-            <a:off x="731519" y="1143000"/>
-            <a:ext cx="3657600" cy="1371600"/>
-          </a:xfrm>
-          <a:prstGeom prst="rect">
-            <a:avLst/>
-          </a:prstGeom>
-          <a:noFill/>
-        </p:spPr>
-        <p:txBody>
-          <a:bodyPr wrap="square" anchor="t" lIns="0" rIns="0" tIns="0" bIns="0">
+            <a:off x="530352" y="676656"/>
+            <a:ext cx="10033711" cy="512064"/>
+          </a:xfrm>
+          <a:prstGeom prst="rect">
+            <a:avLst/>
+          </a:prstGeom>
+          <a:noFill/>
+        </p:spPr>
+        <p:txBody>
+          <a:bodyPr wrap="square" anchor="b" lIns="0" rIns="0" tIns="0" bIns="0">
             <a:spAutoFit/>
           </a:bodyPr>
           <a:lstStyle/>
           <a:p>
             <a:pPr algn="l"/>
             <a:r>
-              <a:rPr sz="9600" b="0" i="0">
-                <a:solidFill>
-                  <a:srgbClr val="D9A7FF"/>
+              <a:rPr sz="2600" b="0" i="0">
+                <a:solidFill>
+                  <a:srgbClr val="1A0F5C"/>
                 </a:solidFill>
                 <a:latin typeface="Georgia"/>
               </a:rPr>
-              <a:t>11</a:t>
-            </a:r>
-          </a:p>
-        </p:txBody>
-      </p:sp>
-      <p:sp>
-        <p:nvSpPr>
-          <p:cNvPr id="8" name="TextBox 7"/>
-          <p:cNvSpPr txBox="1"/>
-          <p:nvPr/>
-        </p:nvSpPr>
-        <p:spPr>
-          <a:xfrm>
-            <a:off x="731519" y="2606040"/>
-            <a:ext cx="10673791" cy="731520"/>
-          </a:xfrm>
-          <a:prstGeom prst="rect">
-            <a:avLst/>
-          </a:prstGeom>
-          <a:noFill/>
-        </p:spPr>
-        <p:txBody>
-          <a:bodyPr wrap="square" anchor="t" lIns="0" rIns="0" tIns="0" bIns="0">
-            <a:spAutoFit/>
-          </a:bodyPr>
-          <a:lstStyle/>
-          <a:p>
-            <a:pPr algn="l"/>
-            <a:r>
-              <a:rPr sz="4000" b="0" i="0">
-                <a:solidFill>
-                  <a:srgbClr val="FFFFFF"/>
-                </a:solidFill>
-                <a:latin typeface="Georgia"/>
-              </a:rPr>
-              <a:t>What do we tell Anand?</a:t>
-            </a:r>
-          </a:p>
-        </p:txBody>
-      </p:sp>
-      <p:sp>
-        <p:nvSpPr>
-          <p:cNvPr id="9" name="TextBox 8"/>
-          <p:cNvSpPr txBox="1"/>
-          <p:nvPr/>
-        </p:nvSpPr>
-        <p:spPr>
-          <a:xfrm>
-            <a:off x="731519" y="3520440"/>
-            <a:ext cx="9509760" cy="531876"/>
-          </a:xfrm>
-          <a:prstGeom prst="rect">
-            <a:avLst/>
-          </a:prstGeom>
-          <a:noFill/>
-        </p:spPr>
-        <p:txBody>
-          <a:bodyPr wrap="square" anchor="t" lIns="0" rIns="0" tIns="0" bIns="0">
-            <a:spAutoFit/>
-          </a:bodyPr>
-          <a:lstStyle/>
-          <a:p>
-            <a:pPr algn="l"/>
-            <a:r>
-              <a:rPr sz="1500" b="0" i="0">
-                <a:solidFill>
-                  <a:srgbClr val="E4E1F1"/>
-                </a:solidFill>
-                <a:latin typeface="Calibri"/>
-              </a:rPr>
-              <a:t>Which Q1 figure is right, the dashboard's Rs 2.1 crore or the books' Rs 1.9 crore, and how do we know?</a:t>
-            </a:r>
-          </a:p>
-        </p:txBody>
-      </p:sp>
-      <p:sp>
-        <p:nvSpPr>
-          <p:cNvPr id="10" name="Rounded Rectangle 9"/>
+              <a:t>The same two checks run wherever money moves</a:t>
+            </a:r>
+          </a:p>
+        </p:txBody>
+      </p:sp>
+      <p:sp>
+        <p:nvSpPr>
+          <p:cNvPr id="8" name="Rounded Rectangle 7"/>
           <p:cNvSpPr/>
           <p:nvPr/>
         </p:nvSpPr>
         <p:spPr>
           <a:xfrm>
-            <a:off x="731519" y="5074920"/>
-            <a:ext cx="1673692" cy="310896"/>
+            <a:off x="10701223" y="822960"/>
+            <a:ext cx="960120" cy="256032"/>
           </a:xfrm>
           <a:prstGeom prst="roundRect">
             <a:avLst>
               <a:gd name="adj" fmla="val 50000"/>
             </a:avLst>
           </a:prstGeom>
-          <a:noFill/>
-          <a:ln w="9525">
-            <a:solidFill>
-              <a:srgbClr val="CFC9EE"/>
-            </a:solidFill>
+          <a:solidFill>
+            <a:srgbClr val="1A0F5C"/>
+          </a:solidFill>
+          <a:ln>
+            <a:noFill/>
           </a:ln>
           <a:effectLst/>
         </p:spPr>
@@ -32959,38 +33049,370 @@
           <a:p>
             <a:pPr algn="ctr"/>
             <a:r>
-              <a:rPr sz="850" b="0">
-                <a:solidFill>
-                  <a:srgbClr val="CFC9EE"/>
-                </a:solidFill>
-                <a:latin typeface="Calibri"/>
-              </a:rPr>
-              <a:t>Can the analyst replay it?</a:t>
-            </a:r>
-          </a:p>
-        </p:txBody>
-      </p:sp>
-      <p:sp>
-        <p:nvSpPr>
-          <p:cNvPr id="11" name="Rounded Rectangle 10"/>
+              <a:rPr sz="800" b="1" spc="200">
+                <a:solidFill>
+                  <a:srgbClr val="FFFFFF"/>
+                </a:solidFill>
+                <a:latin typeface="Calibri"/>
+              </a:rPr>
+              <a:t>DEPTH</a:t>
+            </a:r>
+          </a:p>
+        </p:txBody>
+      </p:sp>
+      <p:sp>
+        <p:nvSpPr>
+          <p:cNvPr id="9" name="TextBox 8"/>
+          <p:cNvSpPr txBox="1"/>
+          <p:nvPr/>
+        </p:nvSpPr>
+        <p:spPr>
+          <a:xfrm>
+            <a:off x="530352" y="1243584"/>
+            <a:ext cx="11130991" cy="234696"/>
+          </a:xfrm>
+          <a:prstGeom prst="rect">
+            <a:avLst/>
+          </a:prstGeom>
+          <a:noFill/>
+        </p:spPr>
+        <p:txBody>
+          <a:bodyPr wrap="square" anchor="t" lIns="0" rIns="0" tIns="0" bIns="0">
+            <a:spAutoFit/>
+          </a:bodyPr>
+          <a:lstStyle/>
+          <a:p>
+            <a:pPr algn="l"/>
+            <a:r>
+              <a:rPr sz="1200" b="0" i="0">
+                <a:solidFill>
+                  <a:srgbClr val="6B6690"/>
+                </a:solidFill>
+                <a:latin typeface="Calibri"/>
+              </a:rPr>
+              <a:t>Where else do rows and money get reconciled?</a:t>
+            </a:r>
+          </a:p>
+        </p:txBody>
+      </p:sp>
+      <p:graphicFrame>
+        <p:nvGraphicFramePr>
+          <p:cNvPr id="10" name="Table 9"/>
+          <p:cNvGraphicFramePr>
+            <a:graphicFrameLocks noGrp="1"/>
+          </p:cNvGraphicFramePr>
+          <p:nvPr/>
+        </p:nvGraphicFramePr>
+        <p:xfrm>
+          <a:off x="530352" y="1956816"/>
+          <a:ext cx="11130989" cy="1479296"/>
+        </p:xfrm>
+        <a:graphic>
+          <a:graphicData uri="http://schemas.openxmlformats.org/drawingml/2006/table">
+            <a:tbl>
+              <a:tblPr firstRow="0" bandRow="0">
+                <a:tableStyleId>{2D5ABB26-0587-4C30-8999-92F81FD0307C}</a:tableStyleId>
+              </a:tblPr>
+              <a:tblGrid>
+                <a:gridCol w="4571642"/>
+                <a:gridCol w="3021280"/>
+                <a:gridCol w="3538067"/>
+              </a:tblGrid>
+              <a:tr h="369824">
+                <a:tc>
+                  <a:txBody>
+                    <a:bodyPr/>
+                    <a:lstStyle/>
+                    <a:p>
+                      <a:r>
+                        <a:rPr sz="1450" b="1" i="0">
+                          <a:solidFill>
+                            <a:srgbClr val="FFFFFF"/>
+                          </a:solidFill>
+                          <a:latin typeface="Calibri"/>
+                        </a:rPr>
+                        <a:t>Where</a:t>
+                      </a:r>
+                    </a:p>
+                  </a:txBody>
+                  <a:tcPr marL="101600" marR="101600" marT="38100" marB="38100" anchor="ctr">
+                    <a:solidFill>
+                      <a:srgbClr val="1A0F5C"/>
+                    </a:solidFill>
+                  </a:tcPr>
+                </a:tc>
+                <a:tc>
+                  <a:txBody>
+                    <a:bodyPr/>
+                    <a:lstStyle/>
+                    <a:p>
+                      <a:r>
+                        <a:rPr sz="1450" b="1" i="0">
+                          <a:solidFill>
+                            <a:srgbClr val="FFFFFF"/>
+                          </a:solidFill>
+                          <a:latin typeface="Calibri"/>
+                        </a:rPr>
+                        <a:t>Rows</a:t>
+                      </a:r>
+                    </a:p>
+                  </a:txBody>
+                  <a:tcPr marL="101600" marR="101600" marT="38100" marB="38100" anchor="ctr">
+                    <a:solidFill>
+                      <a:srgbClr val="1A0F5C"/>
+                    </a:solidFill>
+                  </a:tcPr>
+                </a:tc>
+                <a:tc>
+                  <a:txBody>
+                    <a:bodyPr/>
+                    <a:lstStyle/>
+                    <a:p>
+                      <a:r>
+                        <a:rPr sz="1450" b="1" i="0">
+                          <a:solidFill>
+                            <a:srgbClr val="FFFFFF"/>
+                          </a:solidFill>
+                          <a:latin typeface="Calibri"/>
+                        </a:rPr>
+                        <a:t>Money</a:t>
+                      </a:r>
+                    </a:p>
+                  </a:txBody>
+                  <a:tcPr marL="101600" marR="101600" marT="38100" marB="38100" anchor="ctr">
+                    <a:solidFill>
+                      <a:srgbClr val="1A0F5C"/>
+                    </a:solidFill>
+                  </a:tcPr>
+                </a:tc>
+              </a:tr>
+              <a:tr h="369824">
+                <a:tc>
+                  <a:txBody>
+                    <a:bodyPr/>
+                    <a:lstStyle/>
+                    <a:p>
+                      <a:r>
+                        <a:rPr sz="1400" b="0" i="0">
+                          <a:solidFill>
+                            <a:srgbClr val="1A1440"/>
+                          </a:solidFill>
+                          <a:latin typeface="Calibri"/>
+                        </a:rPr>
+                        <a:t>Bank statement against the ledger</a:t>
+                      </a:r>
+                    </a:p>
+                  </a:txBody>
+                  <a:tcPr marL="101600" marR="101600" marT="38100" marB="38100" anchor="ctr">
+                    <a:solidFill>
+                      <a:srgbClr val="FFFFFF"/>
+                    </a:solidFill>
+                  </a:tcPr>
+                </a:tc>
+                <a:tc>
+                  <a:txBody>
+                    <a:bodyPr/>
+                    <a:lstStyle/>
+                    <a:p>
+                      <a:r>
+                        <a:rPr sz="1400" b="0" i="0">
+                          <a:solidFill>
+                            <a:srgbClr val="1A1440"/>
+                          </a:solidFill>
+                          <a:latin typeface="Calibri"/>
+                        </a:rPr>
+                        <a:t>Transactions matched</a:t>
+                      </a:r>
+                    </a:p>
+                  </a:txBody>
+                  <a:tcPr marL="101600" marR="101600" marT="38100" marB="38100" anchor="ctr">
+                    <a:solidFill>
+                      <a:srgbClr val="FFFFFF"/>
+                    </a:solidFill>
+                  </a:tcPr>
+                </a:tc>
+                <a:tc>
+                  <a:txBody>
+                    <a:bodyPr/>
+                    <a:lstStyle/>
+                    <a:p>
+                      <a:r>
+                        <a:rPr sz="1400" b="0" i="0">
+                          <a:solidFill>
+                            <a:srgbClr val="1A1440"/>
+                          </a:solidFill>
+                          <a:latin typeface="Calibri"/>
+                        </a:rPr>
+                        <a:t>Balance to the paisa</a:t>
+                      </a:r>
+                    </a:p>
+                  </a:txBody>
+                  <a:tcPr marL="101600" marR="101600" marT="38100" marB="38100" anchor="ctr">
+                    <a:solidFill>
+                      <a:srgbClr val="FFFFFF"/>
+                    </a:solidFill>
+                  </a:tcPr>
+                </a:tc>
+              </a:tr>
+              <a:tr h="369824">
+                <a:tc>
+                  <a:txBody>
+                    <a:bodyPr/>
+                    <a:lstStyle/>
+                    <a:p>
+                      <a:r>
+                        <a:rPr sz="1400" b="0" i="0">
+                          <a:solidFill>
+                            <a:srgbClr val="1A1440"/>
+                          </a:solidFill>
+                          <a:latin typeface="Calibri"/>
+                        </a:rPr>
+                        <a:t>Payment gateway against orders</a:t>
+                      </a:r>
+                    </a:p>
+                  </a:txBody>
+                  <a:tcPr marL="101600" marR="101600" marT="38100" marB="38100" anchor="ctr">
+                    <a:solidFill>
+                      <a:srgbClr val="F4F2FA"/>
+                    </a:solidFill>
+                  </a:tcPr>
+                </a:tc>
+                <a:tc>
+                  <a:txBody>
+                    <a:bodyPr/>
+                    <a:lstStyle/>
+                    <a:p>
+                      <a:r>
+                        <a:rPr sz="1400" b="0" i="0">
+                          <a:solidFill>
+                            <a:srgbClr val="1A1440"/>
+                          </a:solidFill>
+                          <a:latin typeface="Calibri"/>
+                        </a:rPr>
+                        <a:t>Settlements per order</a:t>
+                      </a:r>
+                    </a:p>
+                  </a:txBody>
+                  <a:tcPr marL="101600" marR="101600" marT="38100" marB="38100" anchor="ctr">
+                    <a:solidFill>
+                      <a:srgbClr val="F4F2FA"/>
+                    </a:solidFill>
+                  </a:tcPr>
+                </a:tc>
+                <a:tc>
+                  <a:txBody>
+                    <a:bodyPr/>
+                    <a:lstStyle/>
+                    <a:p>
+                      <a:r>
+                        <a:rPr sz="1400" b="0" i="0">
+                          <a:solidFill>
+                            <a:srgbClr val="1A1440"/>
+                          </a:solidFill>
+                          <a:latin typeface="Calibri"/>
+                        </a:rPr>
+                        <a:t>Collected against booked</a:t>
+                      </a:r>
+                    </a:p>
+                  </a:txBody>
+                  <a:tcPr marL="101600" marR="101600" marT="38100" marB="38100" anchor="ctr">
+                    <a:solidFill>
+                      <a:srgbClr val="F4F2FA"/>
+                    </a:solidFill>
+                  </a:tcPr>
+                </a:tc>
+              </a:tr>
+              <a:tr h="369824">
+                <a:tc>
+                  <a:txBody>
+                    <a:bodyPr/>
+                    <a:lstStyle/>
+                    <a:p>
+                      <a:r>
+                        <a:rPr sz="1400" b="0" i="0">
+                          <a:solidFill>
+                            <a:srgbClr val="1A1440"/>
+                          </a:solidFill>
+                          <a:latin typeface="Calibri"/>
+                        </a:rPr>
+                        <a:t>Warehouse load against the source</a:t>
+                      </a:r>
+                    </a:p>
+                  </a:txBody>
+                  <a:tcPr marL="101600" marR="101600" marT="38100" marB="38100" anchor="ctr">
+                    <a:solidFill>
+                      <a:srgbClr val="FFFFFF"/>
+                    </a:solidFill>
+                  </a:tcPr>
+                </a:tc>
+                <a:tc>
+                  <a:txBody>
+                    <a:bodyPr/>
+                    <a:lstStyle/>
+                    <a:p>
+                      <a:r>
+                        <a:rPr sz="1400" b="0" i="0">
+                          <a:solidFill>
+                            <a:srgbClr val="1A1440"/>
+                          </a:solidFill>
+                          <a:latin typeface="Calibri"/>
+                        </a:rPr>
+                        <a:t>Row counts per table</a:t>
+                      </a:r>
+                    </a:p>
+                  </a:txBody>
+                  <a:tcPr marL="101600" marR="101600" marT="38100" marB="38100" anchor="ctr">
+                    <a:solidFill>
+                      <a:srgbClr val="FFFFFF"/>
+                    </a:solidFill>
+                  </a:tcPr>
+                </a:tc>
+                <a:tc>
+                  <a:txBody>
+                    <a:bodyPr/>
+                    <a:lstStyle/>
+                    <a:p>
+                      <a:r>
+                        <a:rPr sz="1400" b="0" i="0">
+                          <a:solidFill>
+                            <a:srgbClr val="1A1440"/>
+                          </a:solidFill>
+                          <a:latin typeface="Calibri"/>
+                        </a:rPr>
+                        <a:t>Control totals per column</a:t>
+                      </a:r>
+                    </a:p>
+                  </a:txBody>
+                  <a:tcPr marL="101600" marR="101600" marT="38100" marB="38100" anchor="ctr">
+                    <a:solidFill>
+                      <a:srgbClr val="FFFFFF"/>
+                    </a:solidFill>
+                  </a:tcPr>
+                </a:tc>
+              </a:tr>
+            </a:tbl>
+          </a:graphicData>
+        </a:graphic>
+      </p:graphicFrame>
+      <p:sp>
+        <p:nvSpPr>
+          <p:cNvPr id="11" name="Oval 10"/>
           <p:cNvSpPr/>
           <p:nvPr/>
         </p:nvSpPr>
         <p:spPr>
           <a:xfrm>
-            <a:off x="2514940" y="5074920"/>
-            <a:ext cx="1725708" cy="310896"/>
-          </a:xfrm>
-          <a:prstGeom prst="roundRect">
-            <a:avLst>
-              <a:gd name="adj" fmla="val 50000"/>
-            </a:avLst>
-          </a:prstGeom>
-          <a:noFill/>
-          <a:ln w="9525">
-            <a:solidFill>
-              <a:srgbClr val="CFC9EE"/>
-            </a:solidFill>
+            <a:off x="530352" y="6492240"/>
+            <a:ext cx="64008" cy="64008"/>
+          </a:xfrm>
+          <a:prstGeom prst="ellipse">
+            <a:avLst/>
+          </a:prstGeom>
+          <a:solidFill>
+            <a:srgbClr val="CFC9EE"/>
+          </a:solidFill>
+          <a:ln>
+            <a:noFill/>
           </a:ln>
           <a:effectLst/>
         </p:spPr>
@@ -33009,43 +33431,67 @@
           </a:fontRef>
         </p:style>
         <p:txBody>
-          <a:bodyPr rtlCol="0" anchor="ctr" wrap="none" lIns="25400" rIns="25400" tIns="0" bIns="0"/>
+          <a:bodyPr rtlCol="0" anchor="ctr" wrap="square"/>
           <a:lstStyle/>
           <a:p>
             <a:pPr algn="ctr"/>
-            <a:r>
-              <a:rPr sz="850" b="0">
-                <a:solidFill>
-                  <a:srgbClr val="CFC9EE"/>
-                </a:solidFill>
-                <a:latin typeface="Calibri"/>
-              </a:rPr>
-              <a:t>Can you run the pass alone?</a:t>
-            </a:r>
-          </a:p>
-        </p:txBody>
-      </p:sp>
-      <p:sp>
-        <p:nvSpPr>
-          <p:cNvPr id="12" name="Rounded Rectangle 11"/>
+          </a:p>
+        </p:txBody>
+      </p:sp>
+      <p:sp>
+        <p:nvSpPr>
+          <p:cNvPr id="12" name="TextBox 11"/>
+          <p:cNvSpPr txBox="1"/>
+          <p:nvPr/>
+        </p:nvSpPr>
+        <p:spPr>
+          <a:xfrm>
+            <a:off x="640080" y="6437376"/>
+            <a:ext cx="1470469" cy="152146"/>
+          </a:xfrm>
+          <a:prstGeom prst="rect">
+            <a:avLst/>
+          </a:prstGeom>
+          <a:noFill/>
+        </p:spPr>
+        <p:txBody>
+          <a:bodyPr wrap="square" anchor="t" lIns="0" rIns="0" tIns="0" bIns="0">
+            <a:spAutoFit/>
+          </a:bodyPr>
+          <a:lstStyle/>
+          <a:p>
+            <a:pPr algn="l"/>
+            <a:r>
+              <a:rPr sz="700" b="0" i="0">
+                <a:solidFill>
+                  <a:srgbClr val="6B6690"/>
+                </a:solidFill>
+                <a:latin typeface="Calibri"/>
+              </a:rPr>
+              <a:t>Can the analyst replay it?</a:t>
+            </a:r>
+          </a:p>
+        </p:txBody>
+      </p:sp>
+      <p:sp>
+        <p:nvSpPr>
+          <p:cNvPr id="13" name="Oval 12"/>
           <p:cNvSpPr/>
           <p:nvPr/>
         </p:nvSpPr>
         <p:spPr>
           <a:xfrm>
-            <a:off x="4350376" y="5074920"/>
-            <a:ext cx="1887553" cy="310896"/>
-          </a:xfrm>
-          <a:prstGeom prst="roundRect">
-            <a:avLst>
-              <a:gd name="adj" fmla="val 50000"/>
-            </a:avLst>
-          </a:prstGeom>
-          <a:noFill/>
-          <a:ln w="9525">
-            <a:solidFill>
-              <a:srgbClr val="CFC9EE"/>
-            </a:solidFill>
+            <a:off x="2201989" y="6492240"/>
+            <a:ext cx="64008" cy="64008"/>
+          </a:xfrm>
+          <a:prstGeom prst="ellipse">
+            <a:avLst/>
+          </a:prstGeom>
+          <a:solidFill>
+            <a:srgbClr val="CFC9EE"/>
+          </a:solidFill>
+          <a:ln>
+            <a:noFill/>
           </a:ln>
           <a:effectLst/>
         </p:spPr>
@@ -33064,43 +33510,67 @@
           </a:fontRef>
         </p:style>
         <p:txBody>
-          <a:bodyPr rtlCol="0" anchor="ctr" wrap="none" lIns="25400" rIns="25400" tIns="0" bIns="0"/>
+          <a:bodyPr rtlCol="0" anchor="ctr" wrap="square"/>
           <a:lstStyle/>
           <a:p>
             <a:pPr algn="ctr"/>
-            <a:r>
-              <a:rPr sz="850" b="0">
-                <a:solidFill>
-                  <a:srgbClr val="CFC9EE"/>
-                </a:solidFill>
-                <a:latin typeface="Calibri"/>
-              </a:rPr>
-              <a:t>Where did our numbers go wrong?</a:t>
-            </a:r>
-          </a:p>
-        </p:txBody>
-      </p:sp>
-      <p:sp>
-        <p:nvSpPr>
-          <p:cNvPr id="13" name="Rounded Rectangle 12"/>
+          </a:p>
+        </p:txBody>
+      </p:sp>
+      <p:sp>
+        <p:nvSpPr>
+          <p:cNvPr id="14" name="TextBox 13"/>
+          <p:cNvSpPr txBox="1"/>
+          <p:nvPr/>
+        </p:nvSpPr>
+        <p:spPr>
+          <a:xfrm>
+            <a:off x="2311717" y="6437376"/>
+            <a:ext cx="1516475" cy="152146"/>
+          </a:xfrm>
+          <a:prstGeom prst="rect">
+            <a:avLst/>
+          </a:prstGeom>
+          <a:noFill/>
+        </p:spPr>
+        <p:txBody>
+          <a:bodyPr wrap="square" anchor="t" lIns="0" rIns="0" tIns="0" bIns="0">
+            <a:spAutoFit/>
+          </a:bodyPr>
+          <a:lstStyle/>
+          <a:p>
+            <a:pPr algn="l"/>
+            <a:r>
+              <a:rPr sz="700" b="0" i="0">
+                <a:solidFill>
+                  <a:srgbClr val="6B6690"/>
+                </a:solidFill>
+                <a:latin typeface="Calibri"/>
+              </a:rPr>
+              <a:t>Can you run the pass alone?</a:t>
+            </a:r>
+          </a:p>
+        </p:txBody>
+      </p:sp>
+      <p:sp>
+        <p:nvSpPr>
+          <p:cNvPr id="15" name="Oval 14"/>
           <p:cNvSpPr/>
           <p:nvPr/>
         </p:nvSpPr>
         <p:spPr>
           <a:xfrm>
-            <a:off x="6347657" y="5074920"/>
-            <a:ext cx="1725708" cy="310896"/>
-          </a:xfrm>
-          <a:prstGeom prst="roundRect">
-            <a:avLst>
-              <a:gd name="adj" fmla="val 50000"/>
-            </a:avLst>
-          </a:prstGeom>
-          <a:noFill/>
-          <a:ln w="9525">
-            <a:solidFill>
-              <a:srgbClr val="CFC9EE"/>
-            </a:solidFill>
+            <a:off x="3919632" y="6492240"/>
+            <a:ext cx="64008" cy="64008"/>
+          </a:xfrm>
+          <a:prstGeom prst="ellipse">
+            <a:avLst/>
+          </a:prstGeom>
+          <a:solidFill>
+            <a:srgbClr val="CFC9EE"/>
+          </a:solidFill>
+          <a:ln>
+            <a:noFill/>
           </a:ln>
           <a:effectLst/>
         </p:spPr>
@@ -33119,43 +33589,67 @@
           </a:fontRef>
         </p:style>
         <p:txBody>
-          <a:bodyPr rtlCol="0" anchor="ctr" wrap="none" lIns="25400" rIns="25400" tIns="0" bIns="0"/>
+          <a:bodyPr rtlCol="0" anchor="ctr" wrap="square"/>
           <a:lstStyle/>
           <a:p>
             <a:pPr algn="ctr"/>
-            <a:r>
-              <a:rPr sz="850" b="0">
-                <a:solidFill>
-                  <a:srgbClr val="CFC9EE"/>
-                </a:solidFill>
-                <a:latin typeface="Calibri"/>
-              </a:rPr>
-              <a:t>Why were 14 rows set aside?</a:t>
-            </a:r>
-          </a:p>
-        </p:txBody>
-      </p:sp>
-      <p:sp>
-        <p:nvSpPr>
-          <p:cNvPr id="14" name="Rounded Rectangle 13"/>
+          </a:p>
+        </p:txBody>
+      </p:sp>
+      <p:sp>
+        <p:nvSpPr>
+          <p:cNvPr id="16" name="TextBox 15"/>
+          <p:cNvSpPr txBox="1"/>
+          <p:nvPr/>
+        </p:nvSpPr>
+        <p:spPr>
+          <a:xfrm>
+            <a:off x="4029360" y="6437376"/>
+            <a:ext cx="1700498" cy="152146"/>
+          </a:xfrm>
+          <a:prstGeom prst="rect">
+            <a:avLst/>
+          </a:prstGeom>
+          <a:noFill/>
+        </p:spPr>
+        <p:txBody>
+          <a:bodyPr wrap="square" anchor="t" lIns="0" rIns="0" tIns="0" bIns="0">
+            <a:spAutoFit/>
+          </a:bodyPr>
+          <a:lstStyle/>
+          <a:p>
+            <a:pPr algn="l"/>
+            <a:r>
+              <a:rPr sz="700" b="0" i="0">
+                <a:solidFill>
+                  <a:srgbClr val="6B6690"/>
+                </a:solidFill>
+                <a:latin typeface="Calibri"/>
+              </a:rPr>
+              <a:t>Where did our numbers go wrong?</a:t>
+            </a:r>
+          </a:p>
+        </p:txBody>
+      </p:sp>
+      <p:sp>
+        <p:nvSpPr>
+          <p:cNvPr id="17" name="Oval 16"/>
           <p:cNvSpPr/>
           <p:nvPr/>
         </p:nvSpPr>
         <p:spPr>
           <a:xfrm>
-            <a:off x="8183093" y="5074920"/>
-            <a:ext cx="1829739" cy="310896"/>
-          </a:xfrm>
-          <a:prstGeom prst="roundRect">
-            <a:avLst>
-              <a:gd name="adj" fmla="val 50000"/>
-            </a:avLst>
-          </a:prstGeom>
-          <a:noFill/>
-          <a:ln w="9525">
-            <a:solidFill>
-              <a:srgbClr val="CFC9EE"/>
-            </a:solidFill>
+            <a:off x="5821298" y="6492240"/>
+            <a:ext cx="64008" cy="64008"/>
+          </a:xfrm>
+          <a:prstGeom prst="ellipse">
+            <a:avLst/>
+          </a:prstGeom>
+          <a:solidFill>
+            <a:srgbClr val="CFC9EE"/>
+          </a:solidFill>
+          <a:ln>
+            <a:noFill/>
           </a:ln>
           <a:effectLst/>
         </p:spPr>
@@ -33174,40 +33668,64 @@
           </a:fontRef>
         </p:style>
         <p:txBody>
-          <a:bodyPr rtlCol="0" anchor="ctr" wrap="none" lIns="25400" rIns="25400" tIns="0" bIns="0"/>
+          <a:bodyPr rtlCol="0" anchor="ctr" wrap="square"/>
           <a:lstStyle/>
           <a:p>
             <a:pPr algn="ctr"/>
-            <a:r>
-              <a:rPr sz="850" b="0">
-                <a:solidFill>
-                  <a:srgbClr val="CFC9EE"/>
-                </a:solidFill>
-                <a:latin typeface="Calibri"/>
-              </a:rPr>
-              <a:t>Can you answer in 90 seconds?</a:t>
-            </a:r>
-          </a:p>
-        </p:txBody>
-      </p:sp>
-      <p:sp>
-        <p:nvSpPr>
-          <p:cNvPr id="15" name="Rounded Rectangle 14"/>
+          </a:p>
+        </p:txBody>
+      </p:sp>
+      <p:sp>
+        <p:nvSpPr>
+          <p:cNvPr id="18" name="TextBox 17"/>
+          <p:cNvSpPr txBox="1"/>
+          <p:nvPr/>
+        </p:nvSpPr>
+        <p:spPr>
+          <a:xfrm>
+            <a:off x="5931026" y="6437376"/>
+            <a:ext cx="1516475" cy="152146"/>
+          </a:xfrm>
+          <a:prstGeom prst="rect">
+            <a:avLst/>
+          </a:prstGeom>
+          <a:noFill/>
+        </p:spPr>
+        <p:txBody>
+          <a:bodyPr wrap="square" anchor="t" lIns="0" rIns="0" tIns="0" bIns="0">
+            <a:spAutoFit/>
+          </a:bodyPr>
+          <a:lstStyle/>
+          <a:p>
+            <a:pPr algn="l"/>
+            <a:r>
+              <a:rPr sz="700" b="0" i="0">
+                <a:solidFill>
+                  <a:srgbClr val="6B6690"/>
+                </a:solidFill>
+                <a:latin typeface="Calibri"/>
+              </a:rPr>
+              <a:t>Why were 14 rows set aside?</a:t>
+            </a:r>
+          </a:p>
+        </p:txBody>
+      </p:sp>
+      <p:sp>
+        <p:nvSpPr>
+          <p:cNvPr id="19" name="Oval 18"/>
           <p:cNvSpPr/>
           <p:nvPr/>
         </p:nvSpPr>
         <p:spPr>
           <a:xfrm>
-            <a:off x="10122561" y="5074920"/>
-            <a:ext cx="1465629" cy="310896"/>
-          </a:xfrm>
-          <a:prstGeom prst="roundRect">
-            <a:avLst>
-              <a:gd name="adj" fmla="val 50000"/>
-            </a:avLst>
+            <a:off x="7538942" y="6492240"/>
+            <a:ext cx="64008" cy="64008"/>
+          </a:xfrm>
+          <a:prstGeom prst="ellipse">
+            <a:avLst/>
           </a:prstGeom>
           <a:solidFill>
-            <a:srgbClr val="D9A7FF"/>
+            <a:srgbClr val="5B3FD6"/>
           </a:solidFill>
           <a:ln>
             <a:noFill/>
@@ -33229,14 +33747,119 @@
           </a:fontRef>
         </p:style>
         <p:txBody>
-          <a:bodyPr rtlCol="0" anchor="ctr" wrap="none" lIns="25400" rIns="25400" tIns="0" bIns="0"/>
+          <a:bodyPr rtlCol="0" anchor="ctr" wrap="square"/>
           <a:lstStyle/>
           <a:p>
             <a:pPr algn="ctr"/>
-            <a:r>
-              <a:rPr sz="850" b="1">
-                <a:solidFill>
-                  <a:srgbClr val="1A0F5C"/>
+          </a:p>
+        </p:txBody>
+      </p:sp>
+      <p:sp>
+        <p:nvSpPr>
+          <p:cNvPr id="20" name="TextBox 19"/>
+          <p:cNvSpPr txBox="1"/>
+          <p:nvPr/>
+        </p:nvSpPr>
+        <p:spPr>
+          <a:xfrm>
+            <a:off x="7648670" y="6437376"/>
+            <a:ext cx="1608486" cy="152146"/>
+          </a:xfrm>
+          <a:prstGeom prst="rect">
+            <a:avLst/>
+          </a:prstGeom>
+          <a:noFill/>
+        </p:spPr>
+        <p:txBody>
+          <a:bodyPr wrap="square" anchor="t" lIns="0" rIns="0" tIns="0" bIns="0">
+            <a:spAutoFit/>
+          </a:bodyPr>
+          <a:lstStyle/>
+          <a:p>
+            <a:pPr algn="l"/>
+            <a:r>
+              <a:rPr sz="700" b="1" i="0">
+                <a:solidFill>
+                  <a:srgbClr val="5B3FD6"/>
+                </a:solidFill>
+                <a:latin typeface="Calibri"/>
+              </a:rPr>
+              <a:t>Can you answer in 90 seconds?</a:t>
+            </a:r>
+          </a:p>
+        </p:txBody>
+      </p:sp>
+      <p:sp>
+        <p:nvSpPr>
+          <p:cNvPr id="21" name="Oval 20"/>
+          <p:cNvSpPr/>
+          <p:nvPr/>
+        </p:nvSpPr>
+        <p:spPr>
+          <a:xfrm>
+            <a:off x="9348597" y="6492240"/>
+            <a:ext cx="64008" cy="64008"/>
+          </a:xfrm>
+          <a:prstGeom prst="ellipse">
+            <a:avLst/>
+          </a:prstGeom>
+          <a:solidFill>
+            <a:srgbClr val="CFC9EE"/>
+          </a:solidFill>
+          <a:ln>
+            <a:noFill/>
+          </a:ln>
+          <a:effectLst/>
+        </p:spPr>
+        <p:style>
+          <a:lnRef idx="1">
+            <a:schemeClr val="accent1"/>
+          </a:lnRef>
+          <a:fillRef idx="3">
+            <a:schemeClr val="accent1"/>
+          </a:fillRef>
+          <a:effectRef idx="2">
+            <a:schemeClr val="accent1"/>
+          </a:effectRef>
+          <a:fontRef idx="minor">
+            <a:schemeClr val="lt1"/>
+          </a:fontRef>
+        </p:style>
+        <p:txBody>
+          <a:bodyPr rtlCol="0" anchor="ctr" wrap="square"/>
+          <a:lstStyle/>
+          <a:p>
+            <a:pPr algn="ctr"/>
+          </a:p>
+        </p:txBody>
+      </p:sp>
+      <p:sp>
+        <p:nvSpPr>
+          <p:cNvPr id="22" name="TextBox 21"/>
+          <p:cNvSpPr txBox="1"/>
+          <p:nvPr/>
+        </p:nvSpPr>
+        <p:spPr>
+          <a:xfrm>
+            <a:off x="9458324" y="6437376"/>
+            <a:ext cx="1286446" cy="152146"/>
+          </a:xfrm>
+          <a:prstGeom prst="rect">
+            <a:avLst/>
+          </a:prstGeom>
+          <a:noFill/>
+        </p:spPr>
+        <p:txBody>
+          <a:bodyPr wrap="square" anchor="t" lIns="0" rIns="0" tIns="0" bIns="0">
+            <a:spAutoFit/>
+          </a:bodyPr>
+          <a:lstStyle/>
+          <a:p>
+            <a:pPr algn="l"/>
+            <a:r>
+              <a:rPr sz="700" b="0" i="0">
+                <a:solidFill>
+                  <a:srgbClr val="6B6690"/>
                 </a:solidFill>
                 <a:latin typeface="Calibri"/>
               </a:rPr>
@@ -33247,42 +33870,7 @@
       </p:sp>
       <p:sp>
         <p:nvSpPr>
-          <p:cNvPr id="16" name="TextBox 15"/>
-          <p:cNvSpPr txBox="1"/>
-          <p:nvPr/>
-        </p:nvSpPr>
-        <p:spPr>
-          <a:xfrm>
-            <a:off x="530352" y="6437376"/>
-            <a:ext cx="9667951" cy="160401"/>
-          </a:xfrm>
-          <a:prstGeom prst="rect">
-            <a:avLst/>
-          </a:prstGeom>
-          <a:noFill/>
-        </p:spPr>
-        <p:txBody>
-          <a:bodyPr wrap="square" anchor="t" lIns="0" rIns="0" tIns="0" bIns="0">
-            <a:spAutoFit/>
-          </a:bodyPr>
-          <a:lstStyle/>
-          <a:p>
-            <a:pPr algn="l"/>
-            <a:r>
-              <a:rPr sz="750" b="0" i="0">
-                <a:solidFill>
-                  <a:srgbClr val="CFC9EE"/>
-                </a:solidFill>
-                <a:latin typeface="Calibri"/>
-              </a:rPr>
-              <a:t>Week 1 Day 3: which Q1 figure is right</a:t>
-            </a:r>
-          </a:p>
-        </p:txBody>
-      </p:sp>
-      <p:sp>
-        <p:nvSpPr>
-          <p:cNvPr id="17" name="TextBox 16"/>
+          <p:cNvPr id="23" name="TextBox 22"/>
           <p:cNvSpPr txBox="1"/>
           <p:nvPr/>
         </p:nvSpPr>
@@ -33306,11 +33894,11 @@
             <a:r>
               <a:rPr sz="750" b="0" i="0">
                 <a:solidFill>
-                  <a:srgbClr val="CFC9EE"/>
-                </a:solidFill>
-                <a:latin typeface="Calibri"/>
-              </a:rPr>
-              <a:t>31 / 35</a:t>
+                  <a:srgbClr val="6B6690"/>
+                </a:solidFill>
+                <a:latin typeface="Calibri"/>
+              </a:rPr>
+              <a:t>D25  ·  31 / 35</a:t>
             </a:r>
           </a:p>
         </p:txBody>
@@ -33335,7 +33923,7 @@
       <p:grpSpPr/>
       <p:pic>
         <p:nvPicPr>
-          <p:cNvPr id="2" name="Picture 1" descr="bg_light.jpg"/>
+          <p:cNvPr id="2" name="Picture 1" descr="bg_dark.jpg"/>
           <p:cNvPicPr>
             <a:picLocks noChangeAspect="1"/>
           </p:cNvPicPr>
@@ -33407,7 +33995,7 @@
             <a:r>
               <a:rPr sz="900" b="1" i="0">
                 <a:solidFill>
-                  <a:srgbClr val="1A0F5C"/>
+                  <a:srgbClr val="FFFFFF"/>
                 </a:solidFill>
                 <a:latin typeface="Calibri"/>
               </a:rPr>
@@ -33442,7 +34030,7 @@
             <a:r>
               <a:rPr sz="550" b="1" i="0" spc="300">
                 <a:solidFill>
-                  <a:srgbClr val="6B6690"/>
+                  <a:srgbClr val="CFC9EE"/>
                 </a:solidFill>
                 <a:latin typeface="Calibri"/>
               </a:rPr>
@@ -33477,11 +34065,11 @@
             <a:r>
               <a:rPr sz="550" b="1" i="0" spc="300">
                 <a:solidFill>
-                  <a:srgbClr val="6B6690"/>
-                </a:solidFill>
-                <a:latin typeface="Calibri"/>
-              </a:rPr>
-              <a:t>WEEK 1  ·  DAY 3  ·  KALPA GLOBAL CAPABILITY CENTRE</a:t>
+                  <a:srgbClr val="CFC9EE"/>
+                </a:solidFill>
+                <a:latin typeface="Calibri"/>
+              </a:rPr>
+              <a:t>PG DIPLOMA IN AI-ML AND AGENTIC AI ENGINEERING  ·  COHORT 2</a:t>
             </a:r>
           </a:p>
         </p:txBody>
@@ -33494,29 +34082,29 @@
         </p:nvSpPr>
         <p:spPr>
           <a:xfrm>
-            <a:off x="530352" y="676656"/>
-            <a:ext cx="11130991" cy="512064"/>
-          </a:xfrm>
-          <a:prstGeom prst="rect">
-            <a:avLst/>
-          </a:prstGeom>
-          <a:noFill/>
-        </p:spPr>
-        <p:txBody>
-          <a:bodyPr wrap="square" anchor="b" lIns="0" rIns="0" tIns="0" bIns="0">
+            <a:off x="731519" y="1143000"/>
+            <a:ext cx="3657600" cy="1371600"/>
+          </a:xfrm>
+          <a:prstGeom prst="rect">
+            <a:avLst/>
+          </a:prstGeom>
+          <a:noFill/>
+        </p:spPr>
+        <p:txBody>
+          <a:bodyPr wrap="square" anchor="t" lIns="0" rIns="0" tIns="0" bIns="0">
             <a:spAutoFit/>
           </a:bodyPr>
           <a:lstStyle/>
           <a:p>
             <a:pPr algn="l"/>
             <a:r>
-              <a:rPr sz="2600" b="0" i="0">
-                <a:solidFill>
-                  <a:srgbClr val="1A0F5C"/>
+              <a:rPr sz="9600" b="0" i="0">
+                <a:solidFill>
+                  <a:srgbClr val="D9A7FF"/>
                 </a:solidFill>
                 <a:latin typeface="Georgia"/>
               </a:rPr>
-              <a:t>Answer: the 1.9 is right, proved in rows and rupees</a:t>
+              <a:t>11</a:t>
             </a:r>
           </a:p>
         </p:txBody>
@@ -33529,8 +34117,8 @@
         </p:nvSpPr>
         <p:spPr>
           <a:xfrm>
-            <a:off x="530352" y="1243584"/>
-            <a:ext cx="11130991" cy="234696"/>
+            <a:off x="731519" y="2606040"/>
+            <a:ext cx="10673791" cy="731520"/>
           </a:xfrm>
           <a:prstGeom prst="rect">
             <a:avLst/>
@@ -33545,27 +34133,337 @@
           <a:p>
             <a:pPr algn="l"/>
             <a:r>
-              <a:rPr sz="1200" b="0" i="0">
-                <a:solidFill>
-                  <a:srgbClr val="6B6690"/>
-                </a:solidFill>
-                <a:latin typeface="Calibri"/>
-              </a:rPr>
-              <a:t>Which Q1 figure is right, and how do we know?</a:t>
-            </a:r>
-          </a:p>
-        </p:txBody>
-      </p:sp>
-      <p:sp>
-        <p:nvSpPr>
-          <p:cNvPr id="9" name="Rounded Rectangle 8"/>
+              <a:rPr sz="4000" b="0" i="0">
+                <a:solidFill>
+                  <a:srgbClr val="FFFFFF"/>
+                </a:solidFill>
+                <a:latin typeface="Georgia"/>
+              </a:rPr>
+              <a:t>What do we tell Anand?</a:t>
+            </a:r>
+          </a:p>
+        </p:txBody>
+      </p:sp>
+      <p:sp>
+        <p:nvSpPr>
+          <p:cNvPr id="9" name="TextBox 8"/>
+          <p:cNvSpPr txBox="1"/>
+          <p:nvPr/>
+        </p:nvSpPr>
+        <p:spPr>
+          <a:xfrm>
+            <a:off x="731519" y="3520440"/>
+            <a:ext cx="9509760" cy="531876"/>
+          </a:xfrm>
+          <a:prstGeom prst="rect">
+            <a:avLst/>
+          </a:prstGeom>
+          <a:noFill/>
+        </p:spPr>
+        <p:txBody>
+          <a:bodyPr wrap="square" anchor="t" lIns="0" rIns="0" tIns="0" bIns="0">
+            <a:spAutoFit/>
+          </a:bodyPr>
+          <a:lstStyle/>
+          <a:p>
+            <a:pPr algn="l"/>
+            <a:r>
+              <a:rPr sz="1500" b="0" i="0">
+                <a:solidFill>
+                  <a:srgbClr val="E4E1F1"/>
+                </a:solidFill>
+                <a:latin typeface="Calibri"/>
+              </a:rPr>
+              <a:t>Which Q1 figure is right, the dashboard's Rs 2.1 crore or the books' Rs 1.9 crore, and how do we know?</a:t>
+            </a:r>
+          </a:p>
+        </p:txBody>
+      </p:sp>
+      <p:sp>
+        <p:nvSpPr>
+          <p:cNvPr id="10" name="Rounded Rectangle 9"/>
           <p:cNvSpPr/>
           <p:nvPr/>
         </p:nvSpPr>
         <p:spPr>
           <a:xfrm>
-            <a:off x="530352" y="1956816"/>
-            <a:ext cx="45720" cy="1310639"/>
+            <a:off x="731519" y="5074920"/>
+            <a:ext cx="1673692" cy="310896"/>
+          </a:xfrm>
+          <a:prstGeom prst="roundRect">
+            <a:avLst>
+              <a:gd name="adj" fmla="val 50000"/>
+            </a:avLst>
+          </a:prstGeom>
+          <a:noFill/>
+          <a:ln w="9525">
+            <a:solidFill>
+              <a:srgbClr val="CFC9EE"/>
+            </a:solidFill>
+          </a:ln>
+          <a:effectLst/>
+        </p:spPr>
+        <p:style>
+          <a:lnRef idx="1">
+            <a:schemeClr val="accent1"/>
+          </a:lnRef>
+          <a:fillRef idx="3">
+            <a:schemeClr val="accent1"/>
+          </a:fillRef>
+          <a:effectRef idx="2">
+            <a:schemeClr val="accent1"/>
+          </a:effectRef>
+          <a:fontRef idx="minor">
+            <a:schemeClr val="lt1"/>
+          </a:fontRef>
+        </p:style>
+        <p:txBody>
+          <a:bodyPr rtlCol="0" anchor="ctr" wrap="none" lIns="25400" rIns="25400" tIns="0" bIns="0"/>
+          <a:lstStyle/>
+          <a:p>
+            <a:pPr algn="ctr"/>
+            <a:r>
+              <a:rPr sz="850" b="0">
+                <a:solidFill>
+                  <a:srgbClr val="CFC9EE"/>
+                </a:solidFill>
+                <a:latin typeface="Calibri"/>
+              </a:rPr>
+              <a:t>Can the analyst replay it?</a:t>
+            </a:r>
+          </a:p>
+        </p:txBody>
+      </p:sp>
+      <p:sp>
+        <p:nvSpPr>
+          <p:cNvPr id="11" name="Rounded Rectangle 10"/>
+          <p:cNvSpPr/>
+          <p:nvPr/>
+        </p:nvSpPr>
+        <p:spPr>
+          <a:xfrm>
+            <a:off x="2514940" y="5074920"/>
+            <a:ext cx="1725708" cy="310896"/>
+          </a:xfrm>
+          <a:prstGeom prst="roundRect">
+            <a:avLst>
+              <a:gd name="adj" fmla="val 50000"/>
+            </a:avLst>
+          </a:prstGeom>
+          <a:noFill/>
+          <a:ln w="9525">
+            <a:solidFill>
+              <a:srgbClr val="CFC9EE"/>
+            </a:solidFill>
+          </a:ln>
+          <a:effectLst/>
+        </p:spPr>
+        <p:style>
+          <a:lnRef idx="1">
+            <a:schemeClr val="accent1"/>
+          </a:lnRef>
+          <a:fillRef idx="3">
+            <a:schemeClr val="accent1"/>
+          </a:fillRef>
+          <a:effectRef idx="2">
+            <a:schemeClr val="accent1"/>
+          </a:effectRef>
+          <a:fontRef idx="minor">
+            <a:schemeClr val="lt1"/>
+          </a:fontRef>
+        </p:style>
+        <p:txBody>
+          <a:bodyPr rtlCol="0" anchor="ctr" wrap="none" lIns="25400" rIns="25400" tIns="0" bIns="0"/>
+          <a:lstStyle/>
+          <a:p>
+            <a:pPr algn="ctr"/>
+            <a:r>
+              <a:rPr sz="850" b="0">
+                <a:solidFill>
+                  <a:srgbClr val="CFC9EE"/>
+                </a:solidFill>
+                <a:latin typeface="Calibri"/>
+              </a:rPr>
+              <a:t>Can you run the pass alone?</a:t>
+            </a:r>
+          </a:p>
+        </p:txBody>
+      </p:sp>
+      <p:sp>
+        <p:nvSpPr>
+          <p:cNvPr id="12" name="Rounded Rectangle 11"/>
+          <p:cNvSpPr/>
+          <p:nvPr/>
+        </p:nvSpPr>
+        <p:spPr>
+          <a:xfrm>
+            <a:off x="4350376" y="5074920"/>
+            <a:ext cx="1887553" cy="310896"/>
+          </a:xfrm>
+          <a:prstGeom prst="roundRect">
+            <a:avLst>
+              <a:gd name="adj" fmla="val 50000"/>
+            </a:avLst>
+          </a:prstGeom>
+          <a:noFill/>
+          <a:ln w="9525">
+            <a:solidFill>
+              <a:srgbClr val="CFC9EE"/>
+            </a:solidFill>
+          </a:ln>
+          <a:effectLst/>
+        </p:spPr>
+        <p:style>
+          <a:lnRef idx="1">
+            <a:schemeClr val="accent1"/>
+          </a:lnRef>
+          <a:fillRef idx="3">
+            <a:schemeClr val="accent1"/>
+          </a:fillRef>
+          <a:effectRef idx="2">
+            <a:schemeClr val="accent1"/>
+          </a:effectRef>
+          <a:fontRef idx="minor">
+            <a:schemeClr val="lt1"/>
+          </a:fontRef>
+        </p:style>
+        <p:txBody>
+          <a:bodyPr rtlCol="0" anchor="ctr" wrap="none" lIns="25400" rIns="25400" tIns="0" bIns="0"/>
+          <a:lstStyle/>
+          <a:p>
+            <a:pPr algn="ctr"/>
+            <a:r>
+              <a:rPr sz="850" b="0">
+                <a:solidFill>
+                  <a:srgbClr val="CFC9EE"/>
+                </a:solidFill>
+                <a:latin typeface="Calibri"/>
+              </a:rPr>
+              <a:t>Where did our numbers go wrong?</a:t>
+            </a:r>
+          </a:p>
+        </p:txBody>
+      </p:sp>
+      <p:sp>
+        <p:nvSpPr>
+          <p:cNvPr id="13" name="Rounded Rectangle 12"/>
+          <p:cNvSpPr/>
+          <p:nvPr/>
+        </p:nvSpPr>
+        <p:spPr>
+          <a:xfrm>
+            <a:off x="6347657" y="5074920"/>
+            <a:ext cx="1725708" cy="310896"/>
+          </a:xfrm>
+          <a:prstGeom prst="roundRect">
+            <a:avLst>
+              <a:gd name="adj" fmla="val 50000"/>
+            </a:avLst>
+          </a:prstGeom>
+          <a:noFill/>
+          <a:ln w="9525">
+            <a:solidFill>
+              <a:srgbClr val="CFC9EE"/>
+            </a:solidFill>
+          </a:ln>
+          <a:effectLst/>
+        </p:spPr>
+        <p:style>
+          <a:lnRef idx="1">
+            <a:schemeClr val="accent1"/>
+          </a:lnRef>
+          <a:fillRef idx="3">
+            <a:schemeClr val="accent1"/>
+          </a:fillRef>
+          <a:effectRef idx="2">
+            <a:schemeClr val="accent1"/>
+          </a:effectRef>
+          <a:fontRef idx="minor">
+            <a:schemeClr val="lt1"/>
+          </a:fontRef>
+        </p:style>
+        <p:txBody>
+          <a:bodyPr rtlCol="0" anchor="ctr" wrap="none" lIns="25400" rIns="25400" tIns="0" bIns="0"/>
+          <a:lstStyle/>
+          <a:p>
+            <a:pPr algn="ctr"/>
+            <a:r>
+              <a:rPr sz="850" b="0">
+                <a:solidFill>
+                  <a:srgbClr val="CFC9EE"/>
+                </a:solidFill>
+                <a:latin typeface="Calibri"/>
+              </a:rPr>
+              <a:t>Why were 14 rows set aside?</a:t>
+            </a:r>
+          </a:p>
+        </p:txBody>
+      </p:sp>
+      <p:sp>
+        <p:nvSpPr>
+          <p:cNvPr id="14" name="Rounded Rectangle 13"/>
+          <p:cNvSpPr/>
+          <p:nvPr/>
+        </p:nvSpPr>
+        <p:spPr>
+          <a:xfrm>
+            <a:off x="8183093" y="5074920"/>
+            <a:ext cx="1829739" cy="310896"/>
+          </a:xfrm>
+          <a:prstGeom prst="roundRect">
+            <a:avLst>
+              <a:gd name="adj" fmla="val 50000"/>
+            </a:avLst>
+          </a:prstGeom>
+          <a:noFill/>
+          <a:ln w="9525">
+            <a:solidFill>
+              <a:srgbClr val="CFC9EE"/>
+            </a:solidFill>
+          </a:ln>
+          <a:effectLst/>
+        </p:spPr>
+        <p:style>
+          <a:lnRef idx="1">
+            <a:schemeClr val="accent1"/>
+          </a:lnRef>
+          <a:fillRef idx="3">
+            <a:schemeClr val="accent1"/>
+          </a:fillRef>
+          <a:effectRef idx="2">
+            <a:schemeClr val="accent1"/>
+          </a:effectRef>
+          <a:fontRef idx="minor">
+            <a:schemeClr val="lt1"/>
+          </a:fontRef>
+        </p:style>
+        <p:txBody>
+          <a:bodyPr rtlCol="0" anchor="ctr" wrap="none" lIns="25400" rIns="25400" tIns="0" bIns="0"/>
+          <a:lstStyle/>
+          <a:p>
+            <a:pPr algn="ctr"/>
+            <a:r>
+              <a:rPr sz="850" b="0">
+                <a:solidFill>
+                  <a:srgbClr val="CFC9EE"/>
+                </a:solidFill>
+                <a:latin typeface="Calibri"/>
+              </a:rPr>
+              <a:t>Can you answer in 90 seconds?</a:t>
+            </a:r>
+          </a:p>
+        </p:txBody>
+      </p:sp>
+      <p:sp>
+        <p:nvSpPr>
+          <p:cNvPr id="15" name="Rounded Rectangle 14"/>
+          <p:cNvSpPr/>
+          <p:nvPr/>
+        </p:nvSpPr>
+        <p:spPr>
+          <a:xfrm>
+            <a:off x="10122561" y="5074920"/>
+            <a:ext cx="1465629" cy="310896"/>
           </a:xfrm>
           <a:prstGeom prst="roundRect">
             <a:avLst>
@@ -33595,141 +34493,32 @@
           </a:fontRef>
         </p:style>
         <p:txBody>
-          <a:bodyPr rtlCol="0" anchor="ctr" wrap="square"/>
+          <a:bodyPr rtlCol="0" anchor="ctr" wrap="none" lIns="25400" rIns="25400" tIns="0" bIns="0"/>
           <a:lstStyle/>
           <a:p>
             <a:pPr algn="ctr"/>
-          </a:p>
-        </p:txBody>
-      </p:sp>
-      <p:sp>
-        <p:nvSpPr>
-          <p:cNvPr id="10" name="TextBox 9"/>
-          <p:cNvSpPr txBox="1"/>
-          <p:nvPr/>
-        </p:nvSpPr>
-        <p:spPr>
-          <a:xfrm>
-            <a:off x="786384" y="1956816"/>
-            <a:ext cx="10820095" cy="1310639"/>
-          </a:xfrm>
-          <a:prstGeom prst="rect">
-            <a:avLst/>
-          </a:prstGeom>
-          <a:noFill/>
-        </p:spPr>
-        <p:txBody>
-          <a:bodyPr wrap="square" anchor="t" lIns="0" rIns="0" tIns="0" bIns="0">
-            <a:spAutoFit/>
-          </a:bodyPr>
-          <a:lstStyle/>
-          <a:p>
-            <a:r>
-              <a:rPr sz="1600" b="0" i="1">
+            <a:r>
+              <a:rPr sz="850" b="1">
                 <a:solidFill>
                   <a:srgbClr val="1A0F5C"/>
                 </a:solidFill>
-                <a:latin typeface="Georgia"/>
-              </a:rPr>
-              <a:t>"Your 1.9 crore is right: the export counted fifteen orders twice, and the bridge from 2.1 closes to your books in rows and in rupees. On clean data the drop is 1.6 percent and the Retail-Plus fall is 35 percent, smaller than we reported."</a:t>
-            </a:r>
-          </a:p>
-          <a:p>
-            <a:pPr>
-              <a:spcBef>
-                <a:spcPts val="400"/>
-              </a:spcBef>
-            </a:pPr>
-            <a:r>
-              <a:rPr sz="1000" b="0" i="0">
-                <a:solidFill>
-                  <a:srgbClr val="6B6690"/>
-                </a:solidFill>
-                <a:latin typeface="Calibri"/>
-              </a:rPr>
-              <a:t>The GCC data and AI team</a:t>
-            </a:r>
-          </a:p>
-        </p:txBody>
-      </p:sp>
-      <p:pic>
-        <p:nvPicPr>
-          <p:cNvPr id="11" name="mermaid diagram" descr="65a47bb5060cb393.png"/>
-          <p:cNvPicPr>
-            <a:picLocks noChangeAspect="1"/>
-          </p:cNvPicPr>
-          <p:nvPr/>
-        </p:nvPicPr>
-        <p:blipFill>
-          <a:blip r:embed="rId5"/>
-          <a:stretch>
-            <a:fillRect/>
-          </a:stretch>
-        </p:blipFill>
-        <p:spPr>
-          <a:xfrm>
-            <a:off x="2152497" y="3413760"/>
-            <a:ext cx="7886700" cy="1100137"/>
-          </a:xfrm>
-          <a:prstGeom prst="rect">
-            <a:avLst/>
-          </a:prstGeom>
-        </p:spPr>
-      </p:pic>
-      <p:sp>
-        <p:nvSpPr>
-          <p:cNvPr id="12" name="Oval 11"/>
-          <p:cNvSpPr/>
-          <p:nvPr/>
-        </p:nvSpPr>
-        <p:spPr>
-          <a:xfrm>
-            <a:off x="530352" y="6492240"/>
-            <a:ext cx="64008" cy="64008"/>
-          </a:xfrm>
-          <a:prstGeom prst="ellipse">
-            <a:avLst/>
-          </a:prstGeom>
-          <a:solidFill>
-            <a:srgbClr val="CFC9EE"/>
-          </a:solidFill>
-          <a:ln>
-            <a:noFill/>
-          </a:ln>
-          <a:effectLst/>
-        </p:spPr>
-        <p:style>
-          <a:lnRef idx="1">
-            <a:schemeClr val="accent1"/>
-          </a:lnRef>
-          <a:fillRef idx="3">
-            <a:schemeClr val="accent1"/>
-          </a:fillRef>
-          <a:effectRef idx="2">
-            <a:schemeClr val="accent1"/>
-          </a:effectRef>
-          <a:fontRef idx="minor">
-            <a:schemeClr val="lt1"/>
-          </a:fontRef>
-        </p:style>
-        <p:txBody>
-          <a:bodyPr rtlCol="0" anchor="ctr" wrap="square"/>
-          <a:lstStyle/>
-          <a:p>
-            <a:pPr algn="ctr"/>
-          </a:p>
-        </p:txBody>
-      </p:sp>
-      <p:sp>
-        <p:nvSpPr>
-          <p:cNvPr id="13" name="TextBox 12"/>
-          <p:cNvSpPr txBox="1"/>
-          <p:nvPr/>
-        </p:nvSpPr>
-        <p:spPr>
-          <a:xfrm>
-            <a:off x="640080" y="6437376"/>
-            <a:ext cx="1470469" cy="152146"/>
+                <a:latin typeface="Calibri"/>
+              </a:rPr>
+              <a:t>What do we tell Anand?</a:t>
+            </a:r>
+          </a:p>
+        </p:txBody>
+      </p:sp>
+      <p:sp>
+        <p:nvSpPr>
+          <p:cNvPr id="16" name="TextBox 15"/>
+          <p:cNvSpPr txBox="1"/>
+          <p:nvPr/>
+        </p:nvSpPr>
+        <p:spPr>
+          <a:xfrm>
+            <a:off x="530352" y="6437376"/>
+            <a:ext cx="9667951" cy="160401"/>
           </a:xfrm>
           <a:prstGeom prst="rect">
             <a:avLst/>
@@ -33744,415 +34533,20 @@
           <a:p>
             <a:pPr algn="l"/>
             <a:r>
-              <a:rPr sz="700" b="0" i="0">
-                <a:solidFill>
-                  <a:srgbClr val="6B6690"/>
-                </a:solidFill>
-                <a:latin typeface="Calibri"/>
-              </a:rPr>
-              <a:t>Can the analyst replay it?</a:t>
-            </a:r>
-          </a:p>
-        </p:txBody>
-      </p:sp>
-      <p:sp>
-        <p:nvSpPr>
-          <p:cNvPr id="14" name="Oval 13"/>
-          <p:cNvSpPr/>
-          <p:nvPr/>
-        </p:nvSpPr>
-        <p:spPr>
-          <a:xfrm>
-            <a:off x="2201989" y="6492240"/>
-            <a:ext cx="64008" cy="64008"/>
-          </a:xfrm>
-          <a:prstGeom prst="ellipse">
-            <a:avLst/>
-          </a:prstGeom>
-          <a:solidFill>
-            <a:srgbClr val="CFC9EE"/>
-          </a:solidFill>
-          <a:ln>
-            <a:noFill/>
-          </a:ln>
-          <a:effectLst/>
-        </p:spPr>
-        <p:style>
-          <a:lnRef idx="1">
-            <a:schemeClr val="accent1"/>
-          </a:lnRef>
-          <a:fillRef idx="3">
-            <a:schemeClr val="accent1"/>
-          </a:fillRef>
-          <a:effectRef idx="2">
-            <a:schemeClr val="accent1"/>
-          </a:effectRef>
-          <a:fontRef idx="minor">
-            <a:schemeClr val="lt1"/>
-          </a:fontRef>
-        </p:style>
-        <p:txBody>
-          <a:bodyPr rtlCol="0" anchor="ctr" wrap="square"/>
-          <a:lstStyle/>
-          <a:p>
-            <a:pPr algn="ctr"/>
-          </a:p>
-        </p:txBody>
-      </p:sp>
-      <p:sp>
-        <p:nvSpPr>
-          <p:cNvPr id="15" name="TextBox 14"/>
-          <p:cNvSpPr txBox="1"/>
-          <p:nvPr/>
-        </p:nvSpPr>
-        <p:spPr>
-          <a:xfrm>
-            <a:off x="2311717" y="6437376"/>
-            <a:ext cx="1516475" cy="152146"/>
-          </a:xfrm>
-          <a:prstGeom prst="rect">
-            <a:avLst/>
-          </a:prstGeom>
-          <a:noFill/>
-        </p:spPr>
-        <p:txBody>
-          <a:bodyPr wrap="square" anchor="t" lIns="0" rIns="0" tIns="0" bIns="0">
-            <a:spAutoFit/>
-          </a:bodyPr>
-          <a:lstStyle/>
-          <a:p>
-            <a:pPr algn="l"/>
-            <a:r>
-              <a:rPr sz="700" b="0" i="0">
-                <a:solidFill>
-                  <a:srgbClr val="6B6690"/>
-                </a:solidFill>
-                <a:latin typeface="Calibri"/>
-              </a:rPr>
-              <a:t>Can you run the pass alone?</a:t>
-            </a:r>
-          </a:p>
-        </p:txBody>
-      </p:sp>
-      <p:sp>
-        <p:nvSpPr>
-          <p:cNvPr id="16" name="Oval 15"/>
-          <p:cNvSpPr/>
-          <p:nvPr/>
-        </p:nvSpPr>
-        <p:spPr>
-          <a:xfrm>
-            <a:off x="3919632" y="6492240"/>
-            <a:ext cx="64008" cy="64008"/>
-          </a:xfrm>
-          <a:prstGeom prst="ellipse">
-            <a:avLst/>
-          </a:prstGeom>
-          <a:solidFill>
-            <a:srgbClr val="CFC9EE"/>
-          </a:solidFill>
-          <a:ln>
-            <a:noFill/>
-          </a:ln>
-          <a:effectLst/>
-        </p:spPr>
-        <p:style>
-          <a:lnRef idx="1">
-            <a:schemeClr val="accent1"/>
-          </a:lnRef>
-          <a:fillRef idx="3">
-            <a:schemeClr val="accent1"/>
-          </a:fillRef>
-          <a:effectRef idx="2">
-            <a:schemeClr val="accent1"/>
-          </a:effectRef>
-          <a:fontRef idx="minor">
-            <a:schemeClr val="lt1"/>
-          </a:fontRef>
-        </p:style>
-        <p:txBody>
-          <a:bodyPr rtlCol="0" anchor="ctr" wrap="square"/>
-          <a:lstStyle/>
-          <a:p>
-            <a:pPr algn="ctr"/>
+              <a:rPr sz="750" b="0" i="0">
+                <a:solidFill>
+                  <a:srgbClr val="CFC9EE"/>
+                </a:solidFill>
+                <a:latin typeface="Calibri"/>
+              </a:rPr>
+              <a:t>Week 1 Day 3: which Q1 figure is right</a:t>
+            </a:r>
           </a:p>
         </p:txBody>
       </p:sp>
       <p:sp>
         <p:nvSpPr>
           <p:cNvPr id="17" name="TextBox 16"/>
-          <p:cNvSpPr txBox="1"/>
-          <p:nvPr/>
-        </p:nvSpPr>
-        <p:spPr>
-          <a:xfrm>
-            <a:off x="4029360" y="6437376"/>
-            <a:ext cx="1700498" cy="152146"/>
-          </a:xfrm>
-          <a:prstGeom prst="rect">
-            <a:avLst/>
-          </a:prstGeom>
-          <a:noFill/>
-        </p:spPr>
-        <p:txBody>
-          <a:bodyPr wrap="square" anchor="t" lIns="0" rIns="0" tIns="0" bIns="0">
-            <a:spAutoFit/>
-          </a:bodyPr>
-          <a:lstStyle/>
-          <a:p>
-            <a:pPr algn="l"/>
-            <a:r>
-              <a:rPr sz="700" b="0" i="0">
-                <a:solidFill>
-                  <a:srgbClr val="6B6690"/>
-                </a:solidFill>
-                <a:latin typeface="Calibri"/>
-              </a:rPr>
-              <a:t>Where did our numbers go wrong?</a:t>
-            </a:r>
-          </a:p>
-        </p:txBody>
-      </p:sp>
-      <p:sp>
-        <p:nvSpPr>
-          <p:cNvPr id="18" name="Oval 17"/>
-          <p:cNvSpPr/>
-          <p:nvPr/>
-        </p:nvSpPr>
-        <p:spPr>
-          <a:xfrm>
-            <a:off x="5821298" y="6492240"/>
-            <a:ext cx="64008" cy="64008"/>
-          </a:xfrm>
-          <a:prstGeom prst="ellipse">
-            <a:avLst/>
-          </a:prstGeom>
-          <a:solidFill>
-            <a:srgbClr val="CFC9EE"/>
-          </a:solidFill>
-          <a:ln>
-            <a:noFill/>
-          </a:ln>
-          <a:effectLst/>
-        </p:spPr>
-        <p:style>
-          <a:lnRef idx="1">
-            <a:schemeClr val="accent1"/>
-          </a:lnRef>
-          <a:fillRef idx="3">
-            <a:schemeClr val="accent1"/>
-          </a:fillRef>
-          <a:effectRef idx="2">
-            <a:schemeClr val="accent1"/>
-          </a:effectRef>
-          <a:fontRef idx="minor">
-            <a:schemeClr val="lt1"/>
-          </a:fontRef>
-        </p:style>
-        <p:txBody>
-          <a:bodyPr rtlCol="0" anchor="ctr" wrap="square"/>
-          <a:lstStyle/>
-          <a:p>
-            <a:pPr algn="ctr"/>
-          </a:p>
-        </p:txBody>
-      </p:sp>
-      <p:sp>
-        <p:nvSpPr>
-          <p:cNvPr id="19" name="TextBox 18"/>
-          <p:cNvSpPr txBox="1"/>
-          <p:nvPr/>
-        </p:nvSpPr>
-        <p:spPr>
-          <a:xfrm>
-            <a:off x="5931026" y="6437376"/>
-            <a:ext cx="1516475" cy="152146"/>
-          </a:xfrm>
-          <a:prstGeom prst="rect">
-            <a:avLst/>
-          </a:prstGeom>
-          <a:noFill/>
-        </p:spPr>
-        <p:txBody>
-          <a:bodyPr wrap="square" anchor="t" lIns="0" rIns="0" tIns="0" bIns="0">
-            <a:spAutoFit/>
-          </a:bodyPr>
-          <a:lstStyle/>
-          <a:p>
-            <a:pPr algn="l"/>
-            <a:r>
-              <a:rPr sz="700" b="0" i="0">
-                <a:solidFill>
-                  <a:srgbClr val="6B6690"/>
-                </a:solidFill>
-                <a:latin typeface="Calibri"/>
-              </a:rPr>
-              <a:t>Why were 14 rows set aside?</a:t>
-            </a:r>
-          </a:p>
-        </p:txBody>
-      </p:sp>
-      <p:sp>
-        <p:nvSpPr>
-          <p:cNvPr id="20" name="Oval 19"/>
-          <p:cNvSpPr/>
-          <p:nvPr/>
-        </p:nvSpPr>
-        <p:spPr>
-          <a:xfrm>
-            <a:off x="7538942" y="6492240"/>
-            <a:ext cx="64008" cy="64008"/>
-          </a:xfrm>
-          <a:prstGeom prst="ellipse">
-            <a:avLst/>
-          </a:prstGeom>
-          <a:solidFill>
-            <a:srgbClr val="CFC9EE"/>
-          </a:solidFill>
-          <a:ln>
-            <a:noFill/>
-          </a:ln>
-          <a:effectLst/>
-        </p:spPr>
-        <p:style>
-          <a:lnRef idx="1">
-            <a:schemeClr val="accent1"/>
-          </a:lnRef>
-          <a:fillRef idx="3">
-            <a:schemeClr val="accent1"/>
-          </a:fillRef>
-          <a:effectRef idx="2">
-            <a:schemeClr val="accent1"/>
-          </a:effectRef>
-          <a:fontRef idx="minor">
-            <a:schemeClr val="lt1"/>
-          </a:fontRef>
-        </p:style>
-        <p:txBody>
-          <a:bodyPr rtlCol="0" anchor="ctr" wrap="square"/>
-          <a:lstStyle/>
-          <a:p>
-            <a:pPr algn="ctr"/>
-          </a:p>
-        </p:txBody>
-      </p:sp>
-      <p:sp>
-        <p:nvSpPr>
-          <p:cNvPr id="21" name="TextBox 20"/>
-          <p:cNvSpPr txBox="1"/>
-          <p:nvPr/>
-        </p:nvSpPr>
-        <p:spPr>
-          <a:xfrm>
-            <a:off x="7648670" y="6437376"/>
-            <a:ext cx="1608486" cy="152146"/>
-          </a:xfrm>
-          <a:prstGeom prst="rect">
-            <a:avLst/>
-          </a:prstGeom>
-          <a:noFill/>
-        </p:spPr>
-        <p:txBody>
-          <a:bodyPr wrap="square" anchor="t" lIns="0" rIns="0" tIns="0" bIns="0">
-            <a:spAutoFit/>
-          </a:bodyPr>
-          <a:lstStyle/>
-          <a:p>
-            <a:pPr algn="l"/>
-            <a:r>
-              <a:rPr sz="700" b="0" i="0">
-                <a:solidFill>
-                  <a:srgbClr val="6B6690"/>
-                </a:solidFill>
-                <a:latin typeface="Calibri"/>
-              </a:rPr>
-              <a:t>Can you answer in 90 seconds?</a:t>
-            </a:r>
-          </a:p>
-        </p:txBody>
-      </p:sp>
-      <p:sp>
-        <p:nvSpPr>
-          <p:cNvPr id="22" name="Oval 21"/>
-          <p:cNvSpPr/>
-          <p:nvPr/>
-        </p:nvSpPr>
-        <p:spPr>
-          <a:xfrm>
-            <a:off x="9348597" y="6492240"/>
-            <a:ext cx="64008" cy="64008"/>
-          </a:xfrm>
-          <a:prstGeom prst="ellipse">
-            <a:avLst/>
-          </a:prstGeom>
-          <a:solidFill>
-            <a:srgbClr val="5B3FD6"/>
-          </a:solidFill>
-          <a:ln>
-            <a:noFill/>
-          </a:ln>
-          <a:effectLst/>
-        </p:spPr>
-        <p:style>
-          <a:lnRef idx="1">
-            <a:schemeClr val="accent1"/>
-          </a:lnRef>
-          <a:fillRef idx="3">
-            <a:schemeClr val="accent1"/>
-          </a:fillRef>
-          <a:effectRef idx="2">
-            <a:schemeClr val="accent1"/>
-          </a:effectRef>
-          <a:fontRef idx="minor">
-            <a:schemeClr val="lt1"/>
-          </a:fontRef>
-        </p:style>
-        <p:txBody>
-          <a:bodyPr rtlCol="0" anchor="ctr" wrap="square"/>
-          <a:lstStyle/>
-          <a:p>
-            <a:pPr algn="ctr"/>
-          </a:p>
-        </p:txBody>
-      </p:sp>
-      <p:sp>
-        <p:nvSpPr>
-          <p:cNvPr id="23" name="TextBox 22"/>
-          <p:cNvSpPr txBox="1"/>
-          <p:nvPr/>
-        </p:nvSpPr>
-        <p:spPr>
-          <a:xfrm>
-            <a:off x="9458324" y="6437376"/>
-            <a:ext cx="1286446" cy="152146"/>
-          </a:xfrm>
-          <a:prstGeom prst="rect">
-            <a:avLst/>
-          </a:prstGeom>
-          <a:noFill/>
-        </p:spPr>
-        <p:txBody>
-          <a:bodyPr wrap="square" anchor="t" lIns="0" rIns="0" tIns="0" bIns="0">
-            <a:spAutoFit/>
-          </a:bodyPr>
-          <a:lstStyle/>
-          <a:p>
-            <a:pPr algn="l"/>
-            <a:r>
-              <a:rPr sz="700" b="1" i="0">
-                <a:solidFill>
-                  <a:srgbClr val="5B3FD6"/>
-                </a:solidFill>
-                <a:latin typeface="Calibri"/>
-              </a:rPr>
-              <a:t>What do we tell Anand?</a:t>
-            </a:r>
-          </a:p>
-        </p:txBody>
-      </p:sp>
-      <p:sp>
-        <p:nvSpPr>
-          <p:cNvPr id="24" name="TextBox 23"/>
           <p:cNvSpPr txBox="1"/>
           <p:nvPr/>
         </p:nvSpPr>
@@ -34176,11 +34570,11 @@
             <a:r>
               <a:rPr sz="750" b="0" i="0">
                 <a:solidFill>
-                  <a:srgbClr val="6B6690"/>
-                </a:solidFill>
-                <a:latin typeface="Calibri"/>
-              </a:rPr>
-              <a:t>S25  ·  32 / 35</a:t>
+                  <a:srgbClr val="CFC9EE"/>
+                </a:solidFill>
+                <a:latin typeface="Calibri"/>
+              </a:rPr>
+              <a:t>32 / 35</a:t>
             </a:r>
           </a:p>
         </p:txBody>
@@ -34194,6 +34588,876 @@
 </file>
 
 <file path=ppt/slides/slide33.xml><?xml version="1.0" encoding="utf-8"?>
+<p:sld xmlns:a="http://schemas.openxmlformats.org/drawingml/2006/main" xmlns:p="http://schemas.openxmlformats.org/presentationml/2006/main" xmlns:r="http://schemas.openxmlformats.org/officeDocument/2006/relationships">
+  <p:cSld>
+    <p:spTree>
+      <p:nvGrpSpPr>
+        <p:cNvPr id="1" name=""/>
+        <p:cNvGrpSpPr/>
+        <p:nvPr/>
+      </p:nvGrpSpPr>
+      <p:grpSpPr/>
+      <p:pic>
+        <p:nvPicPr>
+          <p:cNvPr id="2" name="Picture 1" descr="bg_light.jpg"/>
+          <p:cNvPicPr>
+            <a:picLocks noChangeAspect="1"/>
+          </p:cNvPicPr>
+          <p:nvPr/>
+        </p:nvPicPr>
+        <p:blipFill>
+          <a:blip r:embed="rId2"/>
+          <a:stretch>
+            <a:fillRect/>
+          </a:stretch>
+        </p:blipFill>
+        <p:spPr>
+          <a:xfrm>
+            <a:off x="0" y="0"/>
+            <a:ext cx="12191695" cy="6858000"/>
+          </a:xfrm>
+          <a:prstGeom prst="rect">
+            <a:avLst/>
+          </a:prstGeom>
+        </p:spPr>
+      </p:pic>
+      <p:pic>
+        <p:nvPicPr>
+          <p:cNvPr id="3" name="Picture 2" descr="iitgn_logo.png"/>
+          <p:cNvPicPr>
+            <a:picLocks noChangeAspect="1"/>
+          </p:cNvPicPr>
+          <p:nvPr/>
+        </p:nvPicPr>
+        <p:blipFill>
+          <a:blip r:embed="rId3"/>
+          <a:stretch>
+            <a:fillRect/>
+          </a:stretch>
+        </p:blipFill>
+        <p:spPr>
+          <a:xfrm>
+            <a:off x="530352" y="201168"/>
+            <a:ext cx="420624" cy="420624"/>
+          </a:xfrm>
+          <a:prstGeom prst="rect">
+            <a:avLst/>
+          </a:prstGeom>
+        </p:spPr>
+      </p:pic>
+      <p:sp>
+        <p:nvSpPr>
+          <p:cNvPr id="4" name="TextBox 3"/>
+          <p:cNvSpPr txBox="1"/>
+          <p:nvPr/>
+        </p:nvSpPr>
+        <p:spPr>
+          <a:xfrm>
+            <a:off x="1042416" y="228600"/>
+            <a:ext cx="5120640" cy="185166"/>
+          </a:xfrm>
+          <a:prstGeom prst="rect">
+            <a:avLst/>
+          </a:prstGeom>
+          <a:noFill/>
+        </p:spPr>
+        <p:txBody>
+          <a:bodyPr wrap="square" anchor="t" lIns="0" rIns="0" tIns="0" bIns="0">
+            <a:spAutoFit/>
+          </a:bodyPr>
+          <a:lstStyle/>
+          <a:p>
+            <a:pPr algn="l"/>
+            <a:r>
+              <a:rPr sz="900" b="1" i="0">
+                <a:solidFill>
+                  <a:srgbClr val="1A0F5C"/>
+                </a:solidFill>
+                <a:latin typeface="Calibri"/>
+              </a:rPr>
+              <a:t>Indian Institute of Technology Gandhinagar</a:t>
+            </a:r>
+          </a:p>
+        </p:txBody>
+      </p:sp>
+      <p:sp>
+        <p:nvSpPr>
+          <p:cNvPr id="5" name="TextBox 4"/>
+          <p:cNvSpPr txBox="1"/>
+          <p:nvPr/>
+        </p:nvSpPr>
+        <p:spPr>
+          <a:xfrm>
+            <a:off x="1042416" y="420623"/>
+            <a:ext cx="5852160" cy="127381"/>
+          </a:xfrm>
+          <a:prstGeom prst="rect">
+            <a:avLst/>
+          </a:prstGeom>
+          <a:noFill/>
+        </p:spPr>
+        <p:txBody>
+          <a:bodyPr wrap="square" anchor="t" lIns="0" rIns="0" tIns="0" bIns="0">
+            <a:spAutoFit/>
+          </a:bodyPr>
+          <a:lstStyle/>
+          <a:p>
+            <a:pPr algn="l"/>
+            <a:r>
+              <a:rPr sz="550" b="1" i="0" spc="300">
+                <a:solidFill>
+                  <a:srgbClr val="6B6690"/>
+                </a:solidFill>
+                <a:latin typeface="Calibri"/>
+              </a:rPr>
+              <a:t>ADMINISTERED THROUGH THE COMPETENCY ADVANCEMENT ACADEMY</a:t>
+            </a:r>
+          </a:p>
+        </p:txBody>
+      </p:sp>
+      <p:sp>
+        <p:nvSpPr>
+          <p:cNvPr id="6" name="TextBox 5"/>
+          <p:cNvSpPr txBox="1"/>
+          <p:nvPr/>
+        </p:nvSpPr>
+        <p:spPr>
+          <a:xfrm>
+            <a:off x="5992063" y="310896"/>
+            <a:ext cx="5669280" cy="127381"/>
+          </a:xfrm>
+          <a:prstGeom prst="rect">
+            <a:avLst/>
+          </a:prstGeom>
+          <a:noFill/>
+        </p:spPr>
+        <p:txBody>
+          <a:bodyPr wrap="square" anchor="t" lIns="0" rIns="0" tIns="0" bIns="0">
+            <a:spAutoFit/>
+          </a:bodyPr>
+          <a:lstStyle/>
+          <a:p>
+            <a:pPr algn="r"/>
+            <a:r>
+              <a:rPr sz="550" b="1" i="0" spc="300">
+                <a:solidFill>
+                  <a:srgbClr val="6B6690"/>
+                </a:solidFill>
+                <a:latin typeface="Calibri"/>
+              </a:rPr>
+              <a:t>WEEK 1  ·  DAY 3  ·  KALPA GLOBAL CAPABILITY CENTRE</a:t>
+            </a:r>
+          </a:p>
+        </p:txBody>
+      </p:sp>
+      <p:sp>
+        <p:nvSpPr>
+          <p:cNvPr id="7" name="TextBox 6"/>
+          <p:cNvSpPr txBox="1"/>
+          <p:nvPr/>
+        </p:nvSpPr>
+        <p:spPr>
+          <a:xfrm>
+            <a:off x="530352" y="676656"/>
+            <a:ext cx="11130991" cy="512064"/>
+          </a:xfrm>
+          <a:prstGeom prst="rect">
+            <a:avLst/>
+          </a:prstGeom>
+          <a:noFill/>
+        </p:spPr>
+        <p:txBody>
+          <a:bodyPr wrap="square" anchor="b" lIns="0" rIns="0" tIns="0" bIns="0">
+            <a:spAutoFit/>
+          </a:bodyPr>
+          <a:lstStyle/>
+          <a:p>
+            <a:pPr algn="l"/>
+            <a:r>
+              <a:rPr sz="2600" b="0" i="0">
+                <a:solidFill>
+                  <a:srgbClr val="1A0F5C"/>
+                </a:solidFill>
+                <a:latin typeface="Georgia"/>
+              </a:rPr>
+              <a:t>Answer: the 1.9 is right, proved in rows and rupees</a:t>
+            </a:r>
+          </a:p>
+        </p:txBody>
+      </p:sp>
+      <p:sp>
+        <p:nvSpPr>
+          <p:cNvPr id="8" name="TextBox 7"/>
+          <p:cNvSpPr txBox="1"/>
+          <p:nvPr/>
+        </p:nvSpPr>
+        <p:spPr>
+          <a:xfrm>
+            <a:off x="530352" y="1243584"/>
+            <a:ext cx="11130991" cy="234696"/>
+          </a:xfrm>
+          <a:prstGeom prst="rect">
+            <a:avLst/>
+          </a:prstGeom>
+          <a:noFill/>
+        </p:spPr>
+        <p:txBody>
+          <a:bodyPr wrap="square" anchor="t" lIns="0" rIns="0" tIns="0" bIns="0">
+            <a:spAutoFit/>
+          </a:bodyPr>
+          <a:lstStyle/>
+          <a:p>
+            <a:pPr algn="l"/>
+            <a:r>
+              <a:rPr sz="1200" b="0" i="0">
+                <a:solidFill>
+                  <a:srgbClr val="6B6690"/>
+                </a:solidFill>
+                <a:latin typeface="Calibri"/>
+              </a:rPr>
+              <a:t>Which Q1 figure is right, and how do we know?</a:t>
+            </a:r>
+          </a:p>
+        </p:txBody>
+      </p:sp>
+      <p:sp>
+        <p:nvSpPr>
+          <p:cNvPr id="9" name="Rounded Rectangle 8"/>
+          <p:cNvSpPr/>
+          <p:nvPr/>
+        </p:nvSpPr>
+        <p:spPr>
+          <a:xfrm>
+            <a:off x="530352" y="1956816"/>
+            <a:ext cx="45720" cy="1310639"/>
+          </a:xfrm>
+          <a:prstGeom prst="roundRect">
+            <a:avLst>
+              <a:gd name="adj" fmla="val 50000"/>
+            </a:avLst>
+          </a:prstGeom>
+          <a:solidFill>
+            <a:srgbClr val="D9A7FF"/>
+          </a:solidFill>
+          <a:ln>
+            <a:noFill/>
+          </a:ln>
+          <a:effectLst/>
+        </p:spPr>
+        <p:style>
+          <a:lnRef idx="1">
+            <a:schemeClr val="accent1"/>
+          </a:lnRef>
+          <a:fillRef idx="3">
+            <a:schemeClr val="accent1"/>
+          </a:fillRef>
+          <a:effectRef idx="2">
+            <a:schemeClr val="accent1"/>
+          </a:effectRef>
+          <a:fontRef idx="minor">
+            <a:schemeClr val="lt1"/>
+          </a:fontRef>
+        </p:style>
+        <p:txBody>
+          <a:bodyPr rtlCol="0" anchor="ctr" wrap="square"/>
+          <a:lstStyle/>
+          <a:p>
+            <a:pPr algn="ctr"/>
+          </a:p>
+        </p:txBody>
+      </p:sp>
+      <p:sp>
+        <p:nvSpPr>
+          <p:cNvPr id="10" name="TextBox 9"/>
+          <p:cNvSpPr txBox="1"/>
+          <p:nvPr/>
+        </p:nvSpPr>
+        <p:spPr>
+          <a:xfrm>
+            <a:off x="786384" y="1956816"/>
+            <a:ext cx="10820095" cy="1310639"/>
+          </a:xfrm>
+          <a:prstGeom prst="rect">
+            <a:avLst/>
+          </a:prstGeom>
+          <a:noFill/>
+        </p:spPr>
+        <p:txBody>
+          <a:bodyPr wrap="square" anchor="t" lIns="0" rIns="0" tIns="0" bIns="0">
+            <a:spAutoFit/>
+          </a:bodyPr>
+          <a:lstStyle/>
+          <a:p>
+            <a:r>
+              <a:rPr sz="1600" b="0" i="1">
+                <a:solidFill>
+                  <a:srgbClr val="1A0F5C"/>
+                </a:solidFill>
+                <a:latin typeface="Georgia"/>
+              </a:rPr>
+              <a:t>"Your 1.9 crore is right: the export counted fifteen orders twice, and the bridge from 2.1 closes to your books in rows and in rupees. On clean data the drop is 1.6 percent and the Retail-Plus fall is 35 percent, smaller than we reported."</a:t>
+            </a:r>
+          </a:p>
+          <a:p>
+            <a:pPr>
+              <a:spcBef>
+                <a:spcPts val="400"/>
+              </a:spcBef>
+            </a:pPr>
+            <a:r>
+              <a:rPr sz="1000" b="0" i="0">
+                <a:solidFill>
+                  <a:srgbClr val="6B6690"/>
+                </a:solidFill>
+                <a:latin typeface="Calibri"/>
+              </a:rPr>
+              <a:t>The data and AI team at Kalpa's Global Capability Centre</a:t>
+            </a:r>
+          </a:p>
+        </p:txBody>
+      </p:sp>
+      <p:pic>
+        <p:nvPicPr>
+          <p:cNvPr id="11" name="mermaid diagram" descr="65a47bb5060cb393.png"/>
+          <p:cNvPicPr>
+            <a:picLocks noChangeAspect="1"/>
+          </p:cNvPicPr>
+          <p:nvPr/>
+        </p:nvPicPr>
+        <p:blipFill>
+          <a:blip r:embed="rId5"/>
+          <a:stretch>
+            <a:fillRect/>
+          </a:stretch>
+        </p:blipFill>
+        <p:spPr>
+          <a:xfrm>
+            <a:off x="2152497" y="3413760"/>
+            <a:ext cx="7886700" cy="1100137"/>
+          </a:xfrm>
+          <a:prstGeom prst="rect">
+            <a:avLst/>
+          </a:prstGeom>
+        </p:spPr>
+      </p:pic>
+      <p:sp>
+        <p:nvSpPr>
+          <p:cNvPr id="12" name="Oval 11"/>
+          <p:cNvSpPr/>
+          <p:nvPr/>
+        </p:nvSpPr>
+        <p:spPr>
+          <a:xfrm>
+            <a:off x="530352" y="6492240"/>
+            <a:ext cx="64008" cy="64008"/>
+          </a:xfrm>
+          <a:prstGeom prst="ellipse">
+            <a:avLst/>
+          </a:prstGeom>
+          <a:solidFill>
+            <a:srgbClr val="CFC9EE"/>
+          </a:solidFill>
+          <a:ln>
+            <a:noFill/>
+          </a:ln>
+          <a:effectLst/>
+        </p:spPr>
+        <p:style>
+          <a:lnRef idx="1">
+            <a:schemeClr val="accent1"/>
+          </a:lnRef>
+          <a:fillRef idx="3">
+            <a:schemeClr val="accent1"/>
+          </a:fillRef>
+          <a:effectRef idx="2">
+            <a:schemeClr val="accent1"/>
+          </a:effectRef>
+          <a:fontRef idx="minor">
+            <a:schemeClr val="lt1"/>
+          </a:fontRef>
+        </p:style>
+        <p:txBody>
+          <a:bodyPr rtlCol="0" anchor="ctr" wrap="square"/>
+          <a:lstStyle/>
+          <a:p>
+            <a:pPr algn="ctr"/>
+          </a:p>
+        </p:txBody>
+      </p:sp>
+      <p:sp>
+        <p:nvSpPr>
+          <p:cNvPr id="13" name="TextBox 12"/>
+          <p:cNvSpPr txBox="1"/>
+          <p:nvPr/>
+        </p:nvSpPr>
+        <p:spPr>
+          <a:xfrm>
+            <a:off x="640080" y="6437376"/>
+            <a:ext cx="1470469" cy="152146"/>
+          </a:xfrm>
+          <a:prstGeom prst="rect">
+            <a:avLst/>
+          </a:prstGeom>
+          <a:noFill/>
+        </p:spPr>
+        <p:txBody>
+          <a:bodyPr wrap="square" anchor="t" lIns="0" rIns="0" tIns="0" bIns="0">
+            <a:spAutoFit/>
+          </a:bodyPr>
+          <a:lstStyle/>
+          <a:p>
+            <a:pPr algn="l"/>
+            <a:r>
+              <a:rPr sz="700" b="0" i="0">
+                <a:solidFill>
+                  <a:srgbClr val="6B6690"/>
+                </a:solidFill>
+                <a:latin typeface="Calibri"/>
+              </a:rPr>
+              <a:t>Can the analyst replay it?</a:t>
+            </a:r>
+          </a:p>
+        </p:txBody>
+      </p:sp>
+      <p:sp>
+        <p:nvSpPr>
+          <p:cNvPr id="14" name="Oval 13"/>
+          <p:cNvSpPr/>
+          <p:nvPr/>
+        </p:nvSpPr>
+        <p:spPr>
+          <a:xfrm>
+            <a:off x="2201989" y="6492240"/>
+            <a:ext cx="64008" cy="64008"/>
+          </a:xfrm>
+          <a:prstGeom prst="ellipse">
+            <a:avLst/>
+          </a:prstGeom>
+          <a:solidFill>
+            <a:srgbClr val="CFC9EE"/>
+          </a:solidFill>
+          <a:ln>
+            <a:noFill/>
+          </a:ln>
+          <a:effectLst/>
+        </p:spPr>
+        <p:style>
+          <a:lnRef idx="1">
+            <a:schemeClr val="accent1"/>
+          </a:lnRef>
+          <a:fillRef idx="3">
+            <a:schemeClr val="accent1"/>
+          </a:fillRef>
+          <a:effectRef idx="2">
+            <a:schemeClr val="accent1"/>
+          </a:effectRef>
+          <a:fontRef idx="minor">
+            <a:schemeClr val="lt1"/>
+          </a:fontRef>
+        </p:style>
+        <p:txBody>
+          <a:bodyPr rtlCol="0" anchor="ctr" wrap="square"/>
+          <a:lstStyle/>
+          <a:p>
+            <a:pPr algn="ctr"/>
+          </a:p>
+        </p:txBody>
+      </p:sp>
+      <p:sp>
+        <p:nvSpPr>
+          <p:cNvPr id="15" name="TextBox 14"/>
+          <p:cNvSpPr txBox="1"/>
+          <p:nvPr/>
+        </p:nvSpPr>
+        <p:spPr>
+          <a:xfrm>
+            <a:off x="2311717" y="6437376"/>
+            <a:ext cx="1516475" cy="152146"/>
+          </a:xfrm>
+          <a:prstGeom prst="rect">
+            <a:avLst/>
+          </a:prstGeom>
+          <a:noFill/>
+        </p:spPr>
+        <p:txBody>
+          <a:bodyPr wrap="square" anchor="t" lIns="0" rIns="0" tIns="0" bIns="0">
+            <a:spAutoFit/>
+          </a:bodyPr>
+          <a:lstStyle/>
+          <a:p>
+            <a:pPr algn="l"/>
+            <a:r>
+              <a:rPr sz="700" b="0" i="0">
+                <a:solidFill>
+                  <a:srgbClr val="6B6690"/>
+                </a:solidFill>
+                <a:latin typeface="Calibri"/>
+              </a:rPr>
+              <a:t>Can you run the pass alone?</a:t>
+            </a:r>
+          </a:p>
+        </p:txBody>
+      </p:sp>
+      <p:sp>
+        <p:nvSpPr>
+          <p:cNvPr id="16" name="Oval 15"/>
+          <p:cNvSpPr/>
+          <p:nvPr/>
+        </p:nvSpPr>
+        <p:spPr>
+          <a:xfrm>
+            <a:off x="3919632" y="6492240"/>
+            <a:ext cx="64008" cy="64008"/>
+          </a:xfrm>
+          <a:prstGeom prst="ellipse">
+            <a:avLst/>
+          </a:prstGeom>
+          <a:solidFill>
+            <a:srgbClr val="CFC9EE"/>
+          </a:solidFill>
+          <a:ln>
+            <a:noFill/>
+          </a:ln>
+          <a:effectLst/>
+        </p:spPr>
+        <p:style>
+          <a:lnRef idx="1">
+            <a:schemeClr val="accent1"/>
+          </a:lnRef>
+          <a:fillRef idx="3">
+            <a:schemeClr val="accent1"/>
+          </a:fillRef>
+          <a:effectRef idx="2">
+            <a:schemeClr val="accent1"/>
+          </a:effectRef>
+          <a:fontRef idx="minor">
+            <a:schemeClr val="lt1"/>
+          </a:fontRef>
+        </p:style>
+        <p:txBody>
+          <a:bodyPr rtlCol="0" anchor="ctr" wrap="square"/>
+          <a:lstStyle/>
+          <a:p>
+            <a:pPr algn="ctr"/>
+          </a:p>
+        </p:txBody>
+      </p:sp>
+      <p:sp>
+        <p:nvSpPr>
+          <p:cNvPr id="17" name="TextBox 16"/>
+          <p:cNvSpPr txBox="1"/>
+          <p:nvPr/>
+        </p:nvSpPr>
+        <p:spPr>
+          <a:xfrm>
+            <a:off x="4029360" y="6437376"/>
+            <a:ext cx="1700498" cy="152146"/>
+          </a:xfrm>
+          <a:prstGeom prst="rect">
+            <a:avLst/>
+          </a:prstGeom>
+          <a:noFill/>
+        </p:spPr>
+        <p:txBody>
+          <a:bodyPr wrap="square" anchor="t" lIns="0" rIns="0" tIns="0" bIns="0">
+            <a:spAutoFit/>
+          </a:bodyPr>
+          <a:lstStyle/>
+          <a:p>
+            <a:pPr algn="l"/>
+            <a:r>
+              <a:rPr sz="700" b="0" i="0">
+                <a:solidFill>
+                  <a:srgbClr val="6B6690"/>
+                </a:solidFill>
+                <a:latin typeface="Calibri"/>
+              </a:rPr>
+              <a:t>Where did our numbers go wrong?</a:t>
+            </a:r>
+          </a:p>
+        </p:txBody>
+      </p:sp>
+      <p:sp>
+        <p:nvSpPr>
+          <p:cNvPr id="18" name="Oval 17"/>
+          <p:cNvSpPr/>
+          <p:nvPr/>
+        </p:nvSpPr>
+        <p:spPr>
+          <a:xfrm>
+            <a:off x="5821298" y="6492240"/>
+            <a:ext cx="64008" cy="64008"/>
+          </a:xfrm>
+          <a:prstGeom prst="ellipse">
+            <a:avLst/>
+          </a:prstGeom>
+          <a:solidFill>
+            <a:srgbClr val="CFC9EE"/>
+          </a:solidFill>
+          <a:ln>
+            <a:noFill/>
+          </a:ln>
+          <a:effectLst/>
+        </p:spPr>
+        <p:style>
+          <a:lnRef idx="1">
+            <a:schemeClr val="accent1"/>
+          </a:lnRef>
+          <a:fillRef idx="3">
+            <a:schemeClr val="accent1"/>
+          </a:fillRef>
+          <a:effectRef idx="2">
+            <a:schemeClr val="accent1"/>
+          </a:effectRef>
+          <a:fontRef idx="minor">
+            <a:schemeClr val="lt1"/>
+          </a:fontRef>
+        </p:style>
+        <p:txBody>
+          <a:bodyPr rtlCol="0" anchor="ctr" wrap="square"/>
+          <a:lstStyle/>
+          <a:p>
+            <a:pPr algn="ctr"/>
+          </a:p>
+        </p:txBody>
+      </p:sp>
+      <p:sp>
+        <p:nvSpPr>
+          <p:cNvPr id="19" name="TextBox 18"/>
+          <p:cNvSpPr txBox="1"/>
+          <p:nvPr/>
+        </p:nvSpPr>
+        <p:spPr>
+          <a:xfrm>
+            <a:off x="5931026" y="6437376"/>
+            <a:ext cx="1516475" cy="152146"/>
+          </a:xfrm>
+          <a:prstGeom prst="rect">
+            <a:avLst/>
+          </a:prstGeom>
+          <a:noFill/>
+        </p:spPr>
+        <p:txBody>
+          <a:bodyPr wrap="square" anchor="t" lIns="0" rIns="0" tIns="0" bIns="0">
+            <a:spAutoFit/>
+          </a:bodyPr>
+          <a:lstStyle/>
+          <a:p>
+            <a:pPr algn="l"/>
+            <a:r>
+              <a:rPr sz="700" b="0" i="0">
+                <a:solidFill>
+                  <a:srgbClr val="6B6690"/>
+                </a:solidFill>
+                <a:latin typeface="Calibri"/>
+              </a:rPr>
+              <a:t>Why were 14 rows set aside?</a:t>
+            </a:r>
+          </a:p>
+        </p:txBody>
+      </p:sp>
+      <p:sp>
+        <p:nvSpPr>
+          <p:cNvPr id="20" name="Oval 19"/>
+          <p:cNvSpPr/>
+          <p:nvPr/>
+        </p:nvSpPr>
+        <p:spPr>
+          <a:xfrm>
+            <a:off x="7538942" y="6492240"/>
+            <a:ext cx="64008" cy="64008"/>
+          </a:xfrm>
+          <a:prstGeom prst="ellipse">
+            <a:avLst/>
+          </a:prstGeom>
+          <a:solidFill>
+            <a:srgbClr val="CFC9EE"/>
+          </a:solidFill>
+          <a:ln>
+            <a:noFill/>
+          </a:ln>
+          <a:effectLst/>
+        </p:spPr>
+        <p:style>
+          <a:lnRef idx="1">
+            <a:schemeClr val="accent1"/>
+          </a:lnRef>
+          <a:fillRef idx="3">
+            <a:schemeClr val="accent1"/>
+          </a:fillRef>
+          <a:effectRef idx="2">
+            <a:schemeClr val="accent1"/>
+          </a:effectRef>
+          <a:fontRef idx="minor">
+            <a:schemeClr val="lt1"/>
+          </a:fontRef>
+        </p:style>
+        <p:txBody>
+          <a:bodyPr rtlCol="0" anchor="ctr" wrap="square"/>
+          <a:lstStyle/>
+          <a:p>
+            <a:pPr algn="ctr"/>
+          </a:p>
+        </p:txBody>
+      </p:sp>
+      <p:sp>
+        <p:nvSpPr>
+          <p:cNvPr id="21" name="TextBox 20"/>
+          <p:cNvSpPr txBox="1"/>
+          <p:nvPr/>
+        </p:nvSpPr>
+        <p:spPr>
+          <a:xfrm>
+            <a:off x="7648670" y="6437376"/>
+            <a:ext cx="1608486" cy="152146"/>
+          </a:xfrm>
+          <a:prstGeom prst="rect">
+            <a:avLst/>
+          </a:prstGeom>
+          <a:noFill/>
+        </p:spPr>
+        <p:txBody>
+          <a:bodyPr wrap="square" anchor="t" lIns="0" rIns="0" tIns="0" bIns="0">
+            <a:spAutoFit/>
+          </a:bodyPr>
+          <a:lstStyle/>
+          <a:p>
+            <a:pPr algn="l"/>
+            <a:r>
+              <a:rPr sz="700" b="0" i="0">
+                <a:solidFill>
+                  <a:srgbClr val="6B6690"/>
+                </a:solidFill>
+                <a:latin typeface="Calibri"/>
+              </a:rPr>
+              <a:t>Can you answer in 90 seconds?</a:t>
+            </a:r>
+          </a:p>
+        </p:txBody>
+      </p:sp>
+      <p:sp>
+        <p:nvSpPr>
+          <p:cNvPr id="22" name="Oval 21"/>
+          <p:cNvSpPr/>
+          <p:nvPr/>
+        </p:nvSpPr>
+        <p:spPr>
+          <a:xfrm>
+            <a:off x="9348597" y="6492240"/>
+            <a:ext cx="64008" cy="64008"/>
+          </a:xfrm>
+          <a:prstGeom prst="ellipse">
+            <a:avLst/>
+          </a:prstGeom>
+          <a:solidFill>
+            <a:srgbClr val="5B3FD6"/>
+          </a:solidFill>
+          <a:ln>
+            <a:noFill/>
+          </a:ln>
+          <a:effectLst/>
+        </p:spPr>
+        <p:style>
+          <a:lnRef idx="1">
+            <a:schemeClr val="accent1"/>
+          </a:lnRef>
+          <a:fillRef idx="3">
+            <a:schemeClr val="accent1"/>
+          </a:fillRef>
+          <a:effectRef idx="2">
+            <a:schemeClr val="accent1"/>
+          </a:effectRef>
+          <a:fontRef idx="minor">
+            <a:schemeClr val="lt1"/>
+          </a:fontRef>
+        </p:style>
+        <p:txBody>
+          <a:bodyPr rtlCol="0" anchor="ctr" wrap="square"/>
+          <a:lstStyle/>
+          <a:p>
+            <a:pPr algn="ctr"/>
+          </a:p>
+        </p:txBody>
+      </p:sp>
+      <p:sp>
+        <p:nvSpPr>
+          <p:cNvPr id="23" name="TextBox 22"/>
+          <p:cNvSpPr txBox="1"/>
+          <p:nvPr/>
+        </p:nvSpPr>
+        <p:spPr>
+          <a:xfrm>
+            <a:off x="9458324" y="6437376"/>
+            <a:ext cx="1286446" cy="152146"/>
+          </a:xfrm>
+          <a:prstGeom prst="rect">
+            <a:avLst/>
+          </a:prstGeom>
+          <a:noFill/>
+        </p:spPr>
+        <p:txBody>
+          <a:bodyPr wrap="square" anchor="t" lIns="0" rIns="0" tIns="0" bIns="0">
+            <a:spAutoFit/>
+          </a:bodyPr>
+          <a:lstStyle/>
+          <a:p>
+            <a:pPr algn="l"/>
+            <a:r>
+              <a:rPr sz="700" b="1" i="0">
+                <a:solidFill>
+                  <a:srgbClr val="5B3FD6"/>
+                </a:solidFill>
+                <a:latin typeface="Calibri"/>
+              </a:rPr>
+              <a:t>What do we tell Anand?</a:t>
+            </a:r>
+          </a:p>
+        </p:txBody>
+      </p:sp>
+      <p:sp>
+        <p:nvSpPr>
+          <p:cNvPr id="24" name="TextBox 23"/>
+          <p:cNvSpPr txBox="1"/>
+          <p:nvPr/>
+        </p:nvSpPr>
+        <p:spPr>
+          <a:xfrm>
+            <a:off x="10198303" y="6437376"/>
+            <a:ext cx="1463040" cy="160401"/>
+          </a:xfrm>
+          <a:prstGeom prst="rect">
+            <a:avLst/>
+          </a:prstGeom>
+          <a:noFill/>
+        </p:spPr>
+        <p:txBody>
+          <a:bodyPr wrap="square" anchor="t" lIns="0" rIns="0" tIns="0" bIns="0">
+            <a:spAutoFit/>
+          </a:bodyPr>
+          <a:lstStyle/>
+          <a:p>
+            <a:pPr algn="r"/>
+            <a:r>
+              <a:rPr sz="750" b="0" i="0">
+                <a:solidFill>
+                  <a:srgbClr val="6B6690"/>
+                </a:solidFill>
+                <a:latin typeface="Calibri"/>
+              </a:rPr>
+              <a:t>S26  ·  33 / 35</a:t>
+            </a:r>
+          </a:p>
+        </p:txBody>
+      </p:sp>
+    </p:spTree>
+  </p:cSld>
+  <p:clrMapOvr>
+    <a:masterClrMapping/>
+  </p:clrMapOvr>
+</p:sld>
+</file>
+
+<file path=ppt/slides/slide34.xml><?xml version="1.0" encoding="utf-8"?>
 <p:sld xmlns:a="http://schemas.openxmlformats.org/drawingml/2006/main" xmlns:p="http://schemas.openxmlformats.org/presentationml/2006/main" xmlns:r="http://schemas.openxmlformats.org/officeDocument/2006/relationships">
   <p:cSld>
     <p:spTree>
@@ -35268,977 +36532,6 @@
                 </a:solidFill>
                 <a:latin typeface="Calibri"/>
               </a:rPr>
-              <a:t>S26  ·  33 / 35</a:t>
-            </a:r>
-          </a:p>
-        </p:txBody>
-      </p:sp>
-    </p:spTree>
-  </p:cSld>
-  <p:clrMapOvr>
-    <a:masterClrMapping/>
-  </p:clrMapOvr>
-</p:sld>
-</file>
-
-<file path=ppt/slides/slide34.xml><?xml version="1.0" encoding="utf-8"?>
-<p:sld xmlns:a="http://schemas.openxmlformats.org/drawingml/2006/main" xmlns:p="http://schemas.openxmlformats.org/presentationml/2006/main" xmlns:r="http://schemas.openxmlformats.org/officeDocument/2006/relationships">
-  <p:cSld>
-    <p:spTree>
-      <p:nvGrpSpPr>
-        <p:cNvPr id="1" name=""/>
-        <p:cNvGrpSpPr/>
-        <p:nvPr/>
-      </p:nvGrpSpPr>
-      <p:grpSpPr/>
-      <p:pic>
-        <p:nvPicPr>
-          <p:cNvPr id="2" name="Picture 1" descr="bg_light.jpg"/>
-          <p:cNvPicPr>
-            <a:picLocks noChangeAspect="1"/>
-          </p:cNvPicPr>
-          <p:nvPr/>
-        </p:nvPicPr>
-        <p:blipFill>
-          <a:blip r:embed="rId2"/>
-          <a:stretch>
-            <a:fillRect/>
-          </a:stretch>
-        </p:blipFill>
-        <p:spPr>
-          <a:xfrm>
-            <a:off x="0" y="0"/>
-            <a:ext cx="12191695" cy="6858000"/>
-          </a:xfrm>
-          <a:prstGeom prst="rect">
-            <a:avLst/>
-          </a:prstGeom>
-        </p:spPr>
-      </p:pic>
-      <p:pic>
-        <p:nvPicPr>
-          <p:cNvPr id="3" name="Picture 2" descr="iitgn_logo.png"/>
-          <p:cNvPicPr>
-            <a:picLocks noChangeAspect="1"/>
-          </p:cNvPicPr>
-          <p:nvPr/>
-        </p:nvPicPr>
-        <p:blipFill>
-          <a:blip r:embed="rId3"/>
-          <a:stretch>
-            <a:fillRect/>
-          </a:stretch>
-        </p:blipFill>
-        <p:spPr>
-          <a:xfrm>
-            <a:off x="530352" y="201168"/>
-            <a:ext cx="420624" cy="420624"/>
-          </a:xfrm>
-          <a:prstGeom prst="rect">
-            <a:avLst/>
-          </a:prstGeom>
-        </p:spPr>
-      </p:pic>
-      <p:sp>
-        <p:nvSpPr>
-          <p:cNvPr id="4" name="TextBox 3"/>
-          <p:cNvSpPr txBox="1"/>
-          <p:nvPr/>
-        </p:nvSpPr>
-        <p:spPr>
-          <a:xfrm>
-            <a:off x="1042416" y="228600"/>
-            <a:ext cx="5120640" cy="185166"/>
-          </a:xfrm>
-          <a:prstGeom prst="rect">
-            <a:avLst/>
-          </a:prstGeom>
-          <a:noFill/>
-        </p:spPr>
-        <p:txBody>
-          <a:bodyPr wrap="square" anchor="t" lIns="0" rIns="0" tIns="0" bIns="0">
-            <a:spAutoFit/>
-          </a:bodyPr>
-          <a:lstStyle/>
-          <a:p>
-            <a:pPr algn="l"/>
-            <a:r>
-              <a:rPr sz="900" b="1" i="0">
-                <a:solidFill>
-                  <a:srgbClr val="1A0F5C"/>
-                </a:solidFill>
-                <a:latin typeface="Calibri"/>
-              </a:rPr>
-              <a:t>Indian Institute of Technology Gandhinagar</a:t>
-            </a:r>
-          </a:p>
-        </p:txBody>
-      </p:sp>
-      <p:sp>
-        <p:nvSpPr>
-          <p:cNvPr id="5" name="TextBox 4"/>
-          <p:cNvSpPr txBox="1"/>
-          <p:nvPr/>
-        </p:nvSpPr>
-        <p:spPr>
-          <a:xfrm>
-            <a:off x="1042416" y="420623"/>
-            <a:ext cx="5852160" cy="127381"/>
-          </a:xfrm>
-          <a:prstGeom prst="rect">
-            <a:avLst/>
-          </a:prstGeom>
-          <a:noFill/>
-        </p:spPr>
-        <p:txBody>
-          <a:bodyPr wrap="square" anchor="t" lIns="0" rIns="0" tIns="0" bIns="0">
-            <a:spAutoFit/>
-          </a:bodyPr>
-          <a:lstStyle/>
-          <a:p>
-            <a:pPr algn="l"/>
-            <a:r>
-              <a:rPr sz="550" b="1" i="0" spc="300">
-                <a:solidFill>
-                  <a:srgbClr val="6B6690"/>
-                </a:solidFill>
-                <a:latin typeface="Calibri"/>
-              </a:rPr>
-              <a:t>ADMINISTERED THROUGH THE COMPETENCY ADVANCEMENT ACADEMY</a:t>
-            </a:r>
-          </a:p>
-        </p:txBody>
-      </p:sp>
-      <p:sp>
-        <p:nvSpPr>
-          <p:cNvPr id="6" name="TextBox 5"/>
-          <p:cNvSpPr txBox="1"/>
-          <p:nvPr/>
-        </p:nvSpPr>
-        <p:spPr>
-          <a:xfrm>
-            <a:off x="5992063" y="310896"/>
-            <a:ext cx="5669280" cy="127381"/>
-          </a:xfrm>
-          <a:prstGeom prst="rect">
-            <a:avLst/>
-          </a:prstGeom>
-          <a:noFill/>
-        </p:spPr>
-        <p:txBody>
-          <a:bodyPr wrap="square" anchor="t" lIns="0" rIns="0" tIns="0" bIns="0">
-            <a:spAutoFit/>
-          </a:bodyPr>
-          <a:lstStyle/>
-          <a:p>
-            <a:pPr algn="r"/>
-            <a:r>
-              <a:rPr sz="550" b="1" i="0" spc="300">
-                <a:solidFill>
-                  <a:srgbClr val="6B6690"/>
-                </a:solidFill>
-                <a:latin typeface="Calibri"/>
-              </a:rPr>
-              <a:t>WEEK 1  ·  DAY 3  ·  KALPA GLOBAL CAPABILITY CENTRE</a:t>
-            </a:r>
-          </a:p>
-        </p:txBody>
-      </p:sp>
-      <p:sp>
-        <p:nvSpPr>
-          <p:cNvPr id="7" name="TextBox 6"/>
-          <p:cNvSpPr txBox="1"/>
-          <p:nvPr/>
-        </p:nvSpPr>
-        <p:spPr>
-          <a:xfrm>
-            <a:off x="530352" y="676656"/>
-            <a:ext cx="11130991" cy="512064"/>
-          </a:xfrm>
-          <a:prstGeom prst="rect">
-            <a:avLst/>
-          </a:prstGeom>
-          <a:noFill/>
-        </p:spPr>
-        <p:txBody>
-          <a:bodyPr wrap="square" anchor="b" lIns="0" rIns="0" tIns="0" bIns="0">
-            <a:spAutoFit/>
-          </a:bodyPr>
-          <a:lstStyle/>
-          <a:p>
-            <a:pPr algn="l"/>
-            <a:r>
-              <a:rPr sz="2600" b="0" i="0">
-                <a:solidFill>
-                  <a:srgbClr val="1A0F5C"/>
-                </a:solidFill>
-                <a:latin typeface="Georgia"/>
-              </a:rPr>
-              <a:t>Tomorrow asks whether -35.0 percent is real or chance</a:t>
-            </a:r>
-          </a:p>
-        </p:txBody>
-      </p:sp>
-      <p:sp>
-        <p:nvSpPr>
-          <p:cNvPr id="8" name="TextBox 7"/>
-          <p:cNvSpPr txBox="1"/>
-          <p:nvPr/>
-        </p:nvSpPr>
-        <p:spPr>
-          <a:xfrm>
-            <a:off x="530352" y="1243584"/>
-            <a:ext cx="11130991" cy="234696"/>
-          </a:xfrm>
-          <a:prstGeom prst="rect">
-            <a:avLst/>
-          </a:prstGeom>
-          <a:noFill/>
-        </p:spPr>
-        <p:txBody>
-          <a:bodyPr wrap="square" anchor="t" lIns="0" rIns="0" tIns="0" bIns="0">
-            <a:spAutoFit/>
-          </a:bodyPr>
-          <a:lstStyle/>
-          <a:p>
-            <a:pPr algn="l"/>
-            <a:r>
-              <a:rPr sz="1200" b="0" i="0">
-                <a:solidFill>
-                  <a:srgbClr val="6B6690"/>
-                </a:solidFill>
-                <a:latin typeface="Calibri"/>
-              </a:rPr>
-              <a:t>The Retail-Plus fall survived cleaning: is it real, or the wobble every quarter shows?</a:t>
-            </a:r>
-          </a:p>
-        </p:txBody>
-      </p:sp>
-      <p:sp>
-        <p:nvSpPr>
-          <p:cNvPr id="9" name="Rounded Rectangle 8"/>
-          <p:cNvSpPr/>
-          <p:nvPr/>
-        </p:nvSpPr>
-        <p:spPr>
-          <a:xfrm>
-            <a:off x="530352" y="1956816"/>
-            <a:ext cx="11130991" cy="1121664"/>
-          </a:xfrm>
-          <a:prstGeom prst="roundRect">
-            <a:avLst>
-              <a:gd name="adj" fmla="val 5000"/>
-            </a:avLst>
-          </a:prstGeom>
-          <a:gradFill rotWithShape="1">
-            <a:gsLst>
-              <a:gs pos="0">
-                <a:srgbClr val="2C1A86"/>
-              </a:gs>
-              <a:gs pos="100000">
-                <a:srgbClr val="1A0F5C"/>
-              </a:gs>
-            </a:gsLst>
-            <a:lin scaled="0" ang="16200000"/>
-          </a:gradFill>
-          <a:ln>
-            <a:noFill/>
-          </a:ln>
-          <a:effectLst>
-            <a:outerShdw blurRad="76200" dist="19050" dir="5400000" algn="bl" rotWithShape="0">
-              <a:srgbClr val="1A0F5C">
-                <a:alpha val="12000"/>
-              </a:srgbClr>
-            </a:outerShdw>
-          </a:effectLst>
-        </p:spPr>
-        <p:style>
-          <a:lnRef idx="1">
-            <a:schemeClr val="accent1"/>
-          </a:lnRef>
-          <a:fillRef idx="3">
-            <a:schemeClr val="accent1"/>
-          </a:fillRef>
-          <a:effectRef idx="2">
-            <a:schemeClr val="accent1"/>
-          </a:effectRef>
-          <a:fontRef idx="minor">
-            <a:schemeClr val="lt1"/>
-          </a:fontRef>
-        </p:style>
-        <p:txBody>
-          <a:bodyPr rtlCol="0" anchor="ctr" wrap="square"/>
-          <a:lstStyle/>
-          <a:p>
-            <a:pPr algn="ctr"/>
-          </a:p>
-        </p:txBody>
-      </p:sp>
-      <p:sp>
-        <p:nvSpPr>
-          <p:cNvPr id="10" name="Oval 9"/>
-          <p:cNvSpPr/>
-          <p:nvPr/>
-        </p:nvSpPr>
-        <p:spPr>
-          <a:xfrm>
-            <a:off x="758952" y="2289048"/>
-            <a:ext cx="457200" cy="457200"/>
-          </a:xfrm>
-          <a:prstGeom prst="ellipse">
-            <a:avLst/>
-          </a:prstGeom>
-          <a:solidFill>
-            <a:srgbClr val="5B3FD6"/>
-          </a:solidFill>
-          <a:ln>
-            <a:noFill/>
-          </a:ln>
-          <a:effectLst/>
-        </p:spPr>
-        <p:style>
-          <a:lnRef idx="1">
-            <a:schemeClr val="accent1"/>
-          </a:lnRef>
-          <a:fillRef idx="3">
-            <a:schemeClr val="accent1"/>
-          </a:fillRef>
-          <a:effectRef idx="2">
-            <a:schemeClr val="accent1"/>
-          </a:effectRef>
-          <a:fontRef idx="minor">
-            <a:schemeClr val="lt1"/>
-          </a:fontRef>
-        </p:style>
-        <p:txBody>
-          <a:bodyPr rtlCol="0" anchor="ctr" wrap="square"/>
-          <a:lstStyle/>
-          <a:p>
-            <a:pPr algn="ctr"/>
-          </a:p>
-        </p:txBody>
-      </p:sp>
-      <p:pic>
-        <p:nvPicPr>
-          <p:cNvPr id="11" name="Picture 10" descr="message-square_028dbd132a0a.png"/>
-          <p:cNvPicPr>
-            <a:picLocks noChangeAspect="1"/>
-          </p:cNvPicPr>
-          <p:nvPr/>
-        </p:nvPicPr>
-        <p:blipFill>
-          <a:blip r:embed="rId4"/>
-          <a:stretch>
-            <a:fillRect/>
-          </a:stretch>
-        </p:blipFill>
-        <p:spPr>
-          <a:xfrm>
-            <a:off x="868680" y="2398776"/>
-            <a:ext cx="237744" cy="237744"/>
-          </a:xfrm>
-          <a:prstGeom prst="rect">
-            <a:avLst/>
-          </a:prstGeom>
-        </p:spPr>
-      </p:pic>
-      <p:sp>
-        <p:nvSpPr>
-          <p:cNvPr id="12" name="TextBox 11"/>
-          <p:cNvSpPr txBox="1"/>
-          <p:nvPr/>
-        </p:nvSpPr>
-        <p:spPr>
-          <a:xfrm>
-            <a:off x="1399031" y="2103120"/>
-            <a:ext cx="9987991" cy="160401"/>
-          </a:xfrm>
-          <a:prstGeom prst="rect">
-            <a:avLst/>
-          </a:prstGeom>
-          <a:noFill/>
-        </p:spPr>
-        <p:txBody>
-          <a:bodyPr wrap="square" anchor="t" lIns="0" rIns="0" tIns="0" bIns="0">
-            <a:spAutoFit/>
-          </a:bodyPr>
-          <a:lstStyle/>
-          <a:p>
-            <a:pPr algn="l"/>
-            <a:r>
-              <a:rPr sz="750" b="1" i="0" spc="250">
-                <a:solidFill>
-                  <a:srgbClr val="D9A7FF"/>
-                </a:solidFill>
-                <a:latin typeface="Calibri"/>
-              </a:rPr>
-              <a:t>THE CLIENT ASKS</a:t>
-            </a:r>
-          </a:p>
-        </p:txBody>
-      </p:sp>
-      <p:sp>
-        <p:nvSpPr>
-          <p:cNvPr id="13" name="TextBox 12"/>
-          <p:cNvSpPr txBox="1"/>
-          <p:nvPr/>
-        </p:nvSpPr>
-        <p:spPr>
-          <a:xfrm>
-            <a:off x="1399031" y="2322576"/>
-            <a:ext cx="9987991" cy="682752"/>
-          </a:xfrm>
-          <a:prstGeom prst="rect">
-            <a:avLst/>
-          </a:prstGeom>
-          <a:noFill/>
-        </p:spPr>
-        <p:txBody>
-          <a:bodyPr wrap="square" anchor="t" lIns="0" rIns="0" tIns="0" bIns="0">
-            <a:spAutoFit/>
-          </a:bodyPr>
-          <a:lstStyle/>
-          <a:p>
-            <a:r>
-              <a:rPr sz="1500" b="0" i="0">
-                <a:solidFill>
-                  <a:srgbClr val="FFFFFF"/>
-                </a:solidFill>
-                <a:latin typeface="Calibri"/>
-              </a:rPr>
-              <a:t>"Retail-Plus is down, smaller than first reported. Real, or the wobble we see every quarter?" Meera Raghavan, CEO, Kalpa Retail</a:t>
-            </a:r>
-          </a:p>
-        </p:txBody>
-      </p:sp>
-      <p:pic>
-        <p:nvPicPr>
-          <p:cNvPr id="14" name="mermaid diagram" descr="ca5d5c77445b5892.png"/>
-          <p:cNvPicPr>
-            <a:picLocks noChangeAspect="1"/>
-          </p:cNvPicPr>
-          <p:nvPr/>
-        </p:nvPicPr>
-        <p:blipFill>
-          <a:blip r:embed="rId6"/>
-          <a:stretch>
-            <a:fillRect/>
-          </a:stretch>
-        </p:blipFill>
-        <p:spPr>
-          <a:xfrm>
-            <a:off x="3424085" y="3243072"/>
-            <a:ext cx="5343525" cy="2586037"/>
-          </a:xfrm>
-          <a:prstGeom prst="rect">
-            <a:avLst/>
-          </a:prstGeom>
-        </p:spPr>
-      </p:pic>
-      <p:sp>
-        <p:nvSpPr>
-          <p:cNvPr id="15" name="Oval 14"/>
-          <p:cNvSpPr/>
-          <p:nvPr/>
-        </p:nvSpPr>
-        <p:spPr>
-          <a:xfrm>
-            <a:off x="530352" y="6492240"/>
-            <a:ext cx="64008" cy="64008"/>
-          </a:xfrm>
-          <a:prstGeom prst="ellipse">
-            <a:avLst/>
-          </a:prstGeom>
-          <a:solidFill>
-            <a:srgbClr val="CFC9EE"/>
-          </a:solidFill>
-          <a:ln>
-            <a:noFill/>
-          </a:ln>
-          <a:effectLst/>
-        </p:spPr>
-        <p:style>
-          <a:lnRef idx="1">
-            <a:schemeClr val="accent1"/>
-          </a:lnRef>
-          <a:fillRef idx="3">
-            <a:schemeClr val="accent1"/>
-          </a:fillRef>
-          <a:effectRef idx="2">
-            <a:schemeClr val="accent1"/>
-          </a:effectRef>
-          <a:fontRef idx="minor">
-            <a:schemeClr val="lt1"/>
-          </a:fontRef>
-        </p:style>
-        <p:txBody>
-          <a:bodyPr rtlCol="0" anchor="ctr" wrap="square"/>
-          <a:lstStyle/>
-          <a:p>
-            <a:pPr algn="ctr"/>
-          </a:p>
-        </p:txBody>
-      </p:sp>
-      <p:sp>
-        <p:nvSpPr>
-          <p:cNvPr id="16" name="TextBox 15"/>
-          <p:cNvSpPr txBox="1"/>
-          <p:nvPr/>
-        </p:nvSpPr>
-        <p:spPr>
-          <a:xfrm>
-            <a:off x="640080" y="6437376"/>
-            <a:ext cx="1470469" cy="152146"/>
-          </a:xfrm>
-          <a:prstGeom prst="rect">
-            <a:avLst/>
-          </a:prstGeom>
-          <a:noFill/>
-        </p:spPr>
-        <p:txBody>
-          <a:bodyPr wrap="square" anchor="t" lIns="0" rIns="0" tIns="0" bIns="0">
-            <a:spAutoFit/>
-          </a:bodyPr>
-          <a:lstStyle/>
-          <a:p>
-            <a:pPr algn="l"/>
-            <a:r>
-              <a:rPr sz="700" b="0" i="0">
-                <a:solidFill>
-                  <a:srgbClr val="6B6690"/>
-                </a:solidFill>
-                <a:latin typeface="Calibri"/>
-              </a:rPr>
-              <a:t>Can the analyst replay it?</a:t>
-            </a:r>
-          </a:p>
-        </p:txBody>
-      </p:sp>
-      <p:sp>
-        <p:nvSpPr>
-          <p:cNvPr id="17" name="Oval 16"/>
-          <p:cNvSpPr/>
-          <p:nvPr/>
-        </p:nvSpPr>
-        <p:spPr>
-          <a:xfrm>
-            <a:off x="2201989" y="6492240"/>
-            <a:ext cx="64008" cy="64008"/>
-          </a:xfrm>
-          <a:prstGeom prst="ellipse">
-            <a:avLst/>
-          </a:prstGeom>
-          <a:solidFill>
-            <a:srgbClr val="CFC9EE"/>
-          </a:solidFill>
-          <a:ln>
-            <a:noFill/>
-          </a:ln>
-          <a:effectLst/>
-        </p:spPr>
-        <p:style>
-          <a:lnRef idx="1">
-            <a:schemeClr val="accent1"/>
-          </a:lnRef>
-          <a:fillRef idx="3">
-            <a:schemeClr val="accent1"/>
-          </a:fillRef>
-          <a:effectRef idx="2">
-            <a:schemeClr val="accent1"/>
-          </a:effectRef>
-          <a:fontRef idx="minor">
-            <a:schemeClr val="lt1"/>
-          </a:fontRef>
-        </p:style>
-        <p:txBody>
-          <a:bodyPr rtlCol="0" anchor="ctr" wrap="square"/>
-          <a:lstStyle/>
-          <a:p>
-            <a:pPr algn="ctr"/>
-          </a:p>
-        </p:txBody>
-      </p:sp>
-      <p:sp>
-        <p:nvSpPr>
-          <p:cNvPr id="18" name="TextBox 17"/>
-          <p:cNvSpPr txBox="1"/>
-          <p:nvPr/>
-        </p:nvSpPr>
-        <p:spPr>
-          <a:xfrm>
-            <a:off x="2311717" y="6437376"/>
-            <a:ext cx="1516475" cy="152146"/>
-          </a:xfrm>
-          <a:prstGeom prst="rect">
-            <a:avLst/>
-          </a:prstGeom>
-          <a:noFill/>
-        </p:spPr>
-        <p:txBody>
-          <a:bodyPr wrap="square" anchor="t" lIns="0" rIns="0" tIns="0" bIns="0">
-            <a:spAutoFit/>
-          </a:bodyPr>
-          <a:lstStyle/>
-          <a:p>
-            <a:pPr algn="l"/>
-            <a:r>
-              <a:rPr sz="700" b="0" i="0">
-                <a:solidFill>
-                  <a:srgbClr val="6B6690"/>
-                </a:solidFill>
-                <a:latin typeface="Calibri"/>
-              </a:rPr>
-              <a:t>Can you run the pass alone?</a:t>
-            </a:r>
-          </a:p>
-        </p:txBody>
-      </p:sp>
-      <p:sp>
-        <p:nvSpPr>
-          <p:cNvPr id="19" name="Oval 18"/>
-          <p:cNvSpPr/>
-          <p:nvPr/>
-        </p:nvSpPr>
-        <p:spPr>
-          <a:xfrm>
-            <a:off x="3919632" y="6492240"/>
-            <a:ext cx="64008" cy="64008"/>
-          </a:xfrm>
-          <a:prstGeom prst="ellipse">
-            <a:avLst/>
-          </a:prstGeom>
-          <a:solidFill>
-            <a:srgbClr val="CFC9EE"/>
-          </a:solidFill>
-          <a:ln>
-            <a:noFill/>
-          </a:ln>
-          <a:effectLst/>
-        </p:spPr>
-        <p:style>
-          <a:lnRef idx="1">
-            <a:schemeClr val="accent1"/>
-          </a:lnRef>
-          <a:fillRef idx="3">
-            <a:schemeClr val="accent1"/>
-          </a:fillRef>
-          <a:effectRef idx="2">
-            <a:schemeClr val="accent1"/>
-          </a:effectRef>
-          <a:fontRef idx="minor">
-            <a:schemeClr val="lt1"/>
-          </a:fontRef>
-        </p:style>
-        <p:txBody>
-          <a:bodyPr rtlCol="0" anchor="ctr" wrap="square"/>
-          <a:lstStyle/>
-          <a:p>
-            <a:pPr algn="ctr"/>
-          </a:p>
-        </p:txBody>
-      </p:sp>
-      <p:sp>
-        <p:nvSpPr>
-          <p:cNvPr id="20" name="TextBox 19"/>
-          <p:cNvSpPr txBox="1"/>
-          <p:nvPr/>
-        </p:nvSpPr>
-        <p:spPr>
-          <a:xfrm>
-            <a:off x="4029360" y="6437376"/>
-            <a:ext cx="1700498" cy="152146"/>
-          </a:xfrm>
-          <a:prstGeom prst="rect">
-            <a:avLst/>
-          </a:prstGeom>
-          <a:noFill/>
-        </p:spPr>
-        <p:txBody>
-          <a:bodyPr wrap="square" anchor="t" lIns="0" rIns="0" tIns="0" bIns="0">
-            <a:spAutoFit/>
-          </a:bodyPr>
-          <a:lstStyle/>
-          <a:p>
-            <a:pPr algn="l"/>
-            <a:r>
-              <a:rPr sz="700" b="0" i="0">
-                <a:solidFill>
-                  <a:srgbClr val="6B6690"/>
-                </a:solidFill>
-                <a:latin typeface="Calibri"/>
-              </a:rPr>
-              <a:t>Where did our numbers go wrong?</a:t>
-            </a:r>
-          </a:p>
-        </p:txBody>
-      </p:sp>
-      <p:sp>
-        <p:nvSpPr>
-          <p:cNvPr id="21" name="Oval 20"/>
-          <p:cNvSpPr/>
-          <p:nvPr/>
-        </p:nvSpPr>
-        <p:spPr>
-          <a:xfrm>
-            <a:off x="5821298" y="6492240"/>
-            <a:ext cx="64008" cy="64008"/>
-          </a:xfrm>
-          <a:prstGeom prst="ellipse">
-            <a:avLst/>
-          </a:prstGeom>
-          <a:solidFill>
-            <a:srgbClr val="CFC9EE"/>
-          </a:solidFill>
-          <a:ln>
-            <a:noFill/>
-          </a:ln>
-          <a:effectLst/>
-        </p:spPr>
-        <p:style>
-          <a:lnRef idx="1">
-            <a:schemeClr val="accent1"/>
-          </a:lnRef>
-          <a:fillRef idx="3">
-            <a:schemeClr val="accent1"/>
-          </a:fillRef>
-          <a:effectRef idx="2">
-            <a:schemeClr val="accent1"/>
-          </a:effectRef>
-          <a:fontRef idx="minor">
-            <a:schemeClr val="lt1"/>
-          </a:fontRef>
-        </p:style>
-        <p:txBody>
-          <a:bodyPr rtlCol="0" anchor="ctr" wrap="square"/>
-          <a:lstStyle/>
-          <a:p>
-            <a:pPr algn="ctr"/>
-          </a:p>
-        </p:txBody>
-      </p:sp>
-      <p:sp>
-        <p:nvSpPr>
-          <p:cNvPr id="22" name="TextBox 21"/>
-          <p:cNvSpPr txBox="1"/>
-          <p:nvPr/>
-        </p:nvSpPr>
-        <p:spPr>
-          <a:xfrm>
-            <a:off x="5931026" y="6437376"/>
-            <a:ext cx="1516475" cy="152146"/>
-          </a:xfrm>
-          <a:prstGeom prst="rect">
-            <a:avLst/>
-          </a:prstGeom>
-          <a:noFill/>
-        </p:spPr>
-        <p:txBody>
-          <a:bodyPr wrap="square" anchor="t" lIns="0" rIns="0" tIns="0" bIns="0">
-            <a:spAutoFit/>
-          </a:bodyPr>
-          <a:lstStyle/>
-          <a:p>
-            <a:pPr algn="l"/>
-            <a:r>
-              <a:rPr sz="700" b="0" i="0">
-                <a:solidFill>
-                  <a:srgbClr val="6B6690"/>
-                </a:solidFill>
-                <a:latin typeface="Calibri"/>
-              </a:rPr>
-              <a:t>Why were 14 rows set aside?</a:t>
-            </a:r>
-          </a:p>
-        </p:txBody>
-      </p:sp>
-      <p:sp>
-        <p:nvSpPr>
-          <p:cNvPr id="23" name="Oval 22"/>
-          <p:cNvSpPr/>
-          <p:nvPr/>
-        </p:nvSpPr>
-        <p:spPr>
-          <a:xfrm>
-            <a:off x="7538942" y="6492240"/>
-            <a:ext cx="64008" cy="64008"/>
-          </a:xfrm>
-          <a:prstGeom prst="ellipse">
-            <a:avLst/>
-          </a:prstGeom>
-          <a:solidFill>
-            <a:srgbClr val="CFC9EE"/>
-          </a:solidFill>
-          <a:ln>
-            <a:noFill/>
-          </a:ln>
-          <a:effectLst/>
-        </p:spPr>
-        <p:style>
-          <a:lnRef idx="1">
-            <a:schemeClr val="accent1"/>
-          </a:lnRef>
-          <a:fillRef idx="3">
-            <a:schemeClr val="accent1"/>
-          </a:fillRef>
-          <a:effectRef idx="2">
-            <a:schemeClr val="accent1"/>
-          </a:effectRef>
-          <a:fontRef idx="minor">
-            <a:schemeClr val="lt1"/>
-          </a:fontRef>
-        </p:style>
-        <p:txBody>
-          <a:bodyPr rtlCol="0" anchor="ctr" wrap="square"/>
-          <a:lstStyle/>
-          <a:p>
-            <a:pPr algn="ctr"/>
-          </a:p>
-        </p:txBody>
-      </p:sp>
-      <p:sp>
-        <p:nvSpPr>
-          <p:cNvPr id="24" name="TextBox 23"/>
-          <p:cNvSpPr txBox="1"/>
-          <p:nvPr/>
-        </p:nvSpPr>
-        <p:spPr>
-          <a:xfrm>
-            <a:off x="7648670" y="6437376"/>
-            <a:ext cx="1608486" cy="152146"/>
-          </a:xfrm>
-          <a:prstGeom prst="rect">
-            <a:avLst/>
-          </a:prstGeom>
-          <a:noFill/>
-        </p:spPr>
-        <p:txBody>
-          <a:bodyPr wrap="square" anchor="t" lIns="0" rIns="0" tIns="0" bIns="0">
-            <a:spAutoFit/>
-          </a:bodyPr>
-          <a:lstStyle/>
-          <a:p>
-            <a:pPr algn="l"/>
-            <a:r>
-              <a:rPr sz="700" b="0" i="0">
-                <a:solidFill>
-                  <a:srgbClr val="6B6690"/>
-                </a:solidFill>
-                <a:latin typeface="Calibri"/>
-              </a:rPr>
-              <a:t>Can you answer in 90 seconds?</a:t>
-            </a:r>
-          </a:p>
-        </p:txBody>
-      </p:sp>
-      <p:sp>
-        <p:nvSpPr>
-          <p:cNvPr id="25" name="Oval 24"/>
-          <p:cNvSpPr/>
-          <p:nvPr/>
-        </p:nvSpPr>
-        <p:spPr>
-          <a:xfrm>
-            <a:off x="9348597" y="6492240"/>
-            <a:ext cx="64008" cy="64008"/>
-          </a:xfrm>
-          <a:prstGeom prst="ellipse">
-            <a:avLst/>
-          </a:prstGeom>
-          <a:solidFill>
-            <a:srgbClr val="5B3FD6"/>
-          </a:solidFill>
-          <a:ln>
-            <a:noFill/>
-          </a:ln>
-          <a:effectLst/>
-        </p:spPr>
-        <p:style>
-          <a:lnRef idx="1">
-            <a:schemeClr val="accent1"/>
-          </a:lnRef>
-          <a:fillRef idx="3">
-            <a:schemeClr val="accent1"/>
-          </a:fillRef>
-          <a:effectRef idx="2">
-            <a:schemeClr val="accent1"/>
-          </a:effectRef>
-          <a:fontRef idx="minor">
-            <a:schemeClr val="lt1"/>
-          </a:fontRef>
-        </p:style>
-        <p:txBody>
-          <a:bodyPr rtlCol="0" anchor="ctr" wrap="square"/>
-          <a:lstStyle/>
-          <a:p>
-            <a:pPr algn="ctr"/>
-          </a:p>
-        </p:txBody>
-      </p:sp>
-      <p:sp>
-        <p:nvSpPr>
-          <p:cNvPr id="26" name="TextBox 25"/>
-          <p:cNvSpPr txBox="1"/>
-          <p:nvPr/>
-        </p:nvSpPr>
-        <p:spPr>
-          <a:xfrm>
-            <a:off x="9458324" y="6437376"/>
-            <a:ext cx="1286446" cy="152146"/>
-          </a:xfrm>
-          <a:prstGeom prst="rect">
-            <a:avLst/>
-          </a:prstGeom>
-          <a:noFill/>
-        </p:spPr>
-        <p:txBody>
-          <a:bodyPr wrap="square" anchor="t" lIns="0" rIns="0" tIns="0" bIns="0">
-            <a:spAutoFit/>
-          </a:bodyPr>
-          <a:lstStyle/>
-          <a:p>
-            <a:pPr algn="l"/>
-            <a:r>
-              <a:rPr sz="700" b="1" i="0">
-                <a:solidFill>
-                  <a:srgbClr val="5B3FD6"/>
-                </a:solidFill>
-                <a:latin typeface="Calibri"/>
-              </a:rPr>
-              <a:t>What do we tell Anand?</a:t>
-            </a:r>
-          </a:p>
-        </p:txBody>
-      </p:sp>
-      <p:sp>
-        <p:nvSpPr>
-          <p:cNvPr id="27" name="TextBox 26"/>
-          <p:cNvSpPr txBox="1"/>
-          <p:nvPr/>
-        </p:nvSpPr>
-        <p:spPr>
-          <a:xfrm>
-            <a:off x="10198303" y="6437376"/>
-            <a:ext cx="1463040" cy="160401"/>
-          </a:xfrm>
-          <a:prstGeom prst="rect">
-            <a:avLst/>
-          </a:prstGeom>
-          <a:noFill/>
-        </p:spPr>
-        <p:txBody>
-          <a:bodyPr wrap="square" anchor="t" lIns="0" rIns="0" tIns="0" bIns="0">
-            <a:spAutoFit/>
-          </a:bodyPr>
-          <a:lstStyle/>
-          <a:p>
-            <a:pPr algn="r"/>
-            <a:r>
-              <a:rPr sz="750" b="0" i="0">
-                <a:solidFill>
-                  <a:srgbClr val="6B6690"/>
-                </a:solidFill>
-                <a:latin typeface="Calibri"/>
-              </a:rPr>
               <a:t>S27  ·  34 / 35</a:t>
             </a:r>
           </a:p>
@@ -36424,7 +36717,7 @@
         <p:spPr>
           <a:xfrm>
             <a:off x="530352" y="676656"/>
-            <a:ext cx="10033711" cy="512064"/>
+            <a:ext cx="11130991" cy="512064"/>
           </a:xfrm>
           <a:prstGeom prst="rect">
             <a:avLst/>
@@ -36445,29 +36738,122 @@
                 </a:solidFill>
                 <a:latin typeface="Georgia"/>
               </a:rPr>
-              <a:t>The same two checks run wherever money moves</a:t>
-            </a:r>
-          </a:p>
-        </p:txBody>
-      </p:sp>
-      <p:sp>
-        <p:nvSpPr>
-          <p:cNvPr id="8" name="Rounded Rectangle 7"/>
+              <a:t>Tomorrow asks whether -35.0 percent is real or chance</a:t>
+            </a:r>
+          </a:p>
+        </p:txBody>
+      </p:sp>
+      <p:sp>
+        <p:nvSpPr>
+          <p:cNvPr id="8" name="TextBox 7"/>
+          <p:cNvSpPr txBox="1"/>
+          <p:nvPr/>
+        </p:nvSpPr>
+        <p:spPr>
+          <a:xfrm>
+            <a:off x="530352" y="1243584"/>
+            <a:ext cx="11130991" cy="234696"/>
+          </a:xfrm>
+          <a:prstGeom prst="rect">
+            <a:avLst/>
+          </a:prstGeom>
+          <a:noFill/>
+        </p:spPr>
+        <p:txBody>
+          <a:bodyPr wrap="square" anchor="t" lIns="0" rIns="0" tIns="0" bIns="0">
+            <a:spAutoFit/>
+          </a:bodyPr>
+          <a:lstStyle/>
+          <a:p>
+            <a:pPr algn="l"/>
+            <a:r>
+              <a:rPr sz="1200" b="0" i="0">
+                <a:solidFill>
+                  <a:srgbClr val="6B6690"/>
+                </a:solidFill>
+                <a:latin typeface="Calibri"/>
+              </a:rPr>
+              <a:t>The Retail-Plus fall survived cleaning: is it real, or the wobble every quarter shows?</a:t>
+            </a:r>
+          </a:p>
+        </p:txBody>
+      </p:sp>
+      <p:sp>
+        <p:nvSpPr>
+          <p:cNvPr id="9" name="Rounded Rectangle 8"/>
           <p:cNvSpPr/>
           <p:nvPr/>
         </p:nvSpPr>
         <p:spPr>
           <a:xfrm>
-            <a:off x="10701223" y="822960"/>
-            <a:ext cx="960120" cy="256032"/>
+            <a:off x="530352" y="1956816"/>
+            <a:ext cx="11130991" cy="1121664"/>
           </a:xfrm>
           <a:prstGeom prst="roundRect">
             <a:avLst>
-              <a:gd name="adj" fmla="val 50000"/>
+              <a:gd name="adj" fmla="val 5000"/>
             </a:avLst>
           </a:prstGeom>
+          <a:gradFill rotWithShape="1">
+            <a:gsLst>
+              <a:gs pos="0">
+                <a:srgbClr val="2C1A86"/>
+              </a:gs>
+              <a:gs pos="100000">
+                <a:srgbClr val="1A0F5C"/>
+              </a:gs>
+            </a:gsLst>
+            <a:lin scaled="0" ang="16200000"/>
+          </a:gradFill>
+          <a:ln>
+            <a:noFill/>
+          </a:ln>
+          <a:effectLst>
+            <a:outerShdw blurRad="76200" dist="19050" dir="5400000" algn="bl" rotWithShape="0">
+              <a:srgbClr val="1A0F5C">
+                <a:alpha val="12000"/>
+              </a:srgbClr>
+            </a:outerShdw>
+          </a:effectLst>
+        </p:spPr>
+        <p:style>
+          <a:lnRef idx="1">
+            <a:schemeClr val="accent1"/>
+          </a:lnRef>
+          <a:fillRef idx="3">
+            <a:schemeClr val="accent1"/>
+          </a:fillRef>
+          <a:effectRef idx="2">
+            <a:schemeClr val="accent1"/>
+          </a:effectRef>
+          <a:fontRef idx="minor">
+            <a:schemeClr val="lt1"/>
+          </a:fontRef>
+        </p:style>
+        <p:txBody>
+          <a:bodyPr rtlCol="0" anchor="ctr" wrap="square"/>
+          <a:lstStyle/>
+          <a:p>
+            <a:pPr algn="ctr"/>
+          </a:p>
+        </p:txBody>
+      </p:sp>
+      <p:sp>
+        <p:nvSpPr>
+          <p:cNvPr id="10" name="Oval 9"/>
+          <p:cNvSpPr/>
+          <p:nvPr/>
+        </p:nvSpPr>
+        <p:spPr>
+          <a:xfrm>
+            <a:off x="758952" y="2289048"/>
+            <a:ext cx="457200" cy="457200"/>
+          </a:xfrm>
+          <a:prstGeom prst="ellipse">
+            <a:avLst/>
+          </a:prstGeom>
           <a:solidFill>
-            <a:srgbClr val="1A0F5C"/>
+            <a:srgbClr val="5B3FD6"/>
           </a:solidFill>
           <a:ln>
             <a:noFill/>
@@ -36489,359 +36875,133 @@
           </a:fontRef>
         </p:style>
         <p:txBody>
-          <a:bodyPr rtlCol="0" anchor="ctr" wrap="none" lIns="25400" rIns="25400" tIns="0" bIns="0"/>
+          <a:bodyPr rtlCol="0" anchor="ctr" wrap="square"/>
           <a:lstStyle/>
           <a:p>
             <a:pPr algn="ctr"/>
-            <a:r>
-              <a:rPr sz="800" b="1" spc="200">
+          </a:p>
+        </p:txBody>
+      </p:sp>
+      <p:pic>
+        <p:nvPicPr>
+          <p:cNvPr id="11" name="Picture 10" descr="message-square_028dbd132a0a.png"/>
+          <p:cNvPicPr>
+            <a:picLocks noChangeAspect="1"/>
+          </p:cNvPicPr>
+          <p:nvPr/>
+        </p:nvPicPr>
+        <p:blipFill>
+          <a:blip r:embed="rId4"/>
+          <a:stretch>
+            <a:fillRect/>
+          </a:stretch>
+        </p:blipFill>
+        <p:spPr>
+          <a:xfrm>
+            <a:off x="868680" y="2398776"/>
+            <a:ext cx="237744" cy="237744"/>
+          </a:xfrm>
+          <a:prstGeom prst="rect">
+            <a:avLst/>
+          </a:prstGeom>
+        </p:spPr>
+      </p:pic>
+      <p:sp>
+        <p:nvSpPr>
+          <p:cNvPr id="12" name="TextBox 11"/>
+          <p:cNvSpPr txBox="1"/>
+          <p:nvPr/>
+        </p:nvSpPr>
+        <p:spPr>
+          <a:xfrm>
+            <a:off x="1399031" y="2103120"/>
+            <a:ext cx="9987991" cy="160401"/>
+          </a:xfrm>
+          <a:prstGeom prst="rect">
+            <a:avLst/>
+          </a:prstGeom>
+          <a:noFill/>
+        </p:spPr>
+        <p:txBody>
+          <a:bodyPr wrap="square" anchor="t" lIns="0" rIns="0" tIns="0" bIns="0">
+            <a:spAutoFit/>
+          </a:bodyPr>
+          <a:lstStyle/>
+          <a:p>
+            <a:pPr algn="l"/>
+            <a:r>
+              <a:rPr sz="750" b="1" i="0" spc="250">
+                <a:solidFill>
+                  <a:srgbClr val="D9A7FF"/>
+                </a:solidFill>
+                <a:latin typeface="Calibri"/>
+              </a:rPr>
+              <a:t>THE CLIENT ASKS</a:t>
+            </a:r>
+          </a:p>
+        </p:txBody>
+      </p:sp>
+      <p:sp>
+        <p:nvSpPr>
+          <p:cNvPr id="13" name="TextBox 12"/>
+          <p:cNvSpPr txBox="1"/>
+          <p:nvPr/>
+        </p:nvSpPr>
+        <p:spPr>
+          <a:xfrm>
+            <a:off x="1399031" y="2322576"/>
+            <a:ext cx="9987991" cy="682752"/>
+          </a:xfrm>
+          <a:prstGeom prst="rect">
+            <a:avLst/>
+          </a:prstGeom>
+          <a:noFill/>
+        </p:spPr>
+        <p:txBody>
+          <a:bodyPr wrap="square" anchor="t" lIns="0" rIns="0" tIns="0" bIns="0">
+            <a:spAutoFit/>
+          </a:bodyPr>
+          <a:lstStyle/>
+          <a:p>
+            <a:r>
+              <a:rPr sz="1500" b="0" i="0">
                 <a:solidFill>
                   <a:srgbClr val="FFFFFF"/>
                 </a:solidFill>
                 <a:latin typeface="Calibri"/>
               </a:rPr>
-              <a:t>DEPTH</a:t>
-            </a:r>
-          </a:p>
-        </p:txBody>
-      </p:sp>
-      <p:sp>
-        <p:nvSpPr>
-          <p:cNvPr id="9" name="TextBox 8"/>
-          <p:cNvSpPr txBox="1"/>
-          <p:nvPr/>
-        </p:nvSpPr>
-        <p:spPr>
-          <a:xfrm>
-            <a:off x="530352" y="1243584"/>
-            <a:ext cx="11130991" cy="234696"/>
-          </a:xfrm>
-          <a:prstGeom prst="rect">
-            <a:avLst/>
-          </a:prstGeom>
-          <a:noFill/>
-        </p:spPr>
-        <p:txBody>
-          <a:bodyPr wrap="square" anchor="t" lIns="0" rIns="0" tIns="0" bIns="0">
-            <a:spAutoFit/>
-          </a:bodyPr>
-          <a:lstStyle/>
-          <a:p>
-            <a:pPr algn="l"/>
-            <a:r>
-              <a:rPr sz="1200" b="0" i="0">
-                <a:solidFill>
-                  <a:srgbClr val="6B6690"/>
-                </a:solidFill>
-                <a:latin typeface="Calibri"/>
-              </a:rPr>
-              <a:t>Where else do rows and money get reconciled?</a:t>
-            </a:r>
-          </a:p>
-        </p:txBody>
-      </p:sp>
-      <p:graphicFrame>
-        <p:nvGraphicFramePr>
-          <p:cNvPr id="10" name="Table 9"/>
-          <p:cNvGraphicFramePr>
-            <a:graphicFrameLocks noGrp="1"/>
-          </p:cNvGraphicFramePr>
-          <p:nvPr/>
-        </p:nvGraphicFramePr>
-        <p:xfrm>
-          <a:off x="530352" y="1956816"/>
-          <a:ext cx="11130989" cy="1479296"/>
-        </p:xfrm>
-        <a:graphic>
-          <a:graphicData uri="http://schemas.openxmlformats.org/drawingml/2006/table">
-            <a:tbl>
-              <a:tblPr firstRow="0" bandRow="0">
-                <a:tableStyleId>{2D5ABB26-0587-4C30-8999-92F81FD0307C}</a:tableStyleId>
-              </a:tblPr>
-              <a:tblGrid>
-                <a:gridCol w="4571642"/>
-                <a:gridCol w="3021280"/>
-                <a:gridCol w="3538067"/>
-              </a:tblGrid>
-              <a:tr h="369824">
-                <a:tc>
-                  <a:txBody>
-                    <a:bodyPr/>
-                    <a:lstStyle/>
-                    <a:p>
-                      <a:r>
-                        <a:rPr sz="1450" b="1" i="0">
-                          <a:solidFill>
-                            <a:srgbClr val="FFFFFF"/>
-                          </a:solidFill>
-                          <a:latin typeface="Calibri"/>
-                        </a:rPr>
-                        <a:t>Where</a:t>
-                      </a:r>
-                    </a:p>
-                  </a:txBody>
-                  <a:tcPr marL="101600" marR="101600" marT="38100" marB="38100" anchor="ctr">
-                    <a:solidFill>
-                      <a:srgbClr val="1A0F5C"/>
-                    </a:solidFill>
-                  </a:tcPr>
-                </a:tc>
-                <a:tc>
-                  <a:txBody>
-                    <a:bodyPr/>
-                    <a:lstStyle/>
-                    <a:p>
-                      <a:r>
-                        <a:rPr sz="1450" b="1" i="0">
-                          <a:solidFill>
-                            <a:srgbClr val="FFFFFF"/>
-                          </a:solidFill>
-                          <a:latin typeface="Calibri"/>
-                        </a:rPr>
-                        <a:t>Rows</a:t>
-                      </a:r>
-                    </a:p>
-                  </a:txBody>
-                  <a:tcPr marL="101600" marR="101600" marT="38100" marB="38100" anchor="ctr">
-                    <a:solidFill>
-                      <a:srgbClr val="1A0F5C"/>
-                    </a:solidFill>
-                  </a:tcPr>
-                </a:tc>
-                <a:tc>
-                  <a:txBody>
-                    <a:bodyPr/>
-                    <a:lstStyle/>
-                    <a:p>
-                      <a:r>
-                        <a:rPr sz="1450" b="1" i="0">
-                          <a:solidFill>
-                            <a:srgbClr val="FFFFFF"/>
-                          </a:solidFill>
-                          <a:latin typeface="Calibri"/>
-                        </a:rPr>
-                        <a:t>Money</a:t>
-                      </a:r>
-                    </a:p>
-                  </a:txBody>
-                  <a:tcPr marL="101600" marR="101600" marT="38100" marB="38100" anchor="ctr">
-                    <a:solidFill>
-                      <a:srgbClr val="1A0F5C"/>
-                    </a:solidFill>
-                  </a:tcPr>
-                </a:tc>
-              </a:tr>
-              <a:tr h="369824">
-                <a:tc>
-                  <a:txBody>
-                    <a:bodyPr/>
-                    <a:lstStyle/>
-                    <a:p>
-                      <a:r>
-                        <a:rPr sz="1400" b="0" i="0">
-                          <a:solidFill>
-                            <a:srgbClr val="1A1440"/>
-                          </a:solidFill>
-                          <a:latin typeface="Calibri"/>
-                        </a:rPr>
-                        <a:t>Bank statement against the ledger</a:t>
-                      </a:r>
-                    </a:p>
-                  </a:txBody>
-                  <a:tcPr marL="101600" marR="101600" marT="38100" marB="38100" anchor="ctr">
-                    <a:solidFill>
-                      <a:srgbClr val="FFFFFF"/>
-                    </a:solidFill>
-                  </a:tcPr>
-                </a:tc>
-                <a:tc>
-                  <a:txBody>
-                    <a:bodyPr/>
-                    <a:lstStyle/>
-                    <a:p>
-                      <a:r>
-                        <a:rPr sz="1400" b="0" i="0">
-                          <a:solidFill>
-                            <a:srgbClr val="1A1440"/>
-                          </a:solidFill>
-                          <a:latin typeface="Calibri"/>
-                        </a:rPr>
-                        <a:t>Transactions matched</a:t>
-                      </a:r>
-                    </a:p>
-                  </a:txBody>
-                  <a:tcPr marL="101600" marR="101600" marT="38100" marB="38100" anchor="ctr">
-                    <a:solidFill>
-                      <a:srgbClr val="FFFFFF"/>
-                    </a:solidFill>
-                  </a:tcPr>
-                </a:tc>
-                <a:tc>
-                  <a:txBody>
-                    <a:bodyPr/>
-                    <a:lstStyle/>
-                    <a:p>
-                      <a:r>
-                        <a:rPr sz="1400" b="0" i="0">
-                          <a:solidFill>
-                            <a:srgbClr val="1A1440"/>
-                          </a:solidFill>
-                          <a:latin typeface="Calibri"/>
-                        </a:rPr>
-                        <a:t>Balance to the paisa</a:t>
-                      </a:r>
-                    </a:p>
-                  </a:txBody>
-                  <a:tcPr marL="101600" marR="101600" marT="38100" marB="38100" anchor="ctr">
-                    <a:solidFill>
-                      <a:srgbClr val="FFFFFF"/>
-                    </a:solidFill>
-                  </a:tcPr>
-                </a:tc>
-              </a:tr>
-              <a:tr h="369824">
-                <a:tc>
-                  <a:txBody>
-                    <a:bodyPr/>
-                    <a:lstStyle/>
-                    <a:p>
-                      <a:r>
-                        <a:rPr sz="1400" b="0" i="0">
-                          <a:solidFill>
-                            <a:srgbClr val="1A1440"/>
-                          </a:solidFill>
-                          <a:latin typeface="Calibri"/>
-                        </a:rPr>
-                        <a:t>Payment gateway against orders</a:t>
-                      </a:r>
-                    </a:p>
-                  </a:txBody>
-                  <a:tcPr marL="101600" marR="101600" marT="38100" marB="38100" anchor="ctr">
-                    <a:solidFill>
-                      <a:srgbClr val="F4F2FA"/>
-                    </a:solidFill>
-                  </a:tcPr>
-                </a:tc>
-                <a:tc>
-                  <a:txBody>
-                    <a:bodyPr/>
-                    <a:lstStyle/>
-                    <a:p>
-                      <a:r>
-                        <a:rPr sz="1400" b="0" i="0">
-                          <a:solidFill>
-                            <a:srgbClr val="1A1440"/>
-                          </a:solidFill>
-                          <a:latin typeface="Calibri"/>
-                        </a:rPr>
-                        <a:t>Settlements per order</a:t>
-                      </a:r>
-                    </a:p>
-                  </a:txBody>
-                  <a:tcPr marL="101600" marR="101600" marT="38100" marB="38100" anchor="ctr">
-                    <a:solidFill>
-                      <a:srgbClr val="F4F2FA"/>
-                    </a:solidFill>
-                  </a:tcPr>
-                </a:tc>
-                <a:tc>
-                  <a:txBody>
-                    <a:bodyPr/>
-                    <a:lstStyle/>
-                    <a:p>
-                      <a:r>
-                        <a:rPr sz="1400" b="0" i="0">
-                          <a:solidFill>
-                            <a:srgbClr val="1A1440"/>
-                          </a:solidFill>
-                          <a:latin typeface="Calibri"/>
-                        </a:rPr>
-                        <a:t>Collected against booked</a:t>
-                      </a:r>
-                    </a:p>
-                  </a:txBody>
-                  <a:tcPr marL="101600" marR="101600" marT="38100" marB="38100" anchor="ctr">
-                    <a:solidFill>
-                      <a:srgbClr val="F4F2FA"/>
-                    </a:solidFill>
-                  </a:tcPr>
-                </a:tc>
-              </a:tr>
-              <a:tr h="369824">
-                <a:tc>
-                  <a:txBody>
-                    <a:bodyPr/>
-                    <a:lstStyle/>
-                    <a:p>
-                      <a:r>
-                        <a:rPr sz="1400" b="0" i="0">
-                          <a:solidFill>
-                            <a:srgbClr val="1A1440"/>
-                          </a:solidFill>
-                          <a:latin typeface="Calibri"/>
-                        </a:rPr>
-                        <a:t>Warehouse load against the source</a:t>
-                      </a:r>
-                    </a:p>
-                  </a:txBody>
-                  <a:tcPr marL="101600" marR="101600" marT="38100" marB="38100" anchor="ctr">
-                    <a:solidFill>
-                      <a:srgbClr val="FFFFFF"/>
-                    </a:solidFill>
-                  </a:tcPr>
-                </a:tc>
-                <a:tc>
-                  <a:txBody>
-                    <a:bodyPr/>
-                    <a:lstStyle/>
-                    <a:p>
-                      <a:r>
-                        <a:rPr sz="1400" b="0" i="0">
-                          <a:solidFill>
-                            <a:srgbClr val="1A1440"/>
-                          </a:solidFill>
-                          <a:latin typeface="Calibri"/>
-                        </a:rPr>
-                        <a:t>Row counts per table</a:t>
-                      </a:r>
-                    </a:p>
-                  </a:txBody>
-                  <a:tcPr marL="101600" marR="101600" marT="38100" marB="38100" anchor="ctr">
-                    <a:solidFill>
-                      <a:srgbClr val="FFFFFF"/>
-                    </a:solidFill>
-                  </a:tcPr>
-                </a:tc>
-                <a:tc>
-                  <a:txBody>
-                    <a:bodyPr/>
-                    <a:lstStyle/>
-                    <a:p>
-                      <a:r>
-                        <a:rPr sz="1400" b="0" i="0">
-                          <a:solidFill>
-                            <a:srgbClr val="1A1440"/>
-                          </a:solidFill>
-                          <a:latin typeface="Calibri"/>
-                        </a:rPr>
-                        <a:t>Control totals per column</a:t>
-                      </a:r>
-                    </a:p>
-                  </a:txBody>
-                  <a:tcPr marL="101600" marR="101600" marT="38100" marB="38100" anchor="ctr">
-                    <a:solidFill>
-                      <a:srgbClr val="FFFFFF"/>
-                    </a:solidFill>
-                  </a:tcPr>
-                </a:tc>
-              </a:tr>
-            </a:tbl>
-          </a:graphicData>
-        </a:graphic>
-      </p:graphicFrame>
-      <p:sp>
-        <p:nvSpPr>
-          <p:cNvPr id="11" name="Oval 10"/>
+              <a:t>"Retail-Plus is down, smaller than first reported. Real, or the wobble we see every quarter?" Meera Raghavan, CEO, Kalpa Retail</a:t>
+            </a:r>
+          </a:p>
+        </p:txBody>
+      </p:sp>
+      <p:pic>
+        <p:nvPicPr>
+          <p:cNvPr id="14" name="mermaid diagram" descr="ca5d5c77445b5892.png"/>
+          <p:cNvPicPr>
+            <a:picLocks noChangeAspect="1"/>
+          </p:cNvPicPr>
+          <p:nvPr/>
+        </p:nvPicPr>
+        <p:blipFill>
+          <a:blip r:embed="rId6"/>
+          <a:stretch>
+            <a:fillRect/>
+          </a:stretch>
+        </p:blipFill>
+        <p:spPr>
+          <a:xfrm>
+            <a:off x="3424085" y="3243072"/>
+            <a:ext cx="5343525" cy="2586037"/>
+          </a:xfrm>
+          <a:prstGeom prst="rect">
+            <a:avLst/>
+          </a:prstGeom>
+        </p:spPr>
+      </p:pic>
+      <p:sp>
+        <p:nvSpPr>
+          <p:cNvPr id="15" name="Oval 14"/>
           <p:cNvSpPr/>
           <p:nvPr/>
         </p:nvSpPr>
@@ -36885,7 +37045,7 @@
       </p:sp>
       <p:sp>
         <p:nvSpPr>
-          <p:cNvPr id="12" name="TextBox 11"/>
+          <p:cNvPr id="16" name="TextBox 15"/>
           <p:cNvSpPr txBox="1"/>
           <p:nvPr/>
         </p:nvSpPr>
@@ -36920,7 +37080,7 @@
       </p:sp>
       <p:sp>
         <p:nvSpPr>
-          <p:cNvPr id="13" name="Oval 12"/>
+          <p:cNvPr id="17" name="Oval 16"/>
           <p:cNvSpPr/>
           <p:nvPr/>
         </p:nvSpPr>
@@ -36964,7 +37124,7 @@
       </p:sp>
       <p:sp>
         <p:nvSpPr>
-          <p:cNvPr id="14" name="TextBox 13"/>
+          <p:cNvPr id="18" name="TextBox 17"/>
           <p:cNvSpPr txBox="1"/>
           <p:nvPr/>
         </p:nvSpPr>
@@ -36999,7 +37159,7 @@
       </p:sp>
       <p:sp>
         <p:nvSpPr>
-          <p:cNvPr id="15" name="Oval 14"/>
+          <p:cNvPr id="19" name="Oval 18"/>
           <p:cNvSpPr/>
           <p:nvPr/>
         </p:nvSpPr>
@@ -37043,7 +37203,7 @@
       </p:sp>
       <p:sp>
         <p:nvSpPr>
-          <p:cNvPr id="16" name="TextBox 15"/>
+          <p:cNvPr id="20" name="TextBox 19"/>
           <p:cNvSpPr txBox="1"/>
           <p:nvPr/>
         </p:nvSpPr>
@@ -37078,7 +37238,7 @@
       </p:sp>
       <p:sp>
         <p:nvSpPr>
-          <p:cNvPr id="17" name="Oval 16"/>
+          <p:cNvPr id="21" name="Oval 20"/>
           <p:cNvSpPr/>
           <p:nvPr/>
         </p:nvSpPr>
@@ -37122,7 +37282,7 @@
       </p:sp>
       <p:sp>
         <p:nvSpPr>
-          <p:cNvPr id="18" name="TextBox 17"/>
+          <p:cNvPr id="22" name="TextBox 21"/>
           <p:cNvSpPr txBox="1"/>
           <p:nvPr/>
         </p:nvSpPr>
@@ -37157,7 +37317,7 @@
       </p:sp>
       <p:sp>
         <p:nvSpPr>
-          <p:cNvPr id="19" name="Oval 18"/>
+          <p:cNvPr id="23" name="Oval 22"/>
           <p:cNvSpPr/>
           <p:nvPr/>
         </p:nvSpPr>
@@ -37201,7 +37361,7 @@
       </p:sp>
       <p:sp>
         <p:nvSpPr>
-          <p:cNvPr id="20" name="TextBox 19"/>
+          <p:cNvPr id="24" name="TextBox 23"/>
           <p:cNvSpPr txBox="1"/>
           <p:nvPr/>
         </p:nvSpPr>
@@ -37236,7 +37396,7 @@
       </p:sp>
       <p:sp>
         <p:nvSpPr>
-          <p:cNvPr id="21" name="Oval 20"/>
+          <p:cNvPr id="25" name="Oval 24"/>
           <p:cNvSpPr/>
           <p:nvPr/>
         </p:nvSpPr>
@@ -37280,7 +37440,7 @@
       </p:sp>
       <p:sp>
         <p:nvSpPr>
-          <p:cNvPr id="22" name="TextBox 21"/>
+          <p:cNvPr id="26" name="TextBox 25"/>
           <p:cNvSpPr txBox="1"/>
           <p:nvPr/>
         </p:nvSpPr>
@@ -37315,7 +37475,7 @@
       </p:sp>
       <p:sp>
         <p:nvSpPr>
-          <p:cNvPr id="23" name="TextBox 22"/>
+          <p:cNvPr id="27" name="TextBox 26"/>
           <p:cNvSpPr txBox="1"/>
           <p:nvPr/>
         </p:nvSpPr>
@@ -37343,7 +37503,7 @@
                 </a:solidFill>
                 <a:latin typeface="Calibri"/>
               </a:rPr>
-              <a:t>D28  ·  35 / 35</a:t>
+              <a:t>S28  ·  35 / 35</a:t>
             </a:r>
           </a:p>
         </p:txBody>

--- a/content/W01/D3/slides/C2_W01_D03_half2_STUDENT.pptx
+++ b/content/W01/D3/slides/C2_W01_D03_half2_STUDENT.pptx
@@ -1231,12 +1231,12 @@
           <a:lstStyle/>
           <a:p>
             <a:r>
-              <a:t>LIVE. Fifty minutes unguided. The notebook is ex1_escalated_case, a TODO twin with nine lettered</a:t>
-            </a:r>
-          </a:p>
-          <a:p>
-            <a:r>
-              <a:t>choices; the brief with its ten items is in exercises/unguided.</a:t>
+              <a:t>LIVE. Fifty minutes unguided. The notebook is ex1_escalated_case, with a blank to fill at each step</a:t>
+            </a:r>
+          </a:p>
+          <a:p>
+            <a:r>
+              <a:t>and nine lettered choices in all; the brief with its ten items is in exercises/unguided.</a:t>
             </a:r>
           </a:p>
         </p:txBody>
@@ -1306,17 +1306,22 @@
           <a:lstStyle/>
           <a:p>
             <a:r>
-              <a:t>LIVE, 3 minutes. Nine notebook letters, ten brief letters, then the note in under 120 words. Watch</a:t>
-            </a:r>
-          </a:p>
-          <a:p>
-            <a:r>
-              <a:t>for rows totalled before profiling, a first-copy rule, a rupee test that rounds, and a tree whose</a:t>
-            </a:r>
-          </a:p>
-          <a:p>
-            <a:r>
-              <a:t>customers are rows. Then the checks.</a:t>
+              <a:t>LIVE, 3 minutes. Monday's revenue tree is revenue = customers x orders per customer x revenue per</a:t>
+            </a:r>
+          </a:p>
+          <a:p>
+            <a:r>
+              <a:t>order, each branch read as Q2's multiple of Q1. Nine notebook letters, ten brief letters, then the</a:t>
+            </a:r>
+          </a:p>
+          <a:p>
+            <a:r>
+              <a:t>note in under 120 words. Watch for rows totalled before profiling, a first-copy rule, a rupee test</a:t>
+            </a:r>
+          </a:p>
+          <a:p>
+            <a:r>
+              <a:t>that rounds, and a tree whose customers are rows. Then the checks.</a:t>
             </a:r>
           </a:p>
         </p:txBody>
@@ -1401,17 +1406,22 @@
           </a:p>
           <a:p>
             <a:r>
-              <a:t>Kalpa's paid membership tier; the Business segment is Kalpa's sales to companies; and the bulk order</a:t>
-            </a:r>
-          </a:p>
-          <a:p>
-            <a:r>
-              <a:t>is Q2's largest, a real Business order at Rs 29,45,460, kept and flagged. Everything on this slide was proved this morning, and the afternoon deck</a:t>
-            </a:r>
-          </a:p>
-          <a:p>
-            <a:r>
-              <a:t>restates it so it stands alone. What is left is the analyst's question. Then chapter 6.</a:t>
+              <a:t>Kalpa's paid membership tier; the Business segment is Kalpa's sales to companies; a twin is the</a:t>
+            </a:r>
+          </a:p>
+          <a:p>
+            <a:r>
+              <a:t>other copy of the same order; and the bulk order is Q2's largest, a real Business order at Rs</a:t>
+            </a:r>
+          </a:p>
+          <a:p>
+            <a:r>
+              <a:t>29,45,460, kept and flagged. Everything on this slide was proved this morning. What is left is the</a:t>
+            </a:r>
+          </a:p>
+          <a:p>
+            <a:r>
+              <a:t>analyst's question. Then chapter 6.</a:t>
             </a:r>
           </a:p>
         </p:txBody>
@@ -1481,17 +1491,17 @@
           <a:lstStyle/>
           <a:p>
             <a:r>
-              <a:t>SELF-STUDY, reference while working. Each check recomputes its step another way, so the numbers are</a:t>
-            </a:r>
-          </a:p>
-          <a:p>
-            <a:r>
-              <a:t>the learner's to reach. A Q1 Rs 1,790 short kept the wrong copy; a Q2 Rs 29,45,460 light removed</a:t>
-            </a:r>
-          </a:p>
-          <a:p>
-            <a:r>
-              <a:t>the bulk order. Both are debriefed next.</a:t>
+              <a:t>SELF-STUDY, 2 minutes, a reference while working. Each check recomputes its step another way, so the</a:t>
+            </a:r>
+          </a:p>
+          <a:p>
+            <a:r>
+              <a:t>numbers are the learner's to reach. A Q1 Rs 1,790 short kept the wrong copy; a Q2 Rs 29,45,460 light</a:t>
+            </a:r>
+          </a:p>
+          <a:p>
+            <a:r>
+              <a:t>removed the bulk order. Both are debriefed next.</a:t>
             </a:r>
           </a:p>
         </p:txBody>
@@ -1561,7 +1571,12 @@
           <a:lstStyle/>
           <a:p>
             <a:r>
-              <a:t>LIVE. Put the most common wrong number on the screen first. Name no learner; name the step.</a:t>
+              <a:t>LIVE. Fifteen minutes. Put the most common wrong number on the screen first. Name no learner; name</a:t>
+            </a:r>
+          </a:p>
+          <a:p>
+            <a:r>
+              <a:t>the step.</a:t>
             </a:r>
           </a:p>
         </p:txBody>
@@ -2306,7 +2321,7 @@
           </a:p>
           <a:p>
             <a:r>
-              <a:t>The row's five and these seven are the day's 12, the same 12 the study notes answer. Then the</a:t>
+              <a:t>These five and the seven follow-ups are the day's 12, the same 12 the study notes answer. Then the</a:t>
             </a:r>
           </a:p>
           <a:p>
@@ -2816,12 +2831,7 @@
           </a:p>
           <a:p>
             <a:r>
-              <a:t>left has to trace to a rule. A log that ties in rows and misses in rupees costs the team her trust</a:t>
-            </a:r>
-          </a:p>
-          <a:p>
-            <a:r>
-              <a:t>in everything else it sends. Then an auditor who could not trace a number.</a:t>
+              <a:t>left has to trace to a rule. Then an auditor who could not trace a number.</a:t>
             </a:r>
           </a:p>
         </p:txBody>
@@ -11466,7 +11476,7 @@
                 </a:solidFill>
                 <a:latin typeface="Calibri"/>
               </a:rPr>
-              <a:t>The books against the clean Q1, and a rejected order whose twin sits in the set-aside log with a value.</a:t>
+              <a:t>Compare the clean Q1 with the books, and look for a rejected order whose twin sits in the set-aside log with a value.</a:t>
             </a:r>
           </a:p>
         </p:txBody>
@@ -18209,7 +18219,7 @@
                 </a:solidFill>
                 <a:latin typeface="Georgia"/>
               </a:rPr>
-              <a:t>Answer it in five parts, with a log by tonight</a:t>
+              <a:t>Answer: Anand needs five answers and a log tonight</a:t>
             </a:r>
           </a:p>
         </p:txBody>
@@ -19506,7 +19516,7 @@
                 </a:solidFill>
                 <a:latin typeface="Calibri"/>
               </a:rPr>
-              <a:t>"Which figure is right, the proof in rows and in rupees, and every decision in a log my analyst can follow."</a:t>
+              <a:t>"Tell me which figure is right, with the proof in rows and in rupees and every decision in a log my analyst can follow."</a:t>
             </a:r>
           </a:p>
         </p:txBody>
@@ -21407,605 +21417,265 @@
           </a:p>
         </p:txBody>
       </p:sp>
-      <p:sp>
-        <p:nvSpPr>
-          <p:cNvPr id="10" name="TextBox 9"/>
-          <p:cNvSpPr txBox="1"/>
-          <p:nvPr/>
-        </p:nvSpPr>
-        <p:spPr>
-          <a:xfrm>
-            <a:off x="530352" y="1956816"/>
-            <a:ext cx="2577007" cy="603250"/>
-          </a:xfrm>
-          <a:prstGeom prst="rect">
-            <a:avLst/>
-          </a:prstGeom>
-          <a:noFill/>
-        </p:spPr>
-        <p:txBody>
-          <a:bodyPr wrap="square" anchor="t" lIns="0" rIns="0" tIns="0" bIns="0">
-            <a:spAutoFit/>
-          </a:bodyPr>
-          <a:lstStyle/>
-          <a:p>
-            <a:pPr algn="l"/>
-            <a:r>
-              <a:rPr sz="3800" b="0" i="0">
-                <a:solidFill>
-                  <a:srgbClr val="5B3FD6"/>
-                </a:solidFill>
-                <a:latin typeface="Georgia"/>
-              </a:rPr>
-              <a:t>rows</a:t>
-            </a:r>
-          </a:p>
-        </p:txBody>
-      </p:sp>
-      <p:sp>
-        <p:nvSpPr>
-          <p:cNvPr id="11" name="TextBox 10"/>
-          <p:cNvSpPr txBox="1"/>
-          <p:nvPr/>
-        </p:nvSpPr>
-        <p:spPr>
-          <a:xfrm>
-            <a:off x="530352" y="2596642"/>
-            <a:ext cx="2577007" cy="168656"/>
-          </a:xfrm>
-          <a:prstGeom prst="rect">
-            <a:avLst/>
-          </a:prstGeom>
-          <a:noFill/>
-        </p:spPr>
-        <p:txBody>
-          <a:bodyPr wrap="square" anchor="t" lIns="0" rIns="0" tIns="0" bIns="0">
-            <a:spAutoFit/>
-          </a:bodyPr>
-          <a:lstStyle/>
-          <a:p>
-            <a:pPr algn="l"/>
-            <a:r>
-              <a:rPr sz="800" b="1" i="0" spc="250">
-                <a:solidFill>
-                  <a:srgbClr val="1A0F5C"/>
-                </a:solidFill>
-                <a:latin typeface="Calibri"/>
-              </a:rPr>
-              <a:t>KEPT PLUS SET ASIDE</a:t>
-            </a:r>
-          </a:p>
-        </p:txBody>
-      </p:sp>
-      <p:sp>
-        <p:nvSpPr>
-          <p:cNvPr id="12" name="TextBox 11"/>
-          <p:cNvSpPr txBox="1"/>
-          <p:nvPr/>
-        </p:nvSpPr>
-        <p:spPr>
-          <a:xfrm>
-            <a:off x="530352" y="2797810"/>
-            <a:ext cx="2577007" cy="193421"/>
-          </a:xfrm>
-          <a:prstGeom prst="rect">
-            <a:avLst/>
-          </a:prstGeom>
-          <a:noFill/>
-        </p:spPr>
-        <p:txBody>
-          <a:bodyPr wrap="square" anchor="t" lIns="0" rIns="0" tIns="0" bIns="0">
-            <a:spAutoFit/>
-          </a:bodyPr>
-          <a:lstStyle/>
-          <a:p>
-            <a:pPr algn="l"/>
-            <a:r>
-              <a:rPr sz="950" b="0" i="0">
-                <a:solidFill>
-                  <a:srgbClr val="6B6690"/>
-                </a:solidFill>
-                <a:latin typeface="Calibri"/>
-              </a:rPr>
-              <a:t>equal the rows the ERP sent</a:t>
-            </a:r>
-          </a:p>
-        </p:txBody>
-      </p:sp>
-      <p:sp>
-        <p:nvSpPr>
-          <p:cNvPr id="13" name="Rectangle 12"/>
-          <p:cNvSpPr/>
-          <p:nvPr/>
-        </p:nvSpPr>
-        <p:spPr>
-          <a:xfrm>
-            <a:off x="530352" y="3145536"/>
-            <a:ext cx="2577007" cy="10972"/>
-          </a:xfrm>
-          <a:prstGeom prst="rect">
-            <a:avLst/>
-          </a:prstGeom>
-          <a:solidFill>
-            <a:srgbClr val="E4E1F1"/>
-          </a:solidFill>
-          <a:ln>
-            <a:noFill/>
-          </a:ln>
-          <a:effectLst/>
-        </p:spPr>
-        <p:style>
-          <a:lnRef idx="1">
-            <a:schemeClr val="accent1"/>
-          </a:lnRef>
-          <a:fillRef idx="3">
-            <a:schemeClr val="accent1"/>
-          </a:fillRef>
-          <a:effectRef idx="2">
-            <a:schemeClr val="accent1"/>
-          </a:effectRef>
-          <a:fontRef idx="minor">
-            <a:schemeClr val="lt1"/>
-          </a:fontRef>
-        </p:style>
-        <p:txBody>
-          <a:bodyPr rtlCol="0" anchor="ctr" wrap="square"/>
-          <a:lstStyle/>
-          <a:p>
-            <a:pPr algn="ctr"/>
-          </a:p>
-        </p:txBody>
-      </p:sp>
-      <p:sp>
-        <p:nvSpPr>
-          <p:cNvPr id="14" name="TextBox 13"/>
-          <p:cNvSpPr txBox="1"/>
-          <p:nvPr/>
-        </p:nvSpPr>
-        <p:spPr>
-          <a:xfrm>
-            <a:off x="3381679" y="1956816"/>
-            <a:ext cx="2577007" cy="603250"/>
-          </a:xfrm>
-          <a:prstGeom prst="rect">
-            <a:avLst/>
-          </a:prstGeom>
-          <a:noFill/>
-        </p:spPr>
-        <p:txBody>
-          <a:bodyPr wrap="square" anchor="t" lIns="0" rIns="0" tIns="0" bIns="0">
-            <a:spAutoFit/>
-          </a:bodyPr>
-          <a:lstStyle/>
-          <a:p>
-            <a:pPr algn="l"/>
-            <a:r>
-              <a:rPr sz="3800" b="0" i="0">
-                <a:solidFill>
-                  <a:srgbClr val="5B3FD6"/>
-                </a:solidFill>
-                <a:latin typeface="Georgia"/>
-              </a:rPr>
-              <a:t>Q1</a:t>
-            </a:r>
-          </a:p>
-        </p:txBody>
-      </p:sp>
-      <p:sp>
-        <p:nvSpPr>
-          <p:cNvPr id="15" name="TextBox 14"/>
-          <p:cNvSpPr txBox="1"/>
-          <p:nvPr/>
-        </p:nvSpPr>
-        <p:spPr>
-          <a:xfrm>
-            <a:off x="3381679" y="2596642"/>
-            <a:ext cx="2577007" cy="168656"/>
-          </a:xfrm>
-          <a:prstGeom prst="rect">
-            <a:avLst/>
-          </a:prstGeom>
-          <a:noFill/>
-        </p:spPr>
-        <p:txBody>
-          <a:bodyPr wrap="square" anchor="t" lIns="0" rIns="0" tIns="0" bIns="0">
-            <a:spAutoFit/>
-          </a:bodyPr>
-          <a:lstStyle/>
-          <a:p>
-            <a:pPr algn="l"/>
-            <a:r>
-              <a:rPr sz="800" b="1" i="0" spc="250">
-                <a:solidFill>
-                  <a:srgbClr val="1A0F5C"/>
-                </a:solidFill>
-                <a:latin typeface="Calibri"/>
-              </a:rPr>
-              <a:t>TO THE RUPEE</a:t>
-            </a:r>
-          </a:p>
-        </p:txBody>
-      </p:sp>
-      <p:sp>
-        <p:nvSpPr>
-          <p:cNvPr id="16" name="TextBox 15"/>
-          <p:cNvSpPr txBox="1"/>
-          <p:nvPr/>
-        </p:nvSpPr>
-        <p:spPr>
-          <a:xfrm>
-            <a:off x="3381679" y="2797810"/>
-            <a:ext cx="2577007" cy="193421"/>
-          </a:xfrm>
-          <a:prstGeom prst="rect">
-            <a:avLst/>
-          </a:prstGeom>
-          <a:noFill/>
-        </p:spPr>
-        <p:txBody>
-          <a:bodyPr wrap="square" anchor="t" lIns="0" rIns="0" tIns="0" bIns="0">
-            <a:spAutoFit/>
-          </a:bodyPr>
-          <a:lstStyle/>
-          <a:p>
-            <a:pPr algn="l"/>
-            <a:r>
-              <a:rPr sz="950" b="0" i="0">
-                <a:solidFill>
-                  <a:srgbClr val="6B6690"/>
-                </a:solidFill>
-                <a:latin typeface="Calibri"/>
-              </a:rPr>
-              <a:t>equal to the books after the rule</a:t>
-            </a:r>
-          </a:p>
-        </p:txBody>
-      </p:sp>
-      <p:sp>
-        <p:nvSpPr>
-          <p:cNvPr id="17" name="Rectangle 16"/>
-          <p:cNvSpPr/>
-          <p:nvPr/>
-        </p:nvSpPr>
-        <p:spPr>
-          <a:xfrm>
-            <a:off x="3381679" y="3145536"/>
-            <a:ext cx="2577007" cy="10972"/>
-          </a:xfrm>
-          <a:prstGeom prst="rect">
-            <a:avLst/>
-          </a:prstGeom>
-          <a:solidFill>
-            <a:srgbClr val="E4E1F1"/>
-          </a:solidFill>
-          <a:ln>
-            <a:noFill/>
-          </a:ln>
-          <a:effectLst/>
-        </p:spPr>
-        <p:style>
-          <a:lnRef idx="1">
-            <a:schemeClr val="accent1"/>
-          </a:lnRef>
-          <a:fillRef idx="3">
-            <a:schemeClr val="accent1"/>
-          </a:fillRef>
-          <a:effectRef idx="2">
-            <a:schemeClr val="accent1"/>
-          </a:effectRef>
-          <a:fontRef idx="minor">
-            <a:schemeClr val="lt1"/>
-          </a:fontRef>
-        </p:style>
-        <p:txBody>
-          <a:bodyPr rtlCol="0" anchor="ctr" wrap="square"/>
-          <a:lstStyle/>
-          <a:p>
-            <a:pPr algn="ctr"/>
-          </a:p>
-        </p:txBody>
-      </p:sp>
-      <p:sp>
-        <p:nvSpPr>
-          <p:cNvPr id="18" name="TextBox 17"/>
-          <p:cNvSpPr txBox="1"/>
-          <p:nvPr/>
-        </p:nvSpPr>
-        <p:spPr>
-          <a:xfrm>
-            <a:off x="6233007" y="1956816"/>
-            <a:ext cx="2577007" cy="603250"/>
-          </a:xfrm>
-          <a:prstGeom prst="rect">
-            <a:avLst/>
-          </a:prstGeom>
-          <a:noFill/>
-        </p:spPr>
-        <p:txBody>
-          <a:bodyPr wrap="square" anchor="t" lIns="0" rIns="0" tIns="0" bIns="0">
-            <a:spAutoFit/>
-          </a:bodyPr>
-          <a:lstStyle/>
-          <a:p>
-            <a:pPr algn="l"/>
-            <a:r>
-              <a:rPr sz="3800" b="0" i="0">
-                <a:solidFill>
-                  <a:srgbClr val="5B3FD6"/>
-                </a:solidFill>
-                <a:latin typeface="Georgia"/>
-              </a:rPr>
-              <a:t>the test</a:t>
-            </a:r>
-          </a:p>
-        </p:txBody>
-      </p:sp>
-      <p:sp>
-        <p:nvSpPr>
-          <p:cNvPr id="19" name="TextBox 18"/>
-          <p:cNvSpPr txBox="1"/>
-          <p:nvPr/>
-        </p:nvSpPr>
-        <p:spPr>
-          <a:xfrm>
-            <a:off x="6233007" y="2596642"/>
-            <a:ext cx="2577007" cy="168656"/>
-          </a:xfrm>
-          <a:prstGeom prst="rect">
-            <a:avLst/>
-          </a:prstGeom>
-          <a:noFill/>
-        </p:spPr>
-        <p:txBody>
-          <a:bodyPr wrap="square" anchor="t" lIns="0" rIns="0" tIns="0" bIns="0">
-            <a:spAutoFit/>
-          </a:bodyPr>
-          <a:lstStyle/>
-          <a:p>
-            <a:pPr algn="l"/>
-            <a:r>
-              <a:rPr sz="800" b="1" i="0" spc="250">
-                <a:solidFill>
-                  <a:srgbClr val="1A0F5C"/>
-                </a:solidFill>
-                <a:latin typeface="Calibri"/>
-              </a:rPr>
-              <a:t>YOUR RUPEE TEST</a:t>
-            </a:r>
-          </a:p>
-        </p:txBody>
-      </p:sp>
-      <p:sp>
-        <p:nvSpPr>
-          <p:cNvPr id="20" name="TextBox 19"/>
-          <p:cNvSpPr txBox="1"/>
-          <p:nvPr/>
-        </p:nvSpPr>
-        <p:spPr>
-          <a:xfrm>
-            <a:off x="6233007" y="2797810"/>
-            <a:ext cx="2577007" cy="193421"/>
-          </a:xfrm>
-          <a:prstGeom prst="rect">
-            <a:avLst/>
-          </a:prstGeom>
-          <a:noFill/>
-        </p:spPr>
-        <p:txBody>
-          <a:bodyPr wrap="square" anchor="t" lIns="0" rIns="0" tIns="0" bIns="0">
-            <a:spAutoFit/>
-          </a:bodyPr>
-          <a:lstStyle/>
-          <a:p>
-            <a:pPr algn="l"/>
-            <a:r>
-              <a:rPr sz="950" b="0" i="0">
-                <a:solidFill>
-                  <a:srgbClr val="6B6690"/>
-                </a:solidFill>
-                <a:latin typeface="Calibri"/>
-              </a:rPr>
-              <a:t>passes yours, fails the colleague's</a:t>
-            </a:r>
-          </a:p>
-        </p:txBody>
-      </p:sp>
-      <p:sp>
-        <p:nvSpPr>
-          <p:cNvPr id="21" name="Rectangle 20"/>
-          <p:cNvSpPr/>
-          <p:nvPr/>
-        </p:nvSpPr>
-        <p:spPr>
-          <a:xfrm>
-            <a:off x="6233007" y="3145536"/>
-            <a:ext cx="2577007" cy="10972"/>
-          </a:xfrm>
-          <a:prstGeom prst="rect">
-            <a:avLst/>
-          </a:prstGeom>
-          <a:solidFill>
-            <a:srgbClr val="E4E1F1"/>
-          </a:solidFill>
-          <a:ln>
-            <a:noFill/>
-          </a:ln>
-          <a:effectLst/>
-        </p:spPr>
-        <p:style>
-          <a:lnRef idx="1">
-            <a:schemeClr val="accent1"/>
-          </a:lnRef>
-          <a:fillRef idx="3">
-            <a:schemeClr val="accent1"/>
-          </a:fillRef>
-          <a:effectRef idx="2">
-            <a:schemeClr val="accent1"/>
-          </a:effectRef>
-          <a:fontRef idx="minor">
-            <a:schemeClr val="lt1"/>
-          </a:fontRef>
-        </p:style>
-        <p:txBody>
-          <a:bodyPr rtlCol="0" anchor="ctr" wrap="square"/>
-          <a:lstStyle/>
-          <a:p>
-            <a:pPr algn="ctr"/>
-          </a:p>
-        </p:txBody>
-      </p:sp>
-      <p:sp>
-        <p:nvSpPr>
-          <p:cNvPr id="22" name="TextBox 21"/>
-          <p:cNvSpPr txBox="1"/>
-          <p:nvPr/>
-        </p:nvSpPr>
-        <p:spPr>
-          <a:xfrm>
-            <a:off x="9084335" y="1956816"/>
-            <a:ext cx="2577007" cy="603250"/>
-          </a:xfrm>
-          <a:prstGeom prst="rect">
-            <a:avLst/>
-          </a:prstGeom>
-          <a:noFill/>
-        </p:spPr>
-        <p:txBody>
-          <a:bodyPr wrap="square" anchor="t" lIns="0" rIns="0" tIns="0" bIns="0">
-            <a:spAutoFit/>
-          </a:bodyPr>
-          <a:lstStyle/>
-          <a:p>
-            <a:pPr algn="l"/>
-            <a:r>
-              <a:rPr sz="3800" b="0" i="0">
-                <a:solidFill>
-                  <a:srgbClr val="5B3FD6"/>
-                </a:solidFill>
-                <a:latin typeface="Georgia"/>
-              </a:rPr>
-              <a:t>the tree</a:t>
-            </a:r>
-          </a:p>
-        </p:txBody>
-      </p:sp>
-      <p:sp>
-        <p:nvSpPr>
-          <p:cNvPr id="23" name="TextBox 22"/>
-          <p:cNvSpPr txBox="1"/>
-          <p:nvPr/>
-        </p:nvSpPr>
-        <p:spPr>
-          <a:xfrm>
-            <a:off x="9084335" y="2596642"/>
-            <a:ext cx="2577007" cy="168656"/>
-          </a:xfrm>
-          <a:prstGeom prst="rect">
-            <a:avLst/>
-          </a:prstGeom>
-          <a:noFill/>
-        </p:spPr>
-        <p:txBody>
-          <a:bodyPr wrap="square" anchor="t" lIns="0" rIns="0" tIns="0" bIns="0">
-            <a:spAutoFit/>
-          </a:bodyPr>
-          <a:lstStyle/>
-          <a:p>
-            <a:pPr algn="l"/>
-            <a:r>
-              <a:rPr sz="800" b="1" i="0" spc="250">
-                <a:solidFill>
-                  <a:srgbClr val="1A0F5C"/>
-                </a:solidFill>
-                <a:latin typeface="Calibri"/>
-              </a:rPr>
-              <a:t>THREE BRANCHES</a:t>
-            </a:r>
-          </a:p>
-        </p:txBody>
-      </p:sp>
-      <p:sp>
-        <p:nvSpPr>
-          <p:cNvPr id="24" name="TextBox 23"/>
-          <p:cNvSpPr txBox="1"/>
-          <p:nvPr/>
-        </p:nvSpPr>
-        <p:spPr>
-          <a:xfrm>
-            <a:off x="9084335" y="2797810"/>
-            <a:ext cx="2577007" cy="193421"/>
-          </a:xfrm>
-          <a:prstGeom prst="rect">
-            <a:avLst/>
-          </a:prstGeom>
-          <a:noFill/>
-        </p:spPr>
-        <p:txBody>
-          <a:bodyPr wrap="square" anchor="t" lIns="0" rIns="0" tIns="0" bIns="0">
-            <a:spAutoFit/>
-          </a:bodyPr>
-          <a:lstStyle/>
-          <a:p>
-            <a:pPr algn="l"/>
-            <a:r>
-              <a:rPr sz="950" b="0" i="0">
-                <a:solidFill>
-                  <a:srgbClr val="6B6690"/>
-                </a:solidFill>
-                <a:latin typeface="Calibri"/>
-              </a:rPr>
-              <a:t>multiply back to revenue's change</a:t>
-            </a:r>
-          </a:p>
-        </p:txBody>
-      </p:sp>
-      <p:sp>
-        <p:nvSpPr>
-          <p:cNvPr id="25" name="Rectangle 24"/>
-          <p:cNvSpPr/>
-          <p:nvPr/>
-        </p:nvSpPr>
-        <p:spPr>
-          <a:xfrm>
-            <a:off x="9084335" y="3145536"/>
-            <a:ext cx="2577007" cy="10972"/>
-          </a:xfrm>
-          <a:prstGeom prst="rect">
-            <a:avLst/>
-          </a:prstGeom>
-          <a:solidFill>
-            <a:srgbClr val="E4E1F1"/>
-          </a:solidFill>
-          <a:ln>
-            <a:noFill/>
-          </a:ln>
-          <a:effectLst/>
-        </p:spPr>
-        <p:style>
-          <a:lnRef idx="1">
-            <a:schemeClr val="accent1"/>
-          </a:lnRef>
-          <a:fillRef idx="3">
-            <a:schemeClr val="accent1"/>
-          </a:fillRef>
-          <a:effectRef idx="2">
-            <a:schemeClr val="accent1"/>
-          </a:effectRef>
-          <a:fontRef idx="minor">
-            <a:schemeClr val="lt1"/>
-          </a:fontRef>
-        </p:style>
-        <p:txBody>
-          <a:bodyPr rtlCol="0" anchor="ctr" wrap="square"/>
-          <a:lstStyle/>
-          <a:p>
-            <a:pPr algn="ctr"/>
-          </a:p>
-        </p:txBody>
-      </p:sp>
-      <p:sp>
-        <p:nvSpPr>
-          <p:cNvPr id="26" name="Oval 25"/>
+      <p:graphicFrame>
+        <p:nvGraphicFramePr>
+          <p:cNvPr id="10" name="Table 9"/>
+          <p:cNvGraphicFramePr>
+            <a:graphicFrameLocks noGrp="1"/>
+          </p:cNvGraphicFramePr>
+          <p:nvPr/>
+        </p:nvGraphicFramePr>
+        <p:xfrm>
+          <a:off x="530352" y="1956816"/>
+          <a:ext cx="11130990" cy="1849120"/>
+        </p:xfrm>
+        <a:graphic>
+          <a:graphicData uri="http://schemas.openxmlformats.org/drawingml/2006/table">
+            <a:tbl>
+              <a:tblPr firstRow="0" bandRow="0">
+                <a:tableStyleId>{2D5ABB26-0587-4C30-8999-92F81FD0307C}</a:tableStyleId>
+              </a:tblPr>
+              <a:tblGrid>
+                <a:gridCol w="2485016"/>
+                <a:gridCol w="8645974"/>
+              </a:tblGrid>
+              <a:tr h="369824">
+                <a:tc>
+                  <a:txBody>
+                    <a:bodyPr/>
+                    <a:lstStyle/>
+                    <a:p>
+                      <a:r>
+                        <a:rPr sz="1450" b="1" i="0">
+                          <a:solidFill>
+                            <a:srgbClr val="FFFFFF"/>
+                          </a:solidFill>
+                          <a:latin typeface="Calibri"/>
+                        </a:rPr>
+                        <a:t>The check</a:t>
+                      </a:r>
+                    </a:p>
+                  </a:txBody>
+                  <a:tcPr marL="101600" marR="101600" marT="38100" marB="38100" anchor="ctr">
+                    <a:solidFill>
+                      <a:srgbClr val="1A0F5C"/>
+                    </a:solidFill>
+                  </a:tcPr>
+                </a:tc>
+                <a:tc>
+                  <a:txBody>
+                    <a:bodyPr/>
+                    <a:lstStyle/>
+                    <a:p>
+                      <a:r>
+                        <a:rPr sz="1450" b="1" i="0">
+                          <a:solidFill>
+                            <a:srgbClr val="FFFFFF"/>
+                          </a:solidFill>
+                          <a:latin typeface="Calibri"/>
+                        </a:rPr>
+                        <a:t>It passes when</a:t>
+                      </a:r>
+                    </a:p>
+                  </a:txBody>
+                  <a:tcPr marL="101600" marR="101600" marT="38100" marB="38100" anchor="ctr">
+                    <a:solidFill>
+                      <a:srgbClr val="1A0F5C"/>
+                    </a:solidFill>
+                  </a:tcPr>
+                </a:tc>
+              </a:tr>
+              <a:tr h="369824">
+                <a:tc>
+                  <a:txBody>
+                    <a:bodyPr/>
+                    <a:lstStyle/>
+                    <a:p>
+                      <a:r>
+                        <a:rPr sz="1400" b="0" i="0">
+                          <a:solidFill>
+                            <a:srgbClr val="1A1440"/>
+                          </a:solidFill>
+                          <a:latin typeface="Calibri"/>
+                        </a:rPr>
+                        <a:t>Rows</a:t>
+                      </a:r>
+                    </a:p>
+                  </a:txBody>
+                  <a:tcPr marL="101600" marR="101600" marT="38100" marB="38100" anchor="ctr">
+                    <a:solidFill>
+                      <a:srgbClr val="FFFFFF"/>
+                    </a:solidFill>
+                  </a:tcPr>
+                </a:tc>
+                <a:tc>
+                  <a:txBody>
+                    <a:bodyPr/>
+                    <a:lstStyle/>
+                    <a:p>
+                      <a:r>
+                        <a:rPr sz="1400" b="0" i="0">
+                          <a:solidFill>
+                            <a:srgbClr val="1A1440"/>
+                          </a:solidFill>
+                          <a:latin typeface="Calibri"/>
+                        </a:rPr>
+                        <a:t>The rows kept plus the rows set aside equal the 201 rows the ERP sent.</a:t>
+                      </a:r>
+                    </a:p>
+                  </a:txBody>
+                  <a:tcPr marL="101600" marR="101600" marT="38100" marB="38100" anchor="ctr">
+                    <a:solidFill>
+                      <a:srgbClr val="FFFFFF"/>
+                    </a:solidFill>
+                  </a:tcPr>
+                </a:tc>
+              </a:tr>
+              <a:tr h="369824">
+                <a:tc>
+                  <a:txBody>
+                    <a:bodyPr/>
+                    <a:lstStyle/>
+                    <a:p>
+                      <a:r>
+                        <a:rPr sz="1400" b="0" i="0">
+                          <a:solidFill>
+                            <a:srgbClr val="1A1440"/>
+                          </a:solidFill>
+                          <a:latin typeface="Calibri"/>
+                        </a:rPr>
+                        <a:t>Q1</a:t>
+                      </a:r>
+                    </a:p>
+                  </a:txBody>
+                  <a:tcPr marL="101600" marR="101600" marT="38100" marB="38100" anchor="ctr">
+                    <a:solidFill>
+                      <a:srgbClr val="F4F2FA"/>
+                    </a:solidFill>
+                  </a:tcPr>
+                </a:tc>
+                <a:tc>
+                  <a:txBody>
+                    <a:bodyPr/>
+                    <a:lstStyle/>
+                    <a:p>
+                      <a:r>
+                        <a:rPr sz="1400" b="0" i="0">
+                          <a:solidFill>
+                            <a:srgbClr val="1A1440"/>
+                          </a:solidFill>
+                          <a:latin typeface="Calibri"/>
+                        </a:rPr>
+                        <a:t>Q1 on the kept rows equals the books, Rs 1,90,00,000, to the rupee.</a:t>
+                      </a:r>
+                    </a:p>
+                  </a:txBody>
+                  <a:tcPr marL="101600" marR="101600" marT="38100" marB="38100" anchor="ctr">
+                    <a:solidFill>
+                      <a:srgbClr val="F4F2FA"/>
+                    </a:solidFill>
+                  </a:tcPr>
+                </a:tc>
+              </a:tr>
+              <a:tr h="369824">
+                <a:tc>
+                  <a:txBody>
+                    <a:bodyPr/>
+                    <a:lstStyle/>
+                    <a:p>
+                      <a:r>
+                        <a:rPr sz="1400" b="0" i="0">
+                          <a:solidFill>
+                            <a:srgbClr val="1A1440"/>
+                          </a:solidFill>
+                          <a:latin typeface="Calibri"/>
+                        </a:rPr>
+                        <a:t>Your rupee test</a:t>
+                      </a:r>
+                    </a:p>
+                  </a:txBody>
+                  <a:tcPr marL="101600" marR="101600" marT="38100" marB="38100" anchor="ctr">
+                    <a:solidFill>
+                      <a:srgbClr val="FFFFFF"/>
+                    </a:solidFill>
+                  </a:tcPr>
+                </a:tc>
+                <a:tc>
+                  <a:txBody>
+                    <a:bodyPr/>
+                    <a:lstStyle/>
+                    <a:p>
+                      <a:r>
+                        <a:rPr sz="1400" b="0" i="0">
+                          <a:solidFill>
+                            <a:srgbClr val="1A1440"/>
+                          </a:solidFill>
+                          <a:latin typeface="Calibri"/>
+                        </a:rPr>
+                        <a:t>It passes on your pass and fails on the colleague's, which kept the first copy.</a:t>
+                      </a:r>
+                    </a:p>
+                  </a:txBody>
+                  <a:tcPr marL="101600" marR="101600" marT="38100" marB="38100" anchor="ctr">
+                    <a:solidFill>
+                      <a:srgbClr val="FFFFFF"/>
+                    </a:solidFill>
+                  </a:tcPr>
+                </a:tc>
+              </a:tr>
+              <a:tr h="369824">
+                <a:tc>
+                  <a:txBody>
+                    <a:bodyPr/>
+                    <a:lstStyle/>
+                    <a:p>
+                      <a:r>
+                        <a:rPr sz="1400" b="0" i="0">
+                          <a:solidFill>
+                            <a:srgbClr val="1A1440"/>
+                          </a:solidFill>
+                          <a:latin typeface="Calibri"/>
+                        </a:rPr>
+                        <a:t>Monday's tree</a:t>
+                      </a:r>
+                    </a:p>
+                  </a:txBody>
+                  <a:tcPr marL="101600" marR="101600" marT="38100" marB="38100" anchor="ctr">
+                    <a:solidFill>
+                      <a:srgbClr val="F4F2FA"/>
+                    </a:solidFill>
+                  </a:tcPr>
+                </a:tc>
+                <a:tc>
+                  <a:txBody>
+                    <a:bodyPr/>
+                    <a:lstStyle/>
+                    <a:p>
+                      <a:r>
+                        <a:rPr sz="1400" b="0" i="0">
+                          <a:solidFill>
+                            <a:srgbClr val="1A1440"/>
+                          </a:solidFill>
+                          <a:latin typeface="Calibri"/>
+                        </a:rPr>
+                        <a:t>Its three branches multiply back to revenue's change, Q2 over Q1.</a:t>
+                      </a:r>
+                    </a:p>
+                  </a:txBody>
+                  <a:tcPr marL="101600" marR="101600" marT="38100" marB="38100" anchor="ctr">
+                    <a:solidFill>
+                      <a:srgbClr val="F4F2FA"/>
+                    </a:solidFill>
+                  </a:tcPr>
+                </a:tc>
+              </a:tr>
+            </a:tbl>
+          </a:graphicData>
+        </a:graphic>
+      </p:graphicFrame>
+      <p:sp>
+        <p:nvSpPr>
+          <p:cNvPr id="11" name="Oval 10"/>
           <p:cNvSpPr/>
           <p:nvPr/>
         </p:nvSpPr>
@@ -22049,7 +21719,7 @@
       </p:sp>
       <p:sp>
         <p:nvSpPr>
-          <p:cNvPr id="27" name="TextBox 26"/>
+          <p:cNvPr id="12" name="TextBox 11"/>
           <p:cNvSpPr txBox="1"/>
           <p:nvPr/>
         </p:nvSpPr>
@@ -22084,7 +21754,7 @@
       </p:sp>
       <p:sp>
         <p:nvSpPr>
-          <p:cNvPr id="28" name="Oval 27"/>
+          <p:cNvPr id="13" name="Oval 12"/>
           <p:cNvSpPr/>
           <p:nvPr/>
         </p:nvSpPr>
@@ -22128,7 +21798,7 @@
       </p:sp>
       <p:sp>
         <p:nvSpPr>
-          <p:cNvPr id="29" name="TextBox 28"/>
+          <p:cNvPr id="14" name="TextBox 13"/>
           <p:cNvSpPr txBox="1"/>
           <p:nvPr/>
         </p:nvSpPr>
@@ -22163,7 +21833,7 @@
       </p:sp>
       <p:sp>
         <p:nvSpPr>
-          <p:cNvPr id="30" name="Oval 29"/>
+          <p:cNvPr id="15" name="Oval 14"/>
           <p:cNvSpPr/>
           <p:nvPr/>
         </p:nvSpPr>
@@ -22207,7 +21877,7 @@
       </p:sp>
       <p:sp>
         <p:nvSpPr>
-          <p:cNvPr id="31" name="TextBox 30"/>
+          <p:cNvPr id="16" name="TextBox 15"/>
           <p:cNvSpPr txBox="1"/>
           <p:nvPr/>
         </p:nvSpPr>
@@ -22242,7 +21912,7 @@
       </p:sp>
       <p:sp>
         <p:nvSpPr>
-          <p:cNvPr id="32" name="Oval 31"/>
+          <p:cNvPr id="17" name="Oval 16"/>
           <p:cNvSpPr/>
           <p:nvPr/>
         </p:nvSpPr>
@@ -22286,7 +21956,7 @@
       </p:sp>
       <p:sp>
         <p:nvSpPr>
-          <p:cNvPr id="33" name="TextBox 32"/>
+          <p:cNvPr id="18" name="TextBox 17"/>
           <p:cNvSpPr txBox="1"/>
           <p:nvPr/>
         </p:nvSpPr>
@@ -22321,7 +21991,7 @@
       </p:sp>
       <p:sp>
         <p:nvSpPr>
-          <p:cNvPr id="34" name="Oval 33"/>
+          <p:cNvPr id="19" name="Oval 18"/>
           <p:cNvSpPr/>
           <p:nvPr/>
         </p:nvSpPr>
@@ -22365,7 +22035,7 @@
       </p:sp>
       <p:sp>
         <p:nvSpPr>
-          <p:cNvPr id="35" name="TextBox 34"/>
+          <p:cNvPr id="20" name="TextBox 19"/>
           <p:cNvSpPr txBox="1"/>
           <p:nvPr/>
         </p:nvSpPr>
@@ -22400,7 +22070,7 @@
       </p:sp>
       <p:sp>
         <p:nvSpPr>
-          <p:cNvPr id="36" name="Oval 35"/>
+          <p:cNvPr id="21" name="Oval 20"/>
           <p:cNvSpPr/>
           <p:nvPr/>
         </p:nvSpPr>
@@ -22444,7 +22114,7 @@
       </p:sp>
       <p:sp>
         <p:nvSpPr>
-          <p:cNvPr id="37" name="TextBox 36"/>
+          <p:cNvPr id="22" name="TextBox 21"/>
           <p:cNvSpPr txBox="1"/>
           <p:nvPr/>
         </p:nvSpPr>
@@ -22479,7 +22149,7 @@
       </p:sp>
       <p:sp>
         <p:nvSpPr>
-          <p:cNvPr id="38" name="TextBox 37"/>
+          <p:cNvPr id="23" name="TextBox 22"/>
           <p:cNvSpPr txBox="1"/>
           <p:nvPr/>
         </p:nvSpPr>
@@ -26283,7 +25953,7 @@
                 </a:solidFill>
                 <a:latin typeface="Georgia"/>
               </a:rPr>
-              <a:t>Answer it from the log, one question at a time</a:t>
+              <a:t>Answer: why 14, which 14, then the rupees</a:t>
             </a:r>
           </a:p>
         </p:txBody>
@@ -26421,7 +26091,7 @@
       </p:sp>
       <p:pic>
         <p:nvPicPr>
-          <p:cNvPr id="11" name="mermaid diagram" descr="c0e7475c34b5802a.png"/>
+          <p:cNvPr id="11" name="mermaid diagram" descr="43263b356c205527.png"/>
           <p:cNvPicPr>
             <a:picLocks noChangeAspect="1"/>
           </p:cNvPicPr>
@@ -30128,7 +29798,7 @@
                 </a:solidFill>
                 <a:latin typeface="Georgia"/>
               </a:rPr>
-              <a:t>Answer the row's five first: rule, number, check</a:t>
+              <a:t>Answer: every screen asks these five first</a:t>
             </a:r>
           </a:p>
         </p:txBody>
@@ -34918,7 +34588,7 @@
       </p:sp>
       <p:pic>
         <p:nvPicPr>
-          <p:cNvPr id="11" name="mermaid diagram" descr="65a47bb5060cb393.png"/>
+          <p:cNvPr id="11" name="mermaid diagram" descr="83c4a5aebcc59828.png"/>
           <p:cNvPicPr>
             <a:picLocks noChangeAspect="1"/>
           </p:cNvPicPr>
@@ -34933,7 +34603,7 @@
         <p:spPr>
           <a:xfrm>
             <a:off x="2152497" y="3413760"/>
-            <a:ext cx="7886700" cy="1100137"/>
+            <a:ext cx="7886700" cy="1600200"/>
           </a:xfrm>
           <a:prstGeom prst="rect">
             <a:avLst/>
@@ -35921,7 +35591,7 @@
                           </a:solidFill>
                           <a:latin typeface="Calibri"/>
                         </a:rPr>
-                        <a:t>A failure is logged, never turned into a number; large is not wrong.</a:t>
+                        <a:t>A failure is logged, never turned into a number.</a:t>
                       </a:r>
                     </a:p>
                   </a:txBody>
@@ -35967,7 +35637,7 @@
                           </a:solidFill>
                           <a:latin typeface="Calibri"/>
                         </a:rPr>
-                        <a:t>Reconcile twice, in rows and in rupees, to the books.</a:t>
+                        <a:t>Recompute what you reported, and say what changed, the smaller number first.</a:t>
                       </a:r>
                     </a:p>
                   </a:txBody>
@@ -36013,7 +35683,7 @@
                           </a:solidFill>
                           <a:latin typeface="Calibri"/>
                         </a:rPr>
-                        <a:t>Recompute what you reported, and say what changed, the smaller number first.</a:t>
+                        <a:t>Reconcile twice, in rows and in rupees, to the books, and hand over a log a stranger can replay.</a:t>
                       </a:r>
                     </a:p>
                   </a:txBody>
